--- a/presentation/AlphaHoldem_RL_deck.pptx
+++ b/presentation/AlphaHoldem_RL_deck.pptx
@@ -16,13 +16,9 @@
     <p:sldId id="264" r:id="rId10"/>
     <p:sldId id="265" r:id="rId11"/>
     <p:sldId id="266" r:id="rId12"/>
-    <p:sldId id="267" r:id="rId13"/>
-    <p:sldId id="268" r:id="rId14"/>
-    <p:sldId id="269" r:id="rId15"/>
-    <p:sldId id="270" r:id="rId16"/>
   </p:sldIdLst>
   <p:notesMasterIdLst>
-    <p:notesMasterId r:id="rId17"/>
+    <p:notesMasterId r:id="rId13"/>
   </p:notesMasterIdLst>
   <p:sldSz cx="12188952" cy="6858000"/>
   <p:notesSz cx="6858000" cy="12188952"/>
@@ -716,358 +712,6 @@
             <a:fld id="{F7021451-1387-4CA6-816F-3879F97B5CBC}" type="slidenum">
               <a:rPr lang="en-US"/>
               <a:t>11</a:t>
-            </a:fld>
-            <a:endParaRPr lang="en-US"/>
-          </a:p>
-        </p:txBody>
-      </p:sp>
-    </p:spTree>
-    <p:extLst>
-      <p:ext uri="{BB962C8B-B14F-4D97-AF65-F5344CB8AC3E}">
-        <p14:creationId xmlns:p14="http://schemas.microsoft.com/office/powerpoint/2010/main" val="1024086991"/>
-      </p:ext>
-    </p:extLst>
-  </p:cSld>
-  <p:clrMapOvr>
-    <a:masterClrMapping/>
-  </p:clrMapOvr>
-</p:notes>
-</file>
-
-<file path=ppt/notesSlides/notesSlide12.xml><?xml version="1.0" encoding="utf-8"?>
-<p:notes xmlns:a="http://schemas.openxmlformats.org/drawingml/2006/main" xmlns:r="http://schemas.openxmlformats.org/officeDocument/2006/relationships" xmlns:p="http://schemas.openxmlformats.org/presentationml/2006/main">
-  <p:cSld>
-    <p:spTree>
-      <p:nvGrpSpPr>
-        <p:cNvPr id="1" name=""/>
-        <p:cNvGrpSpPr/>
-        <p:nvPr/>
-      </p:nvGrpSpPr>
-      <p:grpSpPr>
-        <a:xfrm>
-          <a:off x="0" y="0"/>
-          <a:ext cx="0" cy="0"/>
-          <a:chOff x="0" y="0"/>
-          <a:chExt cx="0" cy="0"/>
-        </a:xfrm>
-      </p:grpSpPr>
-      <p:sp>
-        <p:nvSpPr>
-          <p:cNvPr id="2" name="Slide Image Placeholder 1"/>
-          <p:cNvSpPr>
-            <a:spLocks noGrp="1" noRot="1" noChangeAspect="1"/>
-          </p:cNvSpPr>
-          <p:nvPr>
-            <p:ph type="sldImg"/>
-          </p:nvPr>
-        </p:nvSpPr>
-        <p:spPr/>
-      </p:sp>
-      <p:sp>
-        <p:nvSpPr>
-          <p:cNvPr id="3" name="Notes Placeholder 2"/>
-          <p:cNvSpPr>
-            <a:spLocks noGrp="1"/>
-          </p:cNvSpPr>
-          <p:nvPr>
-            <p:ph type="body" idx="1"/>
-          </p:nvPr>
-        </p:nvSpPr>
-        <p:spPr/>
-        <p:txBody>
-          <a:bodyPr/>
-          <a:lstStyle/>
-          <a:p>
-            <a:r>
-              <a:rPr lang="en-US" dirty="0"/>
-              <a:t/>
-            </a:r>
-            <a:endParaRPr lang="en-US" dirty="0"/>
-          </a:p>
-        </p:txBody>
-      </p:sp>
-      <p:sp>
-        <p:nvSpPr>
-          <p:cNvPr id="4" name="Slide Number Placeholder 3"/>
-          <p:cNvSpPr>
-            <a:spLocks noGrp="1"/>
-          </p:cNvSpPr>
-          <p:nvPr>
-            <p:ph type="sldNum" sz="quarter" idx="10"/>
-          </p:nvPr>
-        </p:nvSpPr>
-        <p:spPr/>
-        <p:txBody>
-          <a:bodyPr/>
-          <a:lstStyle/>
-          <a:p>
-            <a:fld id="{F7021451-1387-4CA6-816F-3879F97B5CBC}" type="slidenum">
-              <a:rPr lang="en-US"/>
-              <a:t>12</a:t>
-            </a:fld>
-            <a:endParaRPr lang="en-US"/>
-          </a:p>
-        </p:txBody>
-      </p:sp>
-    </p:spTree>
-    <p:extLst>
-      <p:ext uri="{BB962C8B-B14F-4D97-AF65-F5344CB8AC3E}">
-        <p14:creationId xmlns:p14="http://schemas.microsoft.com/office/powerpoint/2010/main" val="1024086991"/>
-      </p:ext>
-    </p:extLst>
-  </p:cSld>
-  <p:clrMapOvr>
-    <a:masterClrMapping/>
-  </p:clrMapOvr>
-</p:notes>
-</file>
-
-<file path=ppt/notesSlides/notesSlide13.xml><?xml version="1.0" encoding="utf-8"?>
-<p:notes xmlns:a="http://schemas.openxmlformats.org/drawingml/2006/main" xmlns:r="http://schemas.openxmlformats.org/officeDocument/2006/relationships" xmlns:p="http://schemas.openxmlformats.org/presentationml/2006/main">
-  <p:cSld>
-    <p:spTree>
-      <p:nvGrpSpPr>
-        <p:cNvPr id="1" name=""/>
-        <p:cNvGrpSpPr/>
-        <p:nvPr/>
-      </p:nvGrpSpPr>
-      <p:grpSpPr>
-        <a:xfrm>
-          <a:off x="0" y="0"/>
-          <a:ext cx="0" cy="0"/>
-          <a:chOff x="0" y="0"/>
-          <a:chExt cx="0" cy="0"/>
-        </a:xfrm>
-      </p:grpSpPr>
-      <p:sp>
-        <p:nvSpPr>
-          <p:cNvPr id="2" name="Slide Image Placeholder 1"/>
-          <p:cNvSpPr>
-            <a:spLocks noGrp="1" noRot="1" noChangeAspect="1"/>
-          </p:cNvSpPr>
-          <p:nvPr>
-            <p:ph type="sldImg"/>
-          </p:nvPr>
-        </p:nvSpPr>
-        <p:spPr/>
-      </p:sp>
-      <p:sp>
-        <p:nvSpPr>
-          <p:cNvPr id="3" name="Notes Placeholder 2"/>
-          <p:cNvSpPr>
-            <a:spLocks noGrp="1"/>
-          </p:cNvSpPr>
-          <p:nvPr>
-            <p:ph type="body" idx="1"/>
-          </p:nvPr>
-        </p:nvSpPr>
-        <p:spPr/>
-        <p:txBody>
-          <a:bodyPr/>
-          <a:lstStyle/>
-          <a:p>
-            <a:r>
-              <a:rPr lang="en-US" dirty="0"/>
-              <a:t/>
-            </a:r>
-            <a:endParaRPr lang="en-US" dirty="0"/>
-          </a:p>
-        </p:txBody>
-      </p:sp>
-      <p:sp>
-        <p:nvSpPr>
-          <p:cNvPr id="4" name="Slide Number Placeholder 3"/>
-          <p:cNvSpPr>
-            <a:spLocks noGrp="1"/>
-          </p:cNvSpPr>
-          <p:nvPr>
-            <p:ph type="sldNum" sz="quarter" idx="10"/>
-          </p:nvPr>
-        </p:nvSpPr>
-        <p:spPr/>
-        <p:txBody>
-          <a:bodyPr/>
-          <a:lstStyle/>
-          <a:p>
-            <a:fld id="{F7021451-1387-4CA6-816F-3879F97B5CBC}" type="slidenum">
-              <a:rPr lang="en-US"/>
-              <a:t>13</a:t>
-            </a:fld>
-            <a:endParaRPr lang="en-US"/>
-          </a:p>
-        </p:txBody>
-      </p:sp>
-    </p:spTree>
-    <p:extLst>
-      <p:ext uri="{BB962C8B-B14F-4D97-AF65-F5344CB8AC3E}">
-        <p14:creationId xmlns:p14="http://schemas.microsoft.com/office/powerpoint/2010/main" val="1024086991"/>
-      </p:ext>
-    </p:extLst>
-  </p:cSld>
-  <p:clrMapOvr>
-    <a:masterClrMapping/>
-  </p:clrMapOvr>
-</p:notes>
-</file>
-
-<file path=ppt/notesSlides/notesSlide14.xml><?xml version="1.0" encoding="utf-8"?>
-<p:notes xmlns:a="http://schemas.openxmlformats.org/drawingml/2006/main" xmlns:r="http://schemas.openxmlformats.org/officeDocument/2006/relationships" xmlns:p="http://schemas.openxmlformats.org/presentationml/2006/main">
-  <p:cSld>
-    <p:spTree>
-      <p:nvGrpSpPr>
-        <p:cNvPr id="1" name=""/>
-        <p:cNvGrpSpPr/>
-        <p:nvPr/>
-      </p:nvGrpSpPr>
-      <p:grpSpPr>
-        <a:xfrm>
-          <a:off x="0" y="0"/>
-          <a:ext cx="0" cy="0"/>
-          <a:chOff x="0" y="0"/>
-          <a:chExt cx="0" cy="0"/>
-        </a:xfrm>
-      </p:grpSpPr>
-      <p:sp>
-        <p:nvSpPr>
-          <p:cNvPr id="2" name="Slide Image Placeholder 1"/>
-          <p:cNvSpPr>
-            <a:spLocks noGrp="1" noRot="1" noChangeAspect="1"/>
-          </p:cNvSpPr>
-          <p:nvPr>
-            <p:ph type="sldImg"/>
-          </p:nvPr>
-        </p:nvSpPr>
-        <p:spPr/>
-      </p:sp>
-      <p:sp>
-        <p:nvSpPr>
-          <p:cNvPr id="3" name="Notes Placeholder 2"/>
-          <p:cNvSpPr>
-            <a:spLocks noGrp="1"/>
-          </p:cNvSpPr>
-          <p:nvPr>
-            <p:ph type="body" idx="1"/>
-          </p:nvPr>
-        </p:nvSpPr>
-        <p:spPr/>
-        <p:txBody>
-          <a:bodyPr/>
-          <a:lstStyle/>
-          <a:p>
-            <a:r>
-              <a:rPr lang="en-US" dirty="0"/>
-              <a:t/>
-            </a:r>
-            <a:endParaRPr lang="en-US" dirty="0"/>
-          </a:p>
-        </p:txBody>
-      </p:sp>
-      <p:sp>
-        <p:nvSpPr>
-          <p:cNvPr id="4" name="Slide Number Placeholder 3"/>
-          <p:cNvSpPr>
-            <a:spLocks noGrp="1"/>
-          </p:cNvSpPr>
-          <p:nvPr>
-            <p:ph type="sldNum" sz="quarter" idx="10"/>
-          </p:nvPr>
-        </p:nvSpPr>
-        <p:spPr/>
-        <p:txBody>
-          <a:bodyPr/>
-          <a:lstStyle/>
-          <a:p>
-            <a:fld id="{F7021451-1387-4CA6-816F-3879F97B5CBC}" type="slidenum">
-              <a:rPr lang="en-US"/>
-              <a:t>14</a:t>
-            </a:fld>
-            <a:endParaRPr lang="en-US"/>
-          </a:p>
-        </p:txBody>
-      </p:sp>
-    </p:spTree>
-    <p:extLst>
-      <p:ext uri="{BB962C8B-B14F-4D97-AF65-F5344CB8AC3E}">
-        <p14:creationId xmlns:p14="http://schemas.microsoft.com/office/powerpoint/2010/main" val="1024086991"/>
-      </p:ext>
-    </p:extLst>
-  </p:cSld>
-  <p:clrMapOvr>
-    <a:masterClrMapping/>
-  </p:clrMapOvr>
-</p:notes>
-</file>
-
-<file path=ppt/notesSlides/notesSlide15.xml><?xml version="1.0" encoding="utf-8"?>
-<p:notes xmlns:a="http://schemas.openxmlformats.org/drawingml/2006/main" xmlns:r="http://schemas.openxmlformats.org/officeDocument/2006/relationships" xmlns:p="http://schemas.openxmlformats.org/presentationml/2006/main">
-  <p:cSld>
-    <p:spTree>
-      <p:nvGrpSpPr>
-        <p:cNvPr id="1" name=""/>
-        <p:cNvGrpSpPr/>
-        <p:nvPr/>
-      </p:nvGrpSpPr>
-      <p:grpSpPr>
-        <a:xfrm>
-          <a:off x="0" y="0"/>
-          <a:ext cx="0" cy="0"/>
-          <a:chOff x="0" y="0"/>
-          <a:chExt cx="0" cy="0"/>
-        </a:xfrm>
-      </p:grpSpPr>
-      <p:sp>
-        <p:nvSpPr>
-          <p:cNvPr id="2" name="Slide Image Placeholder 1"/>
-          <p:cNvSpPr>
-            <a:spLocks noGrp="1" noRot="1" noChangeAspect="1"/>
-          </p:cNvSpPr>
-          <p:nvPr>
-            <p:ph type="sldImg"/>
-          </p:nvPr>
-        </p:nvSpPr>
-        <p:spPr/>
-      </p:sp>
-      <p:sp>
-        <p:nvSpPr>
-          <p:cNvPr id="3" name="Notes Placeholder 2"/>
-          <p:cNvSpPr>
-            <a:spLocks noGrp="1"/>
-          </p:cNvSpPr>
-          <p:nvPr>
-            <p:ph type="body" idx="1"/>
-          </p:nvPr>
-        </p:nvSpPr>
-        <p:spPr/>
-        <p:txBody>
-          <a:bodyPr/>
-          <a:lstStyle/>
-          <a:p>
-            <a:r>
-              <a:rPr lang="en-US" dirty="0"/>
-              <a:t/>
-            </a:r>
-            <a:endParaRPr lang="en-US" dirty="0"/>
-          </a:p>
-        </p:txBody>
-      </p:sp>
-      <p:sp>
-        <p:nvSpPr>
-          <p:cNvPr id="4" name="Slide Number Placeholder 3"/>
-          <p:cNvSpPr>
-            <a:spLocks noGrp="1"/>
-          </p:cNvSpPr>
-          <p:nvPr>
-            <p:ph type="sldNum" sz="quarter" idx="10"/>
-          </p:nvPr>
-        </p:nvSpPr>
-        <p:spPr/>
-        <p:txBody>
-          <a:bodyPr/>
-          <a:lstStyle/>
-          <a:p>
-            <a:fld id="{F7021451-1387-4CA6-816F-3879F97B5CBC}" type="slidenum">
-              <a:rPr lang="en-US"/>
-              <a:t>15</a:t>
             </a:fld>
             <a:endParaRPr lang="en-US"/>
           </a:p>
@@ -2136,7 +1780,7 @@
         </p:nvSpPr>
         <p:spPr>
           <a:xfrm>
-            <a:off x="914400" y="1325880"/>
+            <a:off x="914400" y="1554480"/>
             <a:ext cx="10332720" cy="365760"/>
           </a:xfrm>
           <a:prstGeom prst="rect">
@@ -2175,8 +1819,8 @@
         </p:nvSpPr>
         <p:spPr>
           <a:xfrm>
-            <a:off x="731520" y="1828800"/>
-            <a:ext cx="10698480" cy="1828800"/>
+            <a:off x="731520" y="2103120"/>
+            <a:ext cx="10698480" cy="1737360"/>
           </a:xfrm>
           <a:prstGeom prst="rect">
             <a:avLst/>
@@ -2195,7 +1839,7 @@
               <a:buNone/>
             </a:pPr>
             <a:r>
-              <a:rPr lang="en-US" sz="4600" b="1" dirty="0">
+              <a:rPr lang="en-US" sz="4200" b="1" dirty="0">
                 <a:solidFill>
                   <a:srgbClr val="FFFFFF"/>
                 </a:solidFill>
@@ -2203,9 +1847,9 @@
                 <a:ea typeface="Georgia" pitchFamily="34" charset="-122"/>
                 <a:cs typeface="Georgia" pitchFamily="34" charset="-120"/>
               </a:rPr>
-              <a:t>Knowing whether it was good</a:t>
-            </a:r>
-            <a:endParaRPr lang="en-US" sz="4600" dirty="0"/>
+              <a:t>AlphaHoldem-inspired self-play RL</a:t>
+            </a:r>
+            <a:endParaRPr lang="en-US" sz="4200" dirty="0"/>
           </a:p>
           <a:p>
             <a:pPr algn="ctr" indent="0" marL="0">
@@ -2215,7 +1859,7 @@
               <a:buNone/>
             </a:pPr>
             <a:r>
-              <a:rPr lang="en-US" sz="4600" b="1" dirty="0">
+              <a:rPr lang="en-US" sz="4200" b="1" dirty="0">
                 <a:solidFill>
                   <a:srgbClr val="FFFFFF"/>
                 </a:solidFill>
@@ -2223,9 +1867,9 @@
                 <a:ea typeface="Georgia" pitchFamily="34" charset="-122"/>
                 <a:cs typeface="Georgia" pitchFamily="34" charset="-120"/>
               </a:rPr>
-              <a:t>was the hard half</a:t>
-            </a:r>
-            <a:endParaRPr lang="en-US" sz="4600" dirty="0"/>
+              <a:t>for Heads-Up No-Limit Hold'em</a:t>
+            </a:r>
+            <a:endParaRPr lang="en-US" sz="4200" dirty="0"/>
           </a:p>
         </p:txBody>
       </p:sp>
@@ -2237,8 +1881,8 @@
         </p:nvSpPr>
         <p:spPr>
           <a:xfrm>
-            <a:off x="1463040" y="3886200"/>
-            <a:ext cx="9235440" cy="914400"/>
+            <a:off x="1097280" y="4069080"/>
+            <a:ext cx="9966960" cy="640080"/>
           </a:xfrm>
           <a:prstGeom prst="rect">
             <a:avLst/>
@@ -2257,7 +1901,7 @@
               <a:buNone/>
             </a:pPr>
             <a:r>
-              <a:rPr lang="en-US" sz="1750" i="1" dirty="0">
+              <a:rPr lang="en-US" sz="1600" dirty="0">
                 <a:solidFill>
                   <a:srgbClr val="C9D6EC"/>
                 </a:solidFill>
@@ -2265,29 +1909,9 @@
                 <a:ea typeface="Calibri" pitchFamily="34" charset="-122"/>
                 <a:cs typeface="Calibri" pitchFamily="34" charset="-120"/>
               </a:rPr>
-              <a:t>An AlphaHoldem-inspired self-play RL agent for Heads-Up No-Limit Hold'em —</a:t>
-            </a:r>
-            <a:endParaRPr lang="en-US" sz="1750" dirty="0"/>
-          </a:p>
-          <a:p>
-            <a:pPr algn="ctr" indent="0" marL="0">
-              <a:lnSpc>
-                <a:spcPct val="110000"/>
-              </a:lnSpc>
-              <a:buNone/>
-            </a:pPr>
-            <a:r>
-              <a:rPr lang="en-US" sz="1750" i="1" dirty="0">
-                <a:solidFill>
-                  <a:srgbClr val="C9D6EC"/>
-                </a:solidFill>
-                <a:latin typeface="Calibri" pitchFamily="34" charset="0"/>
-                <a:ea typeface="Calibri" pitchFamily="34" charset="-122"/>
-                <a:cs typeface="Calibri" pitchFamily="34" charset="-120"/>
-              </a:rPr>
-              <a:t>and the evaluation discipline that kept catching my “better” models being worse.</a:t>
-            </a:r>
-            <a:endParaRPr lang="en-US" sz="1750" dirty="0"/>
+              <a:t>From-scratch PyTorch self-play agent  ·  evaluation harness with behavior gates  ·  exact-exploitability study on Leduc</a:t>
+            </a:r>
+            <a:endParaRPr lang="en-US" sz="1600" dirty="0"/>
           </a:p>
         </p:txBody>
       </p:sp>
@@ -2299,7 +1923,7 @@
         </p:nvSpPr>
         <p:spPr>
           <a:xfrm>
-            <a:off x="914400" y="5440680"/>
+            <a:off x="914400" y="5349240"/>
             <a:ext cx="10332720" cy="365760"/>
           </a:xfrm>
           <a:prstGeom prst="rect">
@@ -2324,7 +1948,7 @@
                 <a:ea typeface="Calibri" pitchFamily="34" charset="-122"/>
                 <a:cs typeface="Calibri" pitchFamily="34" charset="-120"/>
               </a:rPr>
-              <a:t>Sanil Desai     ·     PyTorch · OpenSpiel     ·     trained on a university GPU cluster</a:t>
+              <a:t>Sanil Desai     ·     PyTorch · OpenSpiel     ·     single GPU</a:t>
             </a:r>
             <a:endParaRPr lang="en-US" sz="1350" dirty="0"/>
           </a:p>
@@ -2377,7 +2001,7 @@
             <a:avLst/>
           </a:prstGeom>
           <a:solidFill>
-            <a:srgbClr val="2563EB"/>
+            <a:srgbClr val="DC2626"/>
           </a:solidFill>
           <a:ln/>
         </p:spPr>
@@ -2403,19 +2027,19 @@
           <a:bodyPr wrap="square" lIns="0" tIns="0" rIns="0" bIns="0" rtlCol="0" anchor="ctr"/>
           <a:lstStyle/>
           <a:p>
-            <a:pPr algn="l" indent="0" marL="0">
+            <a:pPr indent="0" marL="0">
               <a:buNone/>
             </a:pPr>
             <a:r>
               <a:rPr lang="en-US" sz="1200" b="1" spc="200" kern="0" dirty="0">
                 <a:solidFill>
-                  <a:srgbClr val="2563EB"/>
+                  <a:srgbClr val="DC2626"/>
                 </a:solidFill>
                 <a:latin typeface="Calibri" pitchFamily="34" charset="0"/>
                 <a:ea typeface="Calibri" pitchFamily="34" charset="-122"/>
                 <a:cs typeface="Calibri" pitchFamily="34" charset="-120"/>
               </a:rPr>
-              <a:t>CALIBRATED HONESTLY</a:t>
+              <a:t>DIAGNOSIS</a:t>
             </a:r>
             <a:endParaRPr lang="en-US" sz="1200" dirty="0"/>
           </a:p>
@@ -2430,7 +2054,7 @@
         <p:spPr>
           <a:xfrm>
             <a:off x="566928" y="841248"/>
-            <a:ext cx="11055096" cy="1143000"/>
+            <a:ext cx="11055096" cy="1005840"/>
           </a:xfrm>
           <a:prstGeom prst="rect">
             <a:avLst/>
@@ -2449,7 +2073,7 @@
               <a:buNone/>
             </a:pPr>
             <a:r>
-              <a:rPr lang="en-US" sz="2500" b="1" dirty="0">
+              <a:rPr lang="en-US" sz="2400" b="1" dirty="0">
                 <a:solidFill>
                   <a:srgbClr val="15233B"/>
                 </a:solidFill>
@@ -2457,15 +2081,54 @@
                 <a:ea typeface="Georgia" pitchFamily="34" charset="-122"/>
                 <a:cs typeface="Georgia" pitchFamily="34" charset="-120"/>
               </a:rPr>
-              <a:t>The 0.56 plateau is methodology, not a headline — ≈8× below random, but ≈9× above tuned NFSP.</a:t>
-            </a:r>
-            <a:endParaRPr lang="en-US" sz="2500" dirty="0"/>
-          </a:p>
-        </p:txBody>
-      </p:sp>
-      <p:sp>
-        <p:nvSpPr>
-          <p:cNvPr id="5" name="Shape 3"/>
+              <a:t>Over-aggression drift, not collapse.</a:t>
+            </a:r>
+            <a:endParaRPr lang="en-US" sz="2400" dirty="0"/>
+          </a:p>
+        </p:txBody>
+      </p:sp>
+      <p:sp>
+        <p:nvSpPr>
+          <p:cNvPr id="5" name="Text 3"/>
+          <p:cNvSpPr/>
+          <p:nvPr/>
+        </p:nvSpPr>
+        <p:spPr>
+          <a:xfrm>
+            <a:off x="566928" y="1847088"/>
+            <a:ext cx="11055096" cy="384048"/>
+          </a:xfrm>
+          <a:prstGeom prst="rect">
+            <a:avLst/>
+          </a:prstGeom>
+          <a:noFill/>
+          <a:ln/>
+        </p:spPr>
+        <p:txBody>
+          <a:bodyPr wrap="square" lIns="0" tIns="0" rIns="0" bIns="0" rtlCol="0" anchor="t"/>
+          <a:lstStyle/>
+          <a:p>
+            <a:pPr algn="l" indent="0" marL="0">
+              <a:buNone/>
+            </a:pPr>
+            <a:r>
+              <a:rPr lang="en-US" sz="1300" dirty="0">
+                <a:solidFill>
+                  <a:srgbClr val="5B6B82"/>
+                </a:solidFill>
+                <a:latin typeface="Calibri" pitchFamily="34" charset="0"/>
+                <a:ea typeface="Calibri" pitchFamily="34" charset="-122"/>
+                <a:cs typeface="Calibri" pitchFamily="34" charset="-120"/>
+              </a:rPr>
+              <a:t>No calling opponents in the training mix; the co-evolving league learned to fold to aggression.</a:t>
+            </a:r>
+            <a:endParaRPr lang="en-US" sz="1300" dirty="0"/>
+          </a:p>
+        </p:txBody>
+      </p:sp>
+      <p:sp>
+        <p:nvSpPr>
+          <p:cNvPr id="6" name="Shape 4"/>
           <p:cNvSpPr/>
           <p:nvPr/>
         </p:nvSpPr>
@@ -2488,7 +2151,7 @@
       </p:sp>
       <p:sp>
         <p:nvSpPr>
-          <p:cNvPr id="6" name="Text 4"/>
+          <p:cNvPr id="7" name="Text 5"/>
           <p:cNvSpPr/>
           <p:nvPr/>
         </p:nvSpPr>
@@ -2527,7 +2190,7 @@
       </p:sp>
       <p:sp>
         <p:nvSpPr>
-          <p:cNvPr id="7" name="Text 5"/>
+          <p:cNvPr id="8" name="Text 6"/>
           <p:cNvSpPr/>
           <p:nvPr/>
         </p:nvSpPr>
@@ -2566,7 +2229,7 @@
       </p:sp>
       <p:pic>
         <p:nvPicPr>
-          <p:cNvPr id="8" name="Image 0" descr="../docs/figures/deck/05_calibration_ladder.png">    </p:cNvPr>
+          <p:cNvPr id="9" name="Image 0" descr="../docs/figures/deck/06_over_aggression.png">    </p:cNvPr>
           <p:cNvPicPr>
             <a:picLocks noChangeAspect="1"/>
           </p:cNvPicPr>
@@ -2580,8 +2243,8 @@
         </p:blipFill>
         <p:spPr>
           <a:xfrm>
-            <a:off x="1633918" y="2331720"/>
-            <a:ext cx="8921115" cy="3520440"/>
+            <a:off x="2416216" y="2377440"/>
+            <a:ext cx="7356520" cy="3822192"/>
           </a:xfrm>
           <a:prstGeom prst="rect">
             <a:avLst/>
@@ -2599,1632 +2262,6 @@
 <file path=ppt/slides/slide11.xml><?xml version="1.0" encoding="utf-8"?>
 <p:sld xmlns:a="http://schemas.openxmlformats.org/drawingml/2006/main" xmlns:r="http://schemas.openxmlformats.org/officeDocument/2006/relationships" xmlns:p="http://schemas.openxmlformats.org/presentationml/2006/main">
   <p:cSld name="Slide 11">
-    <p:bg>
-      <p:bgPr>
-        <a:solidFill>
-          <a:srgbClr val="FFFFFF"/>
-        </a:solidFill>
-      </p:bgPr>
-    </p:bg>
-    <p:spTree>
-      <p:nvGrpSpPr>
-        <p:cNvPr id="1" name=""/>
-        <p:cNvGrpSpPr/>
-        <p:nvPr/>
-      </p:nvGrpSpPr>
-      <p:grpSpPr>
-        <a:xfrm>
-          <a:off x="0" y="0"/>
-          <a:ext cx="0" cy="0"/>
-          <a:chOff x="0" y="0"/>
-          <a:chExt cx="0" cy="0"/>
-        </a:xfrm>
-      </p:grpSpPr>
-      <p:sp>
-        <p:nvSpPr>
-          <p:cNvPr id="2" name="Shape 0"/>
-          <p:cNvSpPr/>
-          <p:nvPr/>
-        </p:nvSpPr>
-        <p:spPr>
-          <a:xfrm>
-            <a:off x="566928" y="534924"/>
-            <a:ext cx="109728" cy="109728"/>
-          </a:xfrm>
-          <a:prstGeom prst="ellipse">
-            <a:avLst/>
-          </a:prstGeom>
-          <a:solidFill>
-            <a:srgbClr val="B7791F"/>
-          </a:solidFill>
-          <a:ln/>
-        </p:spPr>
-      </p:sp>
-      <p:sp>
-        <p:nvSpPr>
-          <p:cNvPr id="3" name="Text 1"/>
-          <p:cNvSpPr/>
-          <p:nvPr/>
-        </p:nvSpPr>
-        <p:spPr>
-          <a:xfrm>
-            <a:off x="768096" y="457200"/>
-            <a:ext cx="10853928" cy="274320"/>
-          </a:xfrm>
-          <a:prstGeom prst="rect">
-            <a:avLst/>
-          </a:prstGeom>
-          <a:noFill/>
-          <a:ln/>
-        </p:spPr>
-        <p:txBody>
-          <a:bodyPr wrap="square" lIns="0" tIns="0" rIns="0" bIns="0" rtlCol="0" anchor="ctr"/>
-          <a:lstStyle/>
-          <a:p>
-            <a:pPr algn="l" indent="0" marL="0">
-              <a:buNone/>
-            </a:pPr>
-            <a:r>
-              <a:rPr lang="en-US" sz="1200" b="1" spc="200" kern="0" dirty="0">
-                <a:solidFill>
-                  <a:srgbClr val="B7791F"/>
-                </a:solidFill>
-                <a:latin typeface="Calibri" pitchFamily="34" charset="0"/>
-                <a:ea typeface="Calibri" pitchFamily="34" charset="-122"/>
-                <a:cs typeface="Calibri" pitchFamily="34" charset="-120"/>
-              </a:rPr>
-              <a:t>RECONCILING WITH ALPHAHOLDEM</a:t>
-            </a:r>
-            <a:endParaRPr lang="en-US" sz="1200" dirty="0"/>
-          </a:p>
-        </p:txBody>
-      </p:sp>
-      <p:sp>
-        <p:nvSpPr>
-          <p:cNvPr id="4" name="Text 2"/>
-          <p:cNvSpPr/>
-          <p:nvPr/>
-        </p:nvSpPr>
-        <p:spPr>
-          <a:xfrm>
-            <a:off x="566928" y="841248"/>
-            <a:ext cx="11055096" cy="1143000"/>
-          </a:xfrm>
-          <a:prstGeom prst="rect">
-            <a:avLst/>
-          </a:prstGeom>
-          <a:noFill/>
-          <a:ln/>
-        </p:spPr>
-        <p:txBody>
-          <a:bodyPr wrap="square" lIns="0" tIns="0" rIns="0" bIns="0" rtlCol="0" anchor="t"/>
-          <a:lstStyle/>
-          <a:p>
-            <a:pPr algn="l" indent="0" marL="0">
-              <a:lnSpc>
-                <a:spcPct val="102000"/>
-              </a:lnSpc>
-              <a:buNone/>
-            </a:pPr>
-            <a:r>
-              <a:rPr lang="en-US" sz="2500" b="1" dirty="0">
-                <a:solidFill>
-                  <a:srgbClr val="15233B"/>
-                </a:solidFill>
-                <a:latin typeface="Georgia" pitchFamily="34" charset="0"/>
-                <a:ea typeface="Georgia" pitchFamily="34" charset="-122"/>
-                <a:cs typeface="Georgia" pitchFamily="34" charset="-120"/>
-              </a:rPr>
-              <a:t>AlphaHoldem's “convergence” and my finding measure different quantities — there is no contradiction.</a:t>
-            </a:r>
-            <a:endParaRPr lang="en-US" sz="2500" dirty="0"/>
-          </a:p>
-        </p:txBody>
-      </p:sp>
-      <p:sp>
-        <p:nvSpPr>
-          <p:cNvPr id="5" name="Shape 3"/>
-          <p:cNvSpPr/>
-          <p:nvPr/>
-        </p:nvSpPr>
-        <p:spPr>
-          <a:xfrm>
-            <a:off x="566928" y="6364224"/>
-            <a:ext cx="11055096" cy="0"/>
-          </a:xfrm>
-          <a:prstGeom prst="line">
-            <a:avLst/>
-          </a:prstGeom>
-          <a:noFill/>
-          <a:ln w="12700">
-            <a:solidFill>
-              <a:srgbClr val="E6EAF0"/>
-            </a:solidFill>
-            <a:prstDash val="solid"/>
-          </a:ln>
-        </p:spPr>
-      </p:sp>
-      <p:sp>
-        <p:nvSpPr>
-          <p:cNvPr id="6" name="Text 4"/>
-          <p:cNvSpPr/>
-          <p:nvPr/>
-        </p:nvSpPr>
-        <p:spPr>
-          <a:xfrm>
-            <a:off x="566928" y="6437376"/>
-            <a:ext cx="9144000" cy="274320"/>
-          </a:xfrm>
-          <a:prstGeom prst="rect">
-            <a:avLst/>
-          </a:prstGeom>
-          <a:noFill/>
-          <a:ln/>
-        </p:spPr>
-        <p:txBody>
-          <a:bodyPr wrap="square" lIns="0" tIns="0" rIns="0" bIns="0" rtlCol="0" anchor="ctr"/>
-          <a:lstStyle/>
-          <a:p>
-            <a:pPr algn="l" indent="0" marL="0">
-              <a:buNone/>
-            </a:pPr>
-            <a:r>
-              <a:rPr lang="en-US" sz="950" dirty="0">
-                <a:solidFill>
-                  <a:srgbClr val="5B6B82"/>
-                </a:solidFill>
-                <a:latin typeface="Calibri" pitchFamily="34" charset="0"/>
-                <a:ea typeface="Calibri" pitchFamily="34" charset="-122"/>
-                <a:cs typeface="Calibri" pitchFamily="34" charset="-120"/>
-              </a:rPr>
-              <a:t>Sanil Desai  ·  AlphaHoldem-inspired self-play RL for Heads-Up No-Limit Hold'em</a:t>
-            </a:r>
-            <a:endParaRPr lang="en-US" sz="950" dirty="0"/>
-          </a:p>
-        </p:txBody>
-      </p:sp>
-      <p:sp>
-        <p:nvSpPr>
-          <p:cNvPr id="7" name="Text 5"/>
-          <p:cNvSpPr/>
-          <p:nvPr/>
-        </p:nvSpPr>
-        <p:spPr>
-          <a:xfrm>
-            <a:off x="11000232" y="6437376"/>
-            <a:ext cx="640080" cy="274320"/>
-          </a:xfrm>
-          <a:prstGeom prst="rect">
-            <a:avLst/>
-          </a:prstGeom>
-          <a:noFill/>
-          <a:ln/>
-        </p:spPr>
-        <p:txBody>
-          <a:bodyPr wrap="square" lIns="0" tIns="0" rIns="0" bIns="0" rtlCol="0" anchor="ctr"/>
-          <a:lstStyle/>
-          <a:p>
-            <a:pPr algn="r" indent="0" marL="0">
-              <a:buNone/>
-            </a:pPr>
-            <a:r>
-              <a:rPr lang="en-US" sz="950" dirty="0">
-                <a:solidFill>
-                  <a:srgbClr val="5B6B82"/>
-                </a:solidFill>
-                <a:latin typeface="Calibri" pitchFamily="34" charset="0"/>
-                <a:ea typeface="Calibri" pitchFamily="34" charset="-122"/>
-                <a:cs typeface="Calibri" pitchFamily="34" charset="-120"/>
-              </a:rPr>
-              <a:t>11</a:t>
-            </a:r>
-            <a:endParaRPr lang="en-US" sz="950" dirty="0"/>
-          </a:p>
-        </p:txBody>
-      </p:sp>
-      <p:sp>
-        <p:nvSpPr>
-          <p:cNvPr id="8" name="Shape 6"/>
-          <p:cNvSpPr/>
-          <p:nvPr/>
-        </p:nvSpPr>
-        <p:spPr>
-          <a:xfrm>
-            <a:off x="566928" y="2468880"/>
-            <a:ext cx="5298948" cy="2331720"/>
-          </a:xfrm>
-          <a:prstGeom prst="roundRect">
-            <a:avLst>
-              <a:gd name="adj" fmla="val 3137"/>
-            </a:avLst>
-          </a:prstGeom>
-          <a:solidFill>
-            <a:srgbClr val="FFFFFF"/>
-          </a:solidFill>
-          <a:ln w="12700">
-            <a:solidFill>
-              <a:srgbClr val="E6EAF0"/>
-            </a:solidFill>
-            <a:prstDash val="solid"/>
-          </a:ln>
-          <a:effectLst>
-            <a:outerShdw sx="100000" sy="100000" kx="0" ky="0" algn="bl" rotWithShape="0" blurRad="88900" dist="25400" dir="5400000">
-              <a:srgbClr val="9AABC4">
-                <a:alpha val="20000"/>
-              </a:srgbClr>
-            </a:outerShdw>
-          </a:effectLst>
-        </p:spPr>
-      </p:sp>
-      <p:sp>
-        <p:nvSpPr>
-          <p:cNvPr id="9" name="Shape 7"/>
-          <p:cNvSpPr/>
-          <p:nvPr/>
-        </p:nvSpPr>
-        <p:spPr>
-          <a:xfrm>
-            <a:off x="822960" y="2743200"/>
-            <a:ext cx="146304" cy="146304"/>
-          </a:xfrm>
-          <a:prstGeom prst="ellipse">
-            <a:avLst/>
-          </a:prstGeom>
-          <a:solidFill>
-            <a:srgbClr val="2563EB"/>
-          </a:solidFill>
-          <a:ln/>
-        </p:spPr>
-      </p:sp>
-      <p:sp>
-        <p:nvSpPr>
-          <p:cNvPr id="10" name="Text 8"/>
-          <p:cNvSpPr/>
-          <p:nvPr/>
-        </p:nvSpPr>
-        <p:spPr>
-          <a:xfrm>
-            <a:off x="1060704" y="2670048"/>
-            <a:ext cx="4658868" cy="292608"/>
-          </a:xfrm>
-          <a:prstGeom prst="rect">
-            <a:avLst/>
-          </a:prstGeom>
-          <a:noFill/>
-          <a:ln/>
-        </p:spPr>
-        <p:txBody>
-          <a:bodyPr wrap="square" lIns="0" tIns="0" rIns="0" bIns="0" rtlCol="0" anchor="ctr"/>
-          <a:lstStyle/>
-          <a:p>
-            <a:pPr indent="0" marL="0">
-              <a:buNone/>
-            </a:pPr>
-            <a:r>
-              <a:rPr lang="en-US" sz="1250" b="1" spc="100" kern="0" dirty="0">
-                <a:solidFill>
-                  <a:srgbClr val="2563EB"/>
-                </a:solidFill>
-                <a:latin typeface="Calibri" pitchFamily="34" charset="0"/>
-                <a:ea typeface="Calibri" pitchFamily="34" charset="-122"/>
-                <a:cs typeface="Calibri" pitchFamily="34" charset="-120"/>
-              </a:rPr>
-              <a:t>WHAT ALPHAHOLDEM MEASURED</a:t>
-            </a:r>
-            <a:endParaRPr lang="en-US" sz="1250" dirty="0"/>
-          </a:p>
-        </p:txBody>
-      </p:sp>
-      <p:sp>
-        <p:nvSpPr>
-          <p:cNvPr id="11" name="Text 9"/>
-          <p:cNvSpPr/>
-          <p:nvPr/>
-        </p:nvSpPr>
-        <p:spPr>
-          <a:xfrm>
-            <a:off x="822960" y="3072384"/>
-            <a:ext cx="4786884" cy="1545336"/>
-          </a:xfrm>
-          <a:prstGeom prst="rect">
-            <a:avLst/>
-          </a:prstGeom>
-          <a:noFill/>
-          <a:ln/>
-        </p:spPr>
-        <p:txBody>
-          <a:bodyPr wrap="square" lIns="0" tIns="0" rIns="0" bIns="0" rtlCol="0" anchor="t"/>
-          <a:lstStyle/>
-          <a:p>
-            <a:pPr algn="l" indent="0" marL="0">
-              <a:lnSpc>
-                <a:spcPct val="105000"/>
-              </a:lnSpc>
-              <a:buNone/>
-            </a:pPr>
-            <a:r>
-              <a:rPr lang="en-US" sz="1350" dirty="0">
-                <a:solidFill>
-                  <a:srgbClr val="15233B"/>
-                </a:solidFill>
-                <a:latin typeface="Calibri" pitchFamily="34" charset="0"/>
-                <a:ea typeface="Calibri" pitchFamily="34" charset="-122"/>
-                <a:cs typeface="Calibri" pitchFamily="34" charset="-120"/>
-              </a:rPr>
-              <a:t>Training loss flattening · Elo plateauing in its self-play league · head-to-head win-rate (+111.6 mbb/h vs Slumbot). On full HUNL it explicitly concedes best-response is prohibitive and never computes a NashConv.</a:t>
-            </a:r>
-            <a:endParaRPr lang="en-US" sz="1350" dirty="0"/>
-          </a:p>
-        </p:txBody>
-      </p:sp>
-      <p:sp>
-        <p:nvSpPr>
-          <p:cNvPr id="12" name="Shape 10"/>
-          <p:cNvSpPr/>
-          <p:nvPr/>
-        </p:nvSpPr>
-        <p:spPr>
-          <a:xfrm>
-            <a:off x="6323076" y="2468880"/>
-            <a:ext cx="5298948" cy="2331720"/>
-          </a:xfrm>
-          <a:prstGeom prst="roundRect">
-            <a:avLst>
-              <a:gd name="adj" fmla="val 3137"/>
-            </a:avLst>
-          </a:prstGeom>
-          <a:solidFill>
-            <a:srgbClr val="FFFFFF"/>
-          </a:solidFill>
-          <a:ln w="12700">
-            <a:solidFill>
-              <a:srgbClr val="E6EAF0"/>
-            </a:solidFill>
-            <a:prstDash val="solid"/>
-          </a:ln>
-          <a:effectLst>
-            <a:outerShdw sx="100000" sy="100000" kx="0" ky="0" algn="bl" rotWithShape="0" blurRad="88900" dist="25400" dir="5400000">
-              <a:srgbClr val="9AABC4">
-                <a:alpha val="20000"/>
-              </a:srgbClr>
-            </a:outerShdw>
-          </a:effectLst>
-        </p:spPr>
-      </p:sp>
-      <p:sp>
-        <p:nvSpPr>
-          <p:cNvPr id="13" name="Shape 11"/>
-          <p:cNvSpPr/>
-          <p:nvPr/>
-        </p:nvSpPr>
-        <p:spPr>
-          <a:xfrm>
-            <a:off x="6579108" y="2743200"/>
-            <a:ext cx="146304" cy="146304"/>
-          </a:xfrm>
-          <a:prstGeom prst="ellipse">
-            <a:avLst/>
-          </a:prstGeom>
-          <a:solidFill>
-            <a:srgbClr val="0D9488"/>
-          </a:solidFill>
-          <a:ln/>
-        </p:spPr>
-      </p:sp>
-      <p:sp>
-        <p:nvSpPr>
-          <p:cNvPr id="14" name="Text 12"/>
-          <p:cNvSpPr/>
-          <p:nvPr/>
-        </p:nvSpPr>
-        <p:spPr>
-          <a:xfrm>
-            <a:off x="6816852" y="2670048"/>
-            <a:ext cx="4658868" cy="292608"/>
-          </a:xfrm>
-          <a:prstGeom prst="rect">
-            <a:avLst/>
-          </a:prstGeom>
-          <a:noFill/>
-          <a:ln/>
-        </p:spPr>
-        <p:txBody>
-          <a:bodyPr wrap="square" lIns="0" tIns="0" rIns="0" bIns="0" rtlCol="0" anchor="ctr"/>
-          <a:lstStyle/>
-          <a:p>
-            <a:pPr indent="0" marL="0">
-              <a:buNone/>
-            </a:pPr>
-            <a:r>
-              <a:rPr lang="en-US" sz="1250" b="1" spc="100" kern="0" dirty="0">
-                <a:solidFill>
-                  <a:srgbClr val="0D9488"/>
-                </a:solidFill>
-                <a:latin typeface="Calibri" pitchFamily="34" charset="0"/>
-                <a:ea typeface="Calibri" pitchFamily="34" charset="-122"/>
-                <a:cs typeface="Calibri" pitchFamily="34" charset="-120"/>
-              </a:rPr>
-              <a:t>WHAT EXPLOITABILITY MEASURES</a:t>
-            </a:r>
-            <a:endParaRPr lang="en-US" sz="1250" dirty="0"/>
-          </a:p>
-        </p:txBody>
-      </p:sp>
-      <p:sp>
-        <p:nvSpPr>
-          <p:cNvPr id="15" name="Text 13"/>
-          <p:cNvSpPr/>
-          <p:nvPr/>
-        </p:nvSpPr>
-        <p:spPr>
-          <a:xfrm>
-            <a:off x="6579108" y="3072384"/>
-            <a:ext cx="4786884" cy="1545336"/>
-          </a:xfrm>
-          <a:prstGeom prst="rect">
-            <a:avLst/>
-          </a:prstGeom>
-          <a:noFill/>
-          <a:ln/>
-        </p:spPr>
-        <p:txBody>
-          <a:bodyPr wrap="square" lIns="0" tIns="0" rIns="0" bIns="0" rtlCol="0" anchor="t"/>
-          <a:lstStyle/>
-          <a:p>
-            <a:pPr algn="l" indent="0" marL="0">
-              <a:lnSpc>
-                <a:spcPct val="105000"/>
-              </a:lnSpc>
-              <a:buNone/>
-            </a:pPr>
-            <a:r>
-              <a:rPr lang="en-US" sz="1350" dirty="0">
-                <a:solidFill>
-                  <a:srgbClr val="15233B"/>
-                </a:solidFill>
-                <a:latin typeface="Calibri" pitchFamily="34" charset="0"/>
-                <a:ea typeface="Calibri" pitchFamily="34" charset="-122"/>
-                <a:cs typeface="Calibri" pitchFamily="34" charset="-120"/>
-              </a:rPr>
-              <a:t>The gain an optimal counter-strategy extracts — opponent-independent. As LBR shows, a strong head-to-head record is fully consistent with a strategy that remains highly exploitable.</a:t>
-            </a:r>
-            <a:endParaRPr lang="en-US" sz="1350" dirty="0"/>
-          </a:p>
-        </p:txBody>
-      </p:sp>
-      <p:sp>
-        <p:nvSpPr>
-          <p:cNvPr id="16" name="Text 14"/>
-          <p:cNvSpPr/>
-          <p:nvPr/>
-        </p:nvSpPr>
-        <p:spPr>
-          <a:xfrm>
-            <a:off x="566928" y="5257800"/>
-            <a:ext cx="11055096" cy="548640"/>
-          </a:xfrm>
-          <a:prstGeom prst="rect">
-            <a:avLst/>
-          </a:prstGeom>
-          <a:noFill/>
-          <a:ln/>
-        </p:spPr>
-        <p:txBody>
-          <a:bodyPr wrap="square" lIns="0" tIns="0" rIns="0" bIns="0" rtlCol="0" anchor="ctr"/>
-          <a:lstStyle/>
-          <a:p>
-            <a:pPr algn="ctr" indent="0" marL="0">
-              <a:buNone/>
-            </a:pPr>
-            <a:r>
-              <a:rPr lang="en-US" sz="1500" b="1" dirty="0">
-                <a:solidFill>
-                  <a:srgbClr val="15233B"/>
-                </a:solidFill>
-                <a:latin typeface="Calibri" pitchFamily="34" charset="0"/>
-                <a:ea typeface="Calibri" pitchFamily="34" charset="-122"/>
-                <a:cs typeface="Calibri" pitchFamily="34" charset="-120"/>
-              </a:rPr>
-              <a:t>Win-rate ≠ exploitability. </a:t>
-            </a:r>
-            <a:pPr algn="ctr" indent="0" marL="0">
-              <a:buNone/>
-            </a:pPr>
-            <a:r>
-              <a:rPr lang="en-US" sz="1500" dirty="0">
-                <a:solidFill>
-                  <a:srgbClr val="5B6B82"/>
-                </a:solidFill>
-                <a:latin typeface="Calibri" pitchFamily="34" charset="0"/>
-                <a:ea typeface="Calibri" pitchFamily="34" charset="-122"/>
-                <a:cs typeface="Calibri" pitchFamily="34" charset="-120"/>
-              </a:rPr>
-              <a:t>My Leduc study is the test HUNL can’t run — not a failed reproduction.</a:t>
-            </a:r>
-            <a:endParaRPr lang="en-US" sz="1500" dirty="0"/>
-          </a:p>
-        </p:txBody>
-      </p:sp>
-    </p:spTree>
-  </p:cSld>
-  <p:clrMapOvr>
-    <a:masterClrMapping/>
-  </p:clrMapOvr>
-</p:sld>
-</file>
-
-<file path=ppt/slides/slide12.xml><?xml version="1.0" encoding="utf-8"?>
-<p:sld xmlns:a="http://schemas.openxmlformats.org/drawingml/2006/main" xmlns:r="http://schemas.openxmlformats.org/officeDocument/2006/relationships" xmlns:p="http://schemas.openxmlformats.org/presentationml/2006/main">
-  <p:cSld name="Slide 12">
-    <p:bg>
-      <p:bgPr>
-        <a:solidFill>
-          <a:srgbClr val="FFFFFF"/>
-        </a:solidFill>
-      </p:bgPr>
-    </p:bg>
-    <p:spTree>
-      <p:nvGrpSpPr>
-        <p:cNvPr id="1" name=""/>
-        <p:cNvGrpSpPr/>
-        <p:nvPr/>
-      </p:nvGrpSpPr>
-      <p:grpSpPr>
-        <a:xfrm>
-          <a:off x="0" y="0"/>
-          <a:ext cx="0" cy="0"/>
-          <a:chOff x="0" y="0"/>
-          <a:chExt cx="0" cy="0"/>
-        </a:xfrm>
-      </p:grpSpPr>
-      <p:sp>
-        <p:nvSpPr>
-          <p:cNvPr id="2" name="Shape 0"/>
-          <p:cNvSpPr/>
-          <p:nvPr/>
-        </p:nvSpPr>
-        <p:spPr>
-          <a:xfrm>
-            <a:off x="566928" y="534924"/>
-            <a:ext cx="109728" cy="109728"/>
-          </a:xfrm>
-          <a:prstGeom prst="ellipse">
-            <a:avLst/>
-          </a:prstGeom>
-          <a:solidFill>
-            <a:srgbClr val="2563EB"/>
-          </a:solidFill>
-          <a:ln/>
-        </p:spPr>
-      </p:sp>
-      <p:sp>
-        <p:nvSpPr>
-          <p:cNvPr id="3" name="Text 1"/>
-          <p:cNvSpPr/>
-          <p:nvPr/>
-        </p:nvSpPr>
-        <p:spPr>
-          <a:xfrm>
-            <a:off x="768096" y="457200"/>
-            <a:ext cx="10853928" cy="274320"/>
-          </a:xfrm>
-          <a:prstGeom prst="rect">
-            <a:avLst/>
-          </a:prstGeom>
-          <a:noFill/>
-          <a:ln/>
-        </p:spPr>
-        <p:txBody>
-          <a:bodyPr wrap="square" lIns="0" tIns="0" rIns="0" bIns="0" rtlCol="0" anchor="ctr"/>
-          <a:lstStyle/>
-          <a:p>
-            <a:pPr algn="l" indent="0" marL="0">
-              <a:buNone/>
-            </a:pPr>
-            <a:r>
-              <a:rPr lang="en-US" sz="1200" b="1" spc="200" kern="0" dirty="0">
-                <a:solidFill>
-                  <a:srgbClr val="2563EB"/>
-                </a:solidFill>
-                <a:latin typeface="Calibri" pitchFamily="34" charset="0"/>
-                <a:ea typeface="Calibri" pitchFamily="34" charset="-122"/>
-                <a:cs typeface="Calibri" pitchFamily="34" charset="-120"/>
-              </a:rPr>
-              <a:t>PUSHING FOR SCALE</a:t>
-            </a:r>
-            <a:endParaRPr lang="en-US" sz="1200" dirty="0"/>
-          </a:p>
-        </p:txBody>
-      </p:sp>
-      <p:sp>
-        <p:nvSpPr>
-          <p:cNvPr id="4" name="Text 2"/>
-          <p:cNvSpPr/>
-          <p:nvPr/>
-        </p:nvSpPr>
-        <p:spPr>
-          <a:xfrm>
-            <a:off x="566928" y="841248"/>
-            <a:ext cx="11055096" cy="1143000"/>
-          </a:xfrm>
-          <a:prstGeom prst="rect">
-            <a:avLst/>
-          </a:prstGeom>
-          <a:noFill/>
-          <a:ln/>
-        </p:spPr>
-        <p:txBody>
-          <a:bodyPr wrap="square" lIns="0" tIns="0" rIns="0" bIns="0" rtlCol="0" anchor="t"/>
-          <a:lstStyle/>
-          <a:p>
-            <a:pPr algn="l" indent="0" marL="0">
-              <a:lnSpc>
-                <a:spcPct val="102000"/>
-              </a:lnSpc>
-              <a:buNone/>
-            </a:pPr>
-            <a:r>
-              <a:rPr lang="en-US" sz="2500" b="1" dirty="0">
-                <a:solidFill>
-                  <a:srgbClr val="15233B"/>
-                </a:solidFill>
-                <a:latin typeface="Georgia" pitchFamily="34" charset="0"/>
-                <a:ea typeface="Georgia" pitchFamily="34" charset="-122"/>
-                <a:cs typeface="Georgia" pitchFamily="34" charset="-120"/>
-              </a:rPr>
-              <a:t>I made self-play collection 30–100× faster, then ran 90k GPU iterations from the champion.</a:t>
-            </a:r>
-            <a:endParaRPr lang="en-US" sz="2500" dirty="0"/>
-          </a:p>
-        </p:txBody>
-      </p:sp>
-      <p:sp>
-        <p:nvSpPr>
-          <p:cNvPr id="5" name="Shape 3"/>
-          <p:cNvSpPr/>
-          <p:nvPr/>
-        </p:nvSpPr>
-        <p:spPr>
-          <a:xfrm>
-            <a:off x="566928" y="6364224"/>
-            <a:ext cx="11055096" cy="0"/>
-          </a:xfrm>
-          <a:prstGeom prst="line">
-            <a:avLst/>
-          </a:prstGeom>
-          <a:noFill/>
-          <a:ln w="12700">
-            <a:solidFill>
-              <a:srgbClr val="E6EAF0"/>
-            </a:solidFill>
-            <a:prstDash val="solid"/>
-          </a:ln>
-        </p:spPr>
-      </p:sp>
-      <p:sp>
-        <p:nvSpPr>
-          <p:cNvPr id="6" name="Text 4"/>
-          <p:cNvSpPr/>
-          <p:nvPr/>
-        </p:nvSpPr>
-        <p:spPr>
-          <a:xfrm>
-            <a:off x="566928" y="6437376"/>
-            <a:ext cx="9144000" cy="274320"/>
-          </a:xfrm>
-          <a:prstGeom prst="rect">
-            <a:avLst/>
-          </a:prstGeom>
-          <a:noFill/>
-          <a:ln/>
-        </p:spPr>
-        <p:txBody>
-          <a:bodyPr wrap="square" lIns="0" tIns="0" rIns="0" bIns="0" rtlCol="0" anchor="ctr"/>
-          <a:lstStyle/>
-          <a:p>
-            <a:pPr algn="l" indent="0" marL="0">
-              <a:buNone/>
-            </a:pPr>
-            <a:r>
-              <a:rPr lang="en-US" sz="950" dirty="0">
-                <a:solidFill>
-                  <a:srgbClr val="5B6B82"/>
-                </a:solidFill>
-                <a:latin typeface="Calibri" pitchFamily="34" charset="0"/>
-                <a:ea typeface="Calibri" pitchFamily="34" charset="-122"/>
-                <a:cs typeface="Calibri" pitchFamily="34" charset="-120"/>
-              </a:rPr>
-              <a:t>Sanil Desai  ·  AlphaHoldem-inspired self-play RL for Heads-Up No-Limit Hold'em</a:t>
-            </a:r>
-            <a:endParaRPr lang="en-US" sz="950" dirty="0"/>
-          </a:p>
-        </p:txBody>
-      </p:sp>
-      <p:sp>
-        <p:nvSpPr>
-          <p:cNvPr id="7" name="Text 5"/>
-          <p:cNvSpPr/>
-          <p:nvPr/>
-        </p:nvSpPr>
-        <p:spPr>
-          <a:xfrm>
-            <a:off x="11000232" y="6437376"/>
-            <a:ext cx="640080" cy="274320"/>
-          </a:xfrm>
-          <a:prstGeom prst="rect">
-            <a:avLst/>
-          </a:prstGeom>
-          <a:noFill/>
-          <a:ln/>
-        </p:spPr>
-        <p:txBody>
-          <a:bodyPr wrap="square" lIns="0" tIns="0" rIns="0" bIns="0" rtlCol="0" anchor="ctr"/>
-          <a:lstStyle/>
-          <a:p>
-            <a:pPr algn="r" indent="0" marL="0">
-              <a:buNone/>
-            </a:pPr>
-            <a:r>
-              <a:rPr lang="en-US" sz="950" dirty="0">
-                <a:solidFill>
-                  <a:srgbClr val="5B6B82"/>
-                </a:solidFill>
-                <a:latin typeface="Calibri" pitchFamily="34" charset="0"/>
-                <a:ea typeface="Calibri" pitchFamily="34" charset="-122"/>
-                <a:cs typeface="Calibri" pitchFamily="34" charset="-120"/>
-              </a:rPr>
-              <a:t>12</a:t>
-            </a:r>
-            <a:endParaRPr lang="en-US" sz="950" dirty="0"/>
-          </a:p>
-        </p:txBody>
-      </p:sp>
-      <p:sp>
-        <p:nvSpPr>
-          <p:cNvPr id="8" name="Shape 6"/>
-          <p:cNvSpPr/>
-          <p:nvPr/>
-        </p:nvSpPr>
-        <p:spPr>
-          <a:xfrm>
-            <a:off x="566928" y="2377440"/>
-            <a:ext cx="3657600" cy="3200400"/>
-          </a:xfrm>
-          <a:prstGeom prst="roundRect">
-            <a:avLst>
-              <a:gd name="adj" fmla="val 2286"/>
-            </a:avLst>
-          </a:prstGeom>
-          <a:solidFill>
-            <a:srgbClr val="F5F8FC"/>
-          </a:solidFill>
-          <a:ln w="12700">
-            <a:solidFill>
-              <a:srgbClr val="E6EAF0"/>
-            </a:solidFill>
-            <a:prstDash val="solid"/>
-          </a:ln>
-        </p:spPr>
-      </p:sp>
-      <p:sp>
-        <p:nvSpPr>
-          <p:cNvPr id="9" name="Text 7"/>
-          <p:cNvSpPr/>
-          <p:nvPr/>
-        </p:nvSpPr>
-        <p:spPr>
-          <a:xfrm>
-            <a:off x="932688" y="2697480"/>
-            <a:ext cx="3017520" cy="868680"/>
-          </a:xfrm>
-          <a:prstGeom prst="rect">
-            <a:avLst/>
-          </a:prstGeom>
-          <a:noFill/>
-          <a:ln/>
-        </p:spPr>
-        <p:txBody>
-          <a:bodyPr wrap="square" lIns="0" tIns="0" rIns="0" bIns="0" rtlCol="0" anchor="ctr"/>
-          <a:lstStyle/>
-          <a:p>
-            <a:pPr algn="l" indent="0" marL="0">
-              <a:buNone/>
-            </a:pPr>
-            <a:r>
-              <a:rPr lang="en-US" sz="4000" b="1" dirty="0">
-                <a:solidFill>
-                  <a:srgbClr val="0D9488"/>
-                </a:solidFill>
-                <a:latin typeface="Georgia" pitchFamily="34" charset="0"/>
-                <a:ea typeface="Georgia" pitchFamily="34" charset="-122"/>
-                <a:cs typeface="Georgia" pitchFamily="34" charset="-120"/>
-              </a:rPr>
-              <a:t>30–100×</a:t>
-            </a:r>
-            <a:endParaRPr lang="en-US" sz="4000" dirty="0"/>
-          </a:p>
-        </p:txBody>
-      </p:sp>
-      <p:sp>
-        <p:nvSpPr>
-          <p:cNvPr id="10" name="Text 8"/>
-          <p:cNvSpPr/>
-          <p:nvPr/>
-        </p:nvSpPr>
-        <p:spPr>
-          <a:xfrm>
-            <a:off x="932688" y="3538728"/>
-            <a:ext cx="3017520" cy="640080"/>
-          </a:xfrm>
-          <a:prstGeom prst="rect">
-            <a:avLst/>
-          </a:prstGeom>
-          <a:noFill/>
-          <a:ln/>
-        </p:spPr>
-        <p:txBody>
-          <a:bodyPr wrap="square" lIns="0" tIns="0" rIns="0" bIns="0" rtlCol="0" anchor="t"/>
-          <a:lstStyle/>
-          <a:p>
-            <a:pPr algn="l" indent="0" marL="0">
-              <a:buNone/>
-            </a:pPr>
-            <a:r>
-              <a:rPr lang="en-US" sz="1300" dirty="0">
-                <a:solidFill>
-                  <a:srgbClr val="5B6B82"/>
-                </a:solidFill>
-                <a:latin typeface="Calibri" pitchFamily="34" charset="0"/>
-                <a:ea typeface="Calibri" pitchFamily="34" charset="-122"/>
-                <a:cs typeface="Calibri" pitchFamily="34" charset="-120"/>
-              </a:rPr>
-              <a:t>faster trajectory collection (batched inference vs one game at a time)</a:t>
-            </a:r>
-            <a:endParaRPr lang="en-US" sz="1300" dirty="0"/>
-          </a:p>
-        </p:txBody>
-      </p:sp>
-      <p:sp>
-        <p:nvSpPr>
-          <p:cNvPr id="11" name="Text 9"/>
-          <p:cNvSpPr/>
-          <p:nvPr/>
-        </p:nvSpPr>
-        <p:spPr>
-          <a:xfrm>
-            <a:off x="932688" y="4160520"/>
-            <a:ext cx="3017520" cy="868680"/>
-          </a:xfrm>
-          <a:prstGeom prst="rect">
-            <a:avLst/>
-          </a:prstGeom>
-          <a:noFill/>
-          <a:ln/>
-        </p:spPr>
-        <p:txBody>
-          <a:bodyPr wrap="square" lIns="0" tIns="0" rIns="0" bIns="0" rtlCol="0" anchor="ctr"/>
-          <a:lstStyle/>
-          <a:p>
-            <a:pPr algn="l" indent="0" marL="0">
-              <a:buNone/>
-            </a:pPr>
-            <a:r>
-              <a:rPr lang="en-US" sz="4000" b="1" dirty="0">
-                <a:solidFill>
-                  <a:srgbClr val="2563EB"/>
-                </a:solidFill>
-                <a:latin typeface="Georgia" pitchFamily="34" charset="0"/>
-                <a:ea typeface="Georgia" pitchFamily="34" charset="-122"/>
-                <a:cs typeface="Georgia" pitchFamily="34" charset="-120"/>
-              </a:rPr>
-              <a:t>90k iters</a:t>
-            </a:r>
-            <a:endParaRPr lang="en-US" sz="4000" dirty="0"/>
-          </a:p>
-        </p:txBody>
-      </p:sp>
-      <p:sp>
-        <p:nvSpPr>
-          <p:cNvPr id="12" name="Text 10"/>
-          <p:cNvSpPr/>
-          <p:nvPr/>
-        </p:nvSpPr>
-        <p:spPr>
-          <a:xfrm>
-            <a:off x="932688" y="5001768"/>
-            <a:ext cx="3017520" cy="640080"/>
-          </a:xfrm>
-          <a:prstGeom prst="rect">
-            <a:avLst/>
-          </a:prstGeom>
-          <a:noFill/>
-          <a:ln/>
-        </p:spPr>
-        <p:txBody>
-          <a:bodyPr wrap="square" lIns="0" tIns="0" rIns="0" bIns="0" rtlCol="0" anchor="t"/>
-          <a:lstStyle/>
-          <a:p>
-            <a:pPr algn="l" indent="0" marL="0">
-              <a:buNone/>
-            </a:pPr>
-            <a:r>
-              <a:rPr lang="en-US" sz="1300" dirty="0">
-                <a:solidFill>
-                  <a:srgbClr val="5B6B82"/>
-                </a:solidFill>
-                <a:latin typeface="Calibri" pitchFamily="34" charset="0"/>
-                <a:ea typeface="Calibri" pitchFamily="34" charset="-122"/>
-                <a:cs typeface="Calibri" pitchFamily="34" charset="-120"/>
-              </a:rPr>
-              <a:t>~9×10⁷ hands · ~38 h on one GPU</a:t>
-            </a:r>
-            <a:endParaRPr lang="en-US" sz="1300" dirty="0"/>
-          </a:p>
-        </p:txBody>
-      </p:sp>
-      <p:sp>
-        <p:nvSpPr>
-          <p:cNvPr id="13" name="Text 11"/>
-          <p:cNvSpPr/>
-          <p:nvPr/>
-        </p:nvSpPr>
-        <p:spPr>
-          <a:xfrm>
-            <a:off x="4681728" y="2468880"/>
-            <a:ext cx="6940296" cy="3108960"/>
-          </a:xfrm>
-          <a:prstGeom prst="rect">
-            <a:avLst/>
-          </a:prstGeom>
-          <a:noFill/>
-          <a:ln/>
-        </p:spPr>
-        <p:txBody>
-          <a:bodyPr wrap="square" lIns="0" tIns="0" rIns="0" bIns="0" rtlCol="0" anchor="t"/>
-          <a:lstStyle/>
-          <a:p>
-            <a:pPr algn="l" indent="0" marL="0">
-              <a:spcAft>
-                <a:spcPts val="800"/>
-              </a:spcAft>
-              <a:buNone/>
-            </a:pPr>
-            <a:r>
-              <a:rPr lang="en-US" sz="1550" b="1" dirty="0">
-                <a:solidFill>
-                  <a:srgbClr val="15233B"/>
-                </a:solidFill>
-                <a:latin typeface="Calibri" pitchFamily="34" charset="0"/>
-                <a:ea typeface="Calibri" pitchFamily="34" charset="-122"/>
-                <a:cs typeface="Calibri" pitchFamily="34" charset="-120"/>
-              </a:rPr>
-              <a:t>Rewrote the collector </a:t>
-            </a:r>
-            <a:pPr algn="l" marL="342900" indent="-342900">
-              <a:spcAft>
-                <a:spcPts val="800"/>
-              </a:spcAft>
-              <a:buSzPct val="100000"/>
-              <a:buChar char="•"/>
-            </a:pPr>
-            <a:r>
-              <a:rPr lang="en-US" sz="1550" dirty="0">
-                <a:solidFill>
-                  <a:srgbClr val="15233B"/>
-                </a:solidFill>
-                <a:latin typeface="Calibri" pitchFamily="34" charset="0"/>
-                <a:ea typeface="Calibri" pitchFamily="34" charset="-122"/>
-                <a:cs typeface="Calibri" pitchFamily="34" charset="-120"/>
-              </a:rPr>
-              <a:t>to step B games in lockstep and batch all policy/value inference into a single forward pass — the GPU had been starved by Python-side game stepping.</a:t>
-            </a:r>
-            <a:endParaRPr lang="en-US" sz="1550" dirty="0"/>
-          </a:p>
-          <a:p>
-            <a:pPr algn="l" indent="0" marL="0">
-              <a:spcAft>
-                <a:spcPts val="800"/>
-              </a:spcAft>
-              <a:buNone/>
-            </a:pPr>
-            <a:r>
-              <a:rPr lang="en-US" sz="1550" b="1" dirty="0">
-                <a:solidFill>
-                  <a:srgbClr val="15233B"/>
-                </a:solidFill>
-                <a:latin typeface="Calibri" pitchFamily="34" charset="0"/>
-                <a:ea typeface="Calibri" pitchFamily="34" charset="-122"/>
-                <a:cs typeface="Calibri" pitchFamily="34" charset="-120"/>
-              </a:rPr>
-              <a:t>Fixed an inverted PFSP bug </a:t>
-            </a:r>
-            <a:pPr algn="l" marL="342900" indent="-342900">
-              <a:spcAft>
-                <a:spcPts val="800"/>
-              </a:spcAft>
-              <a:buSzPct val="100000"/>
-              <a:buChar char="•"/>
-            </a:pPr>
-            <a:r>
-              <a:rPr lang="en-US" sz="1550" dirty="0">
-                <a:solidFill>
-                  <a:srgbClr val="15233B"/>
-                </a:solidFill>
-                <a:latin typeface="Calibri" pitchFamily="34" charset="0"/>
-                <a:ea typeface="Calibri" pitchFamily="34" charset="-122"/>
-                <a:cs typeface="Calibri" pitchFamily="34" charset="-120"/>
-              </a:rPr>
-              <a:t>(opponent sampling had favored the strongest snapshots) and switched the loss to Trinal-Clip.</a:t>
-            </a:r>
-            <a:endParaRPr lang="en-US" sz="1550" dirty="0"/>
-          </a:p>
-          <a:p>
-            <a:pPr algn="l" indent="0" marL="0">
-              <a:spcAft>
-                <a:spcPts val="800"/>
-              </a:spcAft>
-              <a:buNone/>
-            </a:pPr>
-            <a:r>
-              <a:rPr lang="en-US" sz="1550" b="1" dirty="0">
-                <a:solidFill>
-                  <a:srgbClr val="15233B"/>
-                </a:solidFill>
-                <a:latin typeface="Calibri" pitchFamily="34" charset="0"/>
-                <a:ea typeface="Calibri" pitchFamily="34" charset="-122"/>
-                <a:cs typeface="Calibri" pitchFamily="34" charset="-120"/>
-              </a:rPr>
-              <a:t>Warm-started from the Stage D 21k champion </a:t>
-            </a:r>
-            <a:pPr algn="l" marL="342900" indent="-342900">
-              <a:spcAft>
-                <a:spcPts val="800"/>
-              </a:spcAft>
-              <a:buSzPct val="100000"/>
-              <a:buChar char="•"/>
-            </a:pPr>
-            <a:r>
-              <a:rPr lang="en-US" sz="1550" dirty="0">
-                <a:solidFill>
-                  <a:srgbClr val="15233B"/>
-                </a:solidFill>
-                <a:latin typeface="Calibri" pitchFamily="34" charset="0"/>
-                <a:ea typeface="Calibri" pitchFamily="34" charset="-122"/>
-                <a:cs typeface="Calibri" pitchFamily="34" charset="-120"/>
-              </a:rPr>
-              <a:t>and let it run — to see whether scale alone would push past a certified-good policy.</a:t>
-            </a:r>
-            <a:endParaRPr lang="en-US" sz="1550" dirty="0"/>
-          </a:p>
-        </p:txBody>
-      </p:sp>
-    </p:spTree>
-  </p:cSld>
-  <p:clrMapOvr>
-    <a:masterClrMapping/>
-  </p:clrMapOvr>
-</p:sld>
-</file>
-
-<file path=ppt/slides/slide13.xml><?xml version="1.0" encoding="utf-8"?>
-<p:sld xmlns:a="http://schemas.openxmlformats.org/drawingml/2006/main" xmlns:r="http://schemas.openxmlformats.org/officeDocument/2006/relationships" xmlns:p="http://schemas.openxmlformats.org/presentationml/2006/main">
-  <p:cSld name="Slide 13">
-    <p:bg>
-      <p:bgPr>
-        <a:solidFill>
-          <a:srgbClr val="FFFFFF"/>
-        </a:solidFill>
-      </p:bgPr>
-    </p:bg>
-    <p:spTree>
-      <p:nvGrpSpPr>
-        <p:cNvPr id="1" name=""/>
-        <p:cNvGrpSpPr/>
-        <p:nvPr/>
-      </p:nvGrpSpPr>
-      <p:grpSpPr>
-        <a:xfrm>
-          <a:off x="0" y="0"/>
-          <a:ext cx="0" cy="0"/>
-          <a:chOff x="0" y="0"/>
-          <a:chExt cx="0" cy="0"/>
-        </a:xfrm>
-      </p:grpSpPr>
-      <p:sp>
-        <p:nvSpPr>
-          <p:cNvPr id="2" name="Shape 0"/>
-          <p:cNvSpPr/>
-          <p:nvPr/>
-        </p:nvSpPr>
-        <p:spPr>
-          <a:xfrm>
-            <a:off x="566928" y="534924"/>
-            <a:ext cx="109728" cy="109728"/>
-          </a:xfrm>
-          <a:prstGeom prst="ellipse">
-            <a:avLst/>
-          </a:prstGeom>
-          <a:solidFill>
-            <a:srgbClr val="DC2626"/>
-          </a:solidFill>
-          <a:ln/>
-        </p:spPr>
-      </p:sp>
-      <p:sp>
-        <p:nvSpPr>
-          <p:cNvPr id="3" name="Text 1"/>
-          <p:cNvSpPr/>
-          <p:nvPr/>
-        </p:nvSpPr>
-        <p:spPr>
-          <a:xfrm>
-            <a:off x="768096" y="457200"/>
-            <a:ext cx="10853928" cy="274320"/>
-          </a:xfrm>
-          <a:prstGeom prst="rect">
-            <a:avLst/>
-          </a:prstGeom>
-          <a:noFill/>
-          <a:ln/>
-        </p:spPr>
-        <p:txBody>
-          <a:bodyPr wrap="square" lIns="0" tIns="0" rIns="0" bIns="0" rtlCol="0" anchor="ctr"/>
-          <a:lstStyle/>
-          <a:p>
-            <a:pPr algn="l" indent="0" marL="0">
-              <a:buNone/>
-            </a:pPr>
-            <a:r>
-              <a:rPr lang="en-US" sz="1200" b="1" spc="200" kern="0" dirty="0">
-                <a:solidFill>
-                  <a:srgbClr val="DC2626"/>
-                </a:solidFill>
-                <a:latin typeface="Calibri" pitchFamily="34" charset="0"/>
-                <a:ea typeface="Calibri" pitchFamily="34" charset="-122"/>
-                <a:cs typeface="Calibri" pitchFamily="34" charset="-120"/>
-              </a:rPr>
-              <a:t>THE REGRESSION THE EVALUATION CAUGHT</a:t>
-            </a:r>
-            <a:endParaRPr lang="en-US" sz="1200" dirty="0"/>
-          </a:p>
-        </p:txBody>
-      </p:sp>
-      <p:sp>
-        <p:nvSpPr>
-          <p:cNvPr id="4" name="Text 2"/>
-          <p:cNvSpPr/>
-          <p:nvPr/>
-        </p:nvSpPr>
-        <p:spPr>
-          <a:xfrm>
-            <a:off x="566928" y="841248"/>
-            <a:ext cx="11055096" cy="1143000"/>
-          </a:xfrm>
-          <a:prstGeom prst="rect">
-            <a:avLst/>
-          </a:prstGeom>
-          <a:noFill/>
-          <a:ln/>
-        </p:spPr>
-        <p:txBody>
-          <a:bodyPr wrap="square" lIns="0" tIns="0" rIns="0" bIns="0" rtlCol="0" anchor="t"/>
-          <a:lstStyle/>
-          <a:p>
-            <a:pPr algn="l" indent="0" marL="0">
-              <a:lnSpc>
-                <a:spcPct val="102000"/>
-              </a:lnSpc>
-              <a:buNone/>
-            </a:pPr>
-            <a:r>
-              <a:rPr lang="en-US" sz="2500" b="1" dirty="0">
-                <a:solidFill>
-                  <a:srgbClr val="15233B"/>
-                </a:solidFill>
-                <a:latin typeface="Georgia" pitchFamily="34" charset="0"/>
-                <a:ea typeface="Georgia" pitchFamily="34" charset="-122"/>
-                <a:cs typeface="Georgia" pitchFamily="34" charset="-120"/>
-              </a:rPr>
-              <a:t>The training metric stayed positive the whole run; a fixed reference said it had regressed −511 bb/100.</a:t>
-            </a:r>
-            <a:endParaRPr lang="en-US" sz="2500" dirty="0"/>
-          </a:p>
-        </p:txBody>
-      </p:sp>
-      <p:sp>
-        <p:nvSpPr>
-          <p:cNvPr id="5" name="Shape 3"/>
-          <p:cNvSpPr/>
-          <p:nvPr/>
-        </p:nvSpPr>
-        <p:spPr>
-          <a:xfrm>
-            <a:off x="566928" y="6364224"/>
-            <a:ext cx="11055096" cy="0"/>
-          </a:xfrm>
-          <a:prstGeom prst="line">
-            <a:avLst/>
-          </a:prstGeom>
-          <a:noFill/>
-          <a:ln w="12700">
-            <a:solidFill>
-              <a:srgbClr val="E6EAF0"/>
-            </a:solidFill>
-            <a:prstDash val="solid"/>
-          </a:ln>
-        </p:spPr>
-      </p:sp>
-      <p:sp>
-        <p:nvSpPr>
-          <p:cNvPr id="6" name="Text 4"/>
-          <p:cNvSpPr/>
-          <p:nvPr/>
-        </p:nvSpPr>
-        <p:spPr>
-          <a:xfrm>
-            <a:off x="566928" y="6437376"/>
-            <a:ext cx="9144000" cy="274320"/>
-          </a:xfrm>
-          <a:prstGeom prst="rect">
-            <a:avLst/>
-          </a:prstGeom>
-          <a:noFill/>
-          <a:ln/>
-        </p:spPr>
-        <p:txBody>
-          <a:bodyPr wrap="square" lIns="0" tIns="0" rIns="0" bIns="0" rtlCol="0" anchor="ctr"/>
-          <a:lstStyle/>
-          <a:p>
-            <a:pPr algn="l" indent="0" marL="0">
-              <a:buNone/>
-            </a:pPr>
-            <a:r>
-              <a:rPr lang="en-US" sz="950" dirty="0">
-                <a:solidFill>
-                  <a:srgbClr val="5B6B82"/>
-                </a:solidFill>
-                <a:latin typeface="Calibri" pitchFamily="34" charset="0"/>
-                <a:ea typeface="Calibri" pitchFamily="34" charset="-122"/>
-                <a:cs typeface="Calibri" pitchFamily="34" charset="-120"/>
-              </a:rPr>
-              <a:t>Sanil Desai  ·  AlphaHoldem-inspired self-play RL for Heads-Up No-Limit Hold'em</a:t>
-            </a:r>
-            <a:endParaRPr lang="en-US" sz="950" dirty="0"/>
-          </a:p>
-        </p:txBody>
-      </p:sp>
-      <p:sp>
-        <p:nvSpPr>
-          <p:cNvPr id="7" name="Text 5"/>
-          <p:cNvSpPr/>
-          <p:nvPr/>
-        </p:nvSpPr>
-        <p:spPr>
-          <a:xfrm>
-            <a:off x="11000232" y="6437376"/>
-            <a:ext cx="640080" cy="274320"/>
-          </a:xfrm>
-          <a:prstGeom prst="rect">
-            <a:avLst/>
-          </a:prstGeom>
-          <a:noFill/>
-          <a:ln/>
-        </p:spPr>
-        <p:txBody>
-          <a:bodyPr wrap="square" lIns="0" tIns="0" rIns="0" bIns="0" rtlCol="0" anchor="ctr"/>
-          <a:lstStyle/>
-          <a:p>
-            <a:pPr algn="r" indent="0" marL="0">
-              <a:buNone/>
-            </a:pPr>
-            <a:r>
-              <a:rPr lang="en-US" sz="950" dirty="0">
-                <a:solidFill>
-                  <a:srgbClr val="5B6B82"/>
-                </a:solidFill>
-                <a:latin typeface="Calibri" pitchFamily="34" charset="0"/>
-                <a:ea typeface="Calibri" pitchFamily="34" charset="-122"/>
-                <a:cs typeface="Calibri" pitchFamily="34" charset="-120"/>
-              </a:rPr>
-              <a:t>13</a:t>
-            </a:r>
-            <a:endParaRPr lang="en-US" sz="950" dirty="0"/>
-          </a:p>
-        </p:txBody>
-      </p:sp>
-      <p:pic>
-        <p:nvPicPr>
-          <p:cNvPr id="8" name="Image 0" descr="../docs/figures/deck/02_metric_mirage.png">    </p:cNvPr>
-          <p:cNvPicPr>
-            <a:picLocks noChangeAspect="1"/>
-          </p:cNvPicPr>
-          <p:nvPr/>
-        </p:nvPicPr>
-        <p:blipFill>
-          <a:blip r:embed="rId1"/>
-          <a:stretch>
-            <a:fillRect/>
-          </a:stretch>
-        </p:blipFill>
-        <p:spPr>
-          <a:xfrm>
-            <a:off x="566928" y="2258867"/>
-            <a:ext cx="11055096" cy="3849026"/>
-          </a:xfrm>
-          <a:prstGeom prst="rect">
-            <a:avLst/>
-          </a:prstGeom>
-        </p:spPr>
-      </p:pic>
-    </p:spTree>
-  </p:cSld>
-  <p:clrMapOvr>
-    <a:masterClrMapping/>
-  </p:clrMapOvr>
-</p:sld>
-</file>
-
-<file path=ppt/slides/slide14.xml><?xml version="1.0" encoding="utf-8"?>
-<p:sld xmlns:a="http://schemas.openxmlformats.org/drawingml/2006/main" xmlns:r="http://schemas.openxmlformats.org/officeDocument/2006/relationships" xmlns:p="http://schemas.openxmlformats.org/presentationml/2006/main">
-  <p:cSld name="Slide 14">
-    <p:bg>
-      <p:bgPr>
-        <a:solidFill>
-          <a:srgbClr val="FFFFFF"/>
-        </a:solidFill>
-      </p:bgPr>
-    </p:bg>
-    <p:spTree>
-      <p:nvGrpSpPr>
-        <p:cNvPr id="1" name=""/>
-        <p:cNvGrpSpPr/>
-        <p:nvPr/>
-      </p:nvGrpSpPr>
-      <p:grpSpPr>
-        <a:xfrm>
-          <a:off x="0" y="0"/>
-          <a:ext cx="0" cy="0"/>
-          <a:chOff x="0" y="0"/>
-          <a:chExt cx="0" cy="0"/>
-        </a:xfrm>
-      </p:grpSpPr>
-      <p:sp>
-        <p:nvSpPr>
-          <p:cNvPr id="2" name="Shape 0"/>
-          <p:cNvSpPr/>
-          <p:nvPr/>
-        </p:nvSpPr>
-        <p:spPr>
-          <a:xfrm>
-            <a:off x="566928" y="534924"/>
-            <a:ext cx="109728" cy="109728"/>
-          </a:xfrm>
-          <a:prstGeom prst="ellipse">
-            <a:avLst/>
-          </a:prstGeom>
-          <a:solidFill>
-            <a:srgbClr val="DC2626"/>
-          </a:solidFill>
-          <a:ln/>
-        </p:spPr>
-      </p:sp>
-      <p:sp>
-        <p:nvSpPr>
-          <p:cNvPr id="3" name="Text 1"/>
-          <p:cNvSpPr/>
-          <p:nvPr/>
-        </p:nvSpPr>
-        <p:spPr>
-          <a:xfrm>
-            <a:off x="768096" y="457200"/>
-            <a:ext cx="10853928" cy="274320"/>
-          </a:xfrm>
-          <a:prstGeom prst="rect">
-            <a:avLst/>
-          </a:prstGeom>
-          <a:noFill/>
-          <a:ln/>
-        </p:spPr>
-        <p:txBody>
-          <a:bodyPr wrap="square" lIns="0" tIns="0" rIns="0" bIns="0" rtlCol="0" anchor="ctr"/>
-          <a:lstStyle/>
-          <a:p>
-            <a:pPr algn="l" indent="0" marL="0">
-              <a:buNone/>
-            </a:pPr>
-            <a:r>
-              <a:rPr lang="en-US" sz="1200" b="1" spc="200" kern="0" dirty="0">
-                <a:solidFill>
-                  <a:srgbClr val="DC2626"/>
-                </a:solidFill>
-                <a:latin typeface="Calibri" pitchFamily="34" charset="0"/>
-                <a:ea typeface="Calibri" pitchFamily="34" charset="-122"/>
-                <a:cs typeface="Calibri" pitchFamily="34" charset="-120"/>
-              </a:rPr>
-              <a:t>WHAT WENT WRONG</a:t>
-            </a:r>
-            <a:endParaRPr lang="en-US" sz="1200" dirty="0"/>
-          </a:p>
-        </p:txBody>
-      </p:sp>
-      <p:sp>
-        <p:nvSpPr>
-          <p:cNvPr id="4" name="Text 2"/>
-          <p:cNvSpPr/>
-          <p:nvPr/>
-        </p:nvSpPr>
-        <p:spPr>
-          <a:xfrm>
-            <a:off x="566928" y="841248"/>
-            <a:ext cx="11055096" cy="1143000"/>
-          </a:xfrm>
-          <a:prstGeom prst="rect">
-            <a:avLst/>
-          </a:prstGeom>
-          <a:noFill/>
-          <a:ln/>
-        </p:spPr>
-        <p:txBody>
-          <a:bodyPr wrap="square" lIns="0" tIns="0" rIns="0" bIns="0" rtlCol="0" anchor="t"/>
-          <a:lstStyle/>
-          <a:p>
-            <a:pPr algn="l" indent="0" marL="0">
-              <a:lnSpc>
-                <a:spcPct val="102000"/>
-              </a:lnSpc>
-              <a:buNone/>
-            </a:pPr>
-            <a:r>
-              <a:rPr lang="en-US" sz="2500" b="1" dirty="0">
-                <a:solidFill>
-                  <a:srgbClr val="15233B"/>
-                </a:solidFill>
-                <a:latin typeface="Georgia" pitchFamily="34" charset="0"/>
-                <a:ea typeface="Georgia" pitchFamily="34" charset="-122"/>
-                <a:cs typeface="Georgia" pitchFamily="34" charset="-120"/>
-              </a:rPr>
-              <a:t>Over-aggression drift, not collapse: it crushes random even harder than the champion — but a calling station punishes it.</a:t>
-            </a:r>
-            <a:endParaRPr lang="en-US" sz="2500" dirty="0"/>
-          </a:p>
-        </p:txBody>
-      </p:sp>
-      <p:sp>
-        <p:nvSpPr>
-          <p:cNvPr id="5" name="Shape 3"/>
-          <p:cNvSpPr/>
-          <p:nvPr/>
-        </p:nvSpPr>
-        <p:spPr>
-          <a:xfrm>
-            <a:off x="566928" y="6364224"/>
-            <a:ext cx="11055096" cy="0"/>
-          </a:xfrm>
-          <a:prstGeom prst="line">
-            <a:avLst/>
-          </a:prstGeom>
-          <a:noFill/>
-          <a:ln w="12700">
-            <a:solidFill>
-              <a:srgbClr val="E6EAF0"/>
-            </a:solidFill>
-            <a:prstDash val="solid"/>
-          </a:ln>
-        </p:spPr>
-      </p:sp>
-      <p:sp>
-        <p:nvSpPr>
-          <p:cNvPr id="6" name="Text 4"/>
-          <p:cNvSpPr/>
-          <p:nvPr/>
-        </p:nvSpPr>
-        <p:spPr>
-          <a:xfrm>
-            <a:off x="566928" y="6437376"/>
-            <a:ext cx="9144000" cy="274320"/>
-          </a:xfrm>
-          <a:prstGeom prst="rect">
-            <a:avLst/>
-          </a:prstGeom>
-          <a:noFill/>
-          <a:ln/>
-        </p:spPr>
-        <p:txBody>
-          <a:bodyPr wrap="square" lIns="0" tIns="0" rIns="0" bIns="0" rtlCol="0" anchor="ctr"/>
-          <a:lstStyle/>
-          <a:p>
-            <a:pPr algn="l" indent="0" marL="0">
-              <a:buNone/>
-            </a:pPr>
-            <a:r>
-              <a:rPr lang="en-US" sz="950" dirty="0">
-                <a:solidFill>
-                  <a:srgbClr val="5B6B82"/>
-                </a:solidFill>
-                <a:latin typeface="Calibri" pitchFamily="34" charset="0"/>
-                <a:ea typeface="Calibri" pitchFamily="34" charset="-122"/>
-                <a:cs typeface="Calibri" pitchFamily="34" charset="-120"/>
-              </a:rPr>
-              <a:t>Sanil Desai  ·  AlphaHoldem-inspired self-play RL for Heads-Up No-Limit Hold'em</a:t>
-            </a:r>
-            <a:endParaRPr lang="en-US" sz="950" dirty="0"/>
-          </a:p>
-        </p:txBody>
-      </p:sp>
-      <p:sp>
-        <p:nvSpPr>
-          <p:cNvPr id="7" name="Text 5"/>
-          <p:cNvSpPr/>
-          <p:nvPr/>
-        </p:nvSpPr>
-        <p:spPr>
-          <a:xfrm>
-            <a:off x="11000232" y="6437376"/>
-            <a:ext cx="640080" cy="274320"/>
-          </a:xfrm>
-          <a:prstGeom prst="rect">
-            <a:avLst/>
-          </a:prstGeom>
-          <a:noFill/>
-          <a:ln/>
-        </p:spPr>
-        <p:txBody>
-          <a:bodyPr wrap="square" lIns="0" tIns="0" rIns="0" bIns="0" rtlCol="0" anchor="ctr"/>
-          <a:lstStyle/>
-          <a:p>
-            <a:pPr algn="r" indent="0" marL="0">
-              <a:buNone/>
-            </a:pPr>
-            <a:r>
-              <a:rPr lang="en-US" sz="950" dirty="0">
-                <a:solidFill>
-                  <a:srgbClr val="5B6B82"/>
-                </a:solidFill>
-                <a:latin typeface="Calibri" pitchFamily="34" charset="0"/>
-                <a:ea typeface="Calibri" pitchFamily="34" charset="-122"/>
-                <a:cs typeface="Calibri" pitchFamily="34" charset="-120"/>
-              </a:rPr>
-              <a:t>14</a:t>
-            </a:r>
-            <a:endParaRPr lang="en-US" sz="950" dirty="0"/>
-          </a:p>
-        </p:txBody>
-      </p:sp>
-      <p:pic>
-        <p:nvPicPr>
-          <p:cNvPr id="8" name="Image 0" descr="../docs/figures/deck/06_over_aggression.png">    </p:cNvPr>
-          <p:cNvPicPr>
-            <a:picLocks noChangeAspect="1"/>
-          </p:cNvPicPr>
-          <p:nvPr/>
-        </p:nvPicPr>
-        <p:blipFill>
-          <a:blip r:embed="rId1"/>
-          <a:stretch>
-            <a:fillRect/>
-          </a:stretch>
-        </p:blipFill>
-        <p:spPr>
-          <a:xfrm>
-            <a:off x="2310620" y="2240280"/>
-            <a:ext cx="7567712" cy="3931920"/>
-          </a:xfrm>
-          <a:prstGeom prst="rect">
-            <a:avLst/>
-          </a:prstGeom>
-        </p:spPr>
-      </p:pic>
-    </p:spTree>
-  </p:cSld>
-  <p:clrMapOvr>
-    <a:masterClrMapping/>
-  </p:clrMapOvr>
-</p:sld>
-</file>
-
-<file path=ppt/slides/slide15.xml><?xml version="1.0" encoding="utf-8"?>
-<p:sld xmlns:a="http://schemas.openxmlformats.org/drawingml/2006/main" xmlns:r="http://schemas.openxmlformats.org/officeDocument/2006/relationships" xmlns:p="http://schemas.openxmlformats.org/presentationml/2006/main">
-  <p:cSld name="Slide 15">
     <p:bg>
       <p:bgPr>
         <a:blipFill dpi="0" rotWithShape="1">
@@ -4261,7 +2298,7 @@
         </p:nvSpPr>
         <p:spPr>
           <a:xfrm>
-            <a:off x="566928" y="841248"/>
+            <a:off x="566928" y="914400"/>
             <a:ext cx="109728" cy="109728"/>
           </a:xfrm>
           <a:prstGeom prst="ellipse">
@@ -4281,7 +2318,7 @@
         </p:nvSpPr>
         <p:spPr>
           <a:xfrm>
-            <a:off x="768096" y="758952"/>
+            <a:off x="768096" y="832104"/>
             <a:ext cx="10058400" cy="274320"/>
           </a:xfrm>
           <a:prstGeom prst="rect">
@@ -4306,7 +2343,7 @@
                 <a:ea typeface="Calibri" pitchFamily="34" charset="-122"/>
                 <a:cs typeface="Calibri" pitchFamily="34" charset="-120"/>
               </a:rPr>
-              <a:t>WHAT IT DEMONSTRATES</a:t>
+              <a:t>LIMITATIONS</a:t>
             </a:r>
             <a:endParaRPr lang="en-US" sz="1200" dirty="0"/>
           </a:p>
@@ -4320,8 +2357,8 @@
         </p:nvSpPr>
         <p:spPr>
           <a:xfrm>
-            <a:off x="566928" y="1280160"/>
-            <a:ext cx="11055096" cy="1554480"/>
+            <a:off x="566928" y="1371600"/>
+            <a:ext cx="11055096" cy="822960"/>
           </a:xfrm>
           <a:prstGeom prst="rect">
             <a:avLst/>
@@ -4334,13 +2371,10 @@
           <a:lstStyle/>
           <a:p>
             <a:pPr algn="l" indent="0" marL="0">
-              <a:lnSpc>
-                <a:spcPct val="106000"/>
-              </a:lnSpc>
               <a:buNone/>
             </a:pPr>
             <a:r>
-              <a:rPr lang="en-US" sz="2900" b="1" dirty="0">
+              <a:rPr lang="en-US" sz="3000" b="1" dirty="0">
                 <a:solidFill>
                   <a:srgbClr val="FFFFFF"/>
                 </a:solidFill>
@@ -4348,69 +2382,22 @@
                 <a:ea typeface="Georgia" pitchFamily="34" charset="-122"/>
                 <a:cs typeface="Georgia" pitchFamily="34" charset="-120"/>
               </a:rPr>
-              <a:t>Choose ungameable metrics. Report honest negatives.</a:t>
-            </a:r>
-            <a:endParaRPr lang="en-US" sz="2900" dirty="0"/>
-          </a:p>
-          <a:p>
-            <a:pPr algn="l" indent="0" marL="0">
-              <a:lnSpc>
-                <a:spcPct val="106000"/>
-              </a:lnSpc>
-              <a:buNone/>
-            </a:pPr>
-            <a:r>
-              <a:rPr lang="en-US" sz="2900" b="1" dirty="0">
-                <a:solidFill>
-                  <a:srgbClr val="FFFFFF"/>
-                </a:solidFill>
-                <a:latin typeface="Georgia" pitchFamily="34" charset="0"/>
-                <a:ea typeface="Georgia" pitchFamily="34" charset="-122"/>
-                <a:cs typeface="Georgia" pitchFamily="34" charset="-120"/>
-              </a:rPr>
-              <a:t>Build the evaluation discipline to know when you're fooling yourself.</a:t>
-            </a:r>
-            <a:endParaRPr lang="en-US" sz="2900" dirty="0"/>
-          </a:p>
-        </p:txBody>
-      </p:sp>
-      <p:sp>
-        <p:nvSpPr>
-          <p:cNvPr id="5" name="Shape 3"/>
-          <p:cNvSpPr/>
-          <p:nvPr/>
-        </p:nvSpPr>
-        <p:spPr>
-          <a:xfrm>
-            <a:off x="566928" y="3200400"/>
-            <a:ext cx="3441192" cy="1737360"/>
-          </a:xfrm>
-          <a:prstGeom prst="roundRect">
-            <a:avLst>
-              <a:gd name="adj" fmla="val 3684"/>
-            </a:avLst>
-          </a:prstGeom>
-          <a:solidFill>
-            <a:srgbClr val="16294A"/>
-          </a:solidFill>
-          <a:ln w="12700">
-            <a:solidFill>
-              <a:srgbClr val="31507F"/>
-            </a:solidFill>
-            <a:prstDash val="solid"/>
-          </a:ln>
-        </p:spPr>
-      </p:sp>
-      <p:sp>
-        <p:nvSpPr>
-          <p:cNvPr id="6" name="Text 4"/>
-          <p:cNvSpPr/>
-          <p:nvPr/>
-        </p:nvSpPr>
-        <p:spPr>
-          <a:xfrm>
-            <a:off x="804672" y="3383280"/>
-            <a:ext cx="2983992" cy="365760"/>
+              <a:t>Strong-but-exploitable, measured carefully.</a:t>
+            </a:r>
+            <a:endParaRPr lang="en-US" sz="3000" dirty="0"/>
+          </a:p>
+        </p:txBody>
+      </p:sp>
+      <p:sp>
+        <p:nvSpPr>
+          <p:cNvPr id="5" name="Text 3"/>
+          <p:cNvSpPr/>
+          <p:nvPr/>
+        </p:nvSpPr>
+        <p:spPr>
+          <a:xfrm>
+            <a:off x="566928" y="2651760"/>
+            <a:ext cx="10140696" cy="2194560"/>
           </a:xfrm>
           <a:prstGeom prst="rect">
             <a:avLst/>
@@ -4419,56 +2406,21 @@
           <a:ln/>
         </p:spPr>
         <p:txBody>
-          <a:bodyPr wrap="square" lIns="0" tIns="0" rIns="0" bIns="0" rtlCol="0" anchor="ctr"/>
-          <a:lstStyle/>
-          <a:p>
-            <a:pPr indent="0" marL="0">
-              <a:buNone/>
+          <a:bodyPr wrap="square" lIns="0" tIns="0" rIns="0" bIns="0" rtlCol="0" anchor="t"/>
+          <a:lstStyle/>
+          <a:p>
+            <a:pPr algn="l" marL="342900" indent="-342900">
+              <a:lnSpc>
+                <a:spcPct val="110000"/>
+              </a:lnSpc>
+              <a:spcAft>
+                <a:spcPts val="1200"/>
+              </a:spcAft>
+              <a:buSzPct val="100000"/>
+              <a:buChar char="•"/>
             </a:pPr>
             <a:r>
-              <a:rPr lang="en-US" sz="1450" b="1" dirty="0">
-                <a:solidFill>
-                  <a:srgbClr val="9DB8E6"/>
-                </a:solidFill>
-                <a:latin typeface="Calibri" pitchFamily="34" charset="0"/>
-                <a:ea typeface="Calibri" pitchFamily="34" charset="-122"/>
-                <a:cs typeface="Calibri" pitchFamily="34" charset="-120"/>
-              </a:rPr>
-              <a:t>Ungameable metrics</a:t>
-            </a:r>
-            <a:endParaRPr lang="en-US" sz="1450" dirty="0"/>
-          </a:p>
-        </p:txBody>
-      </p:sp>
-      <p:sp>
-        <p:nvSpPr>
-          <p:cNvPr id="7" name="Text 5"/>
-          <p:cNvSpPr/>
-          <p:nvPr/>
-        </p:nvSpPr>
-        <p:spPr>
-          <a:xfrm>
-            <a:off x="804672" y="3803904"/>
-            <a:ext cx="2965704" cy="960120"/>
-          </a:xfrm>
-          <a:prstGeom prst="rect">
-            <a:avLst/>
-          </a:prstGeom>
-          <a:noFill/>
-          <a:ln/>
-        </p:spPr>
-        <p:txBody>
-          <a:bodyPr wrap="square" lIns="0" tIns="0" rIns="0" bIns="0" rtlCol="0" anchor="t"/>
-          <a:lstStyle/>
-          <a:p>
-            <a:pPr algn="l" indent="0" marL="0">
-              <a:lnSpc>
-                <a:spcPct val="106000"/>
-              </a:lnSpc>
-              <a:buNone/>
-            </a:pPr>
-            <a:r>
-              <a:rPr lang="en-US" sz="1200" dirty="0">
+              <a:rPr lang="en-US" sz="1700" dirty="0">
                 <a:solidFill>
                   <a:srgbClr val="C9D6EC"/>
                 </a:solidFill>
@@ -4476,107 +2428,23 @@
                 <a:ea typeface="Calibri" pitchFamily="34" charset="-122"/>
                 <a:cs typeface="Calibri" pitchFamily="34" charset="-120"/>
               </a:rPr>
-              <a:t>Exact exploitability on Leduc, fixed-reference ladders, and an LBR lower bound — chosen because HUNL's metric is intractable.</a:t>
-            </a:r>
-            <a:endParaRPr lang="en-US" sz="1200" dirty="0"/>
-          </a:p>
-        </p:txBody>
-      </p:sp>
-      <p:sp>
-        <p:nvSpPr>
-          <p:cNvPr id="8" name="Shape 6"/>
-          <p:cNvSpPr/>
-          <p:nvPr/>
-        </p:nvSpPr>
-        <p:spPr>
-          <a:xfrm>
-            <a:off x="4373880" y="3200400"/>
-            <a:ext cx="3441192" cy="1737360"/>
-          </a:xfrm>
-          <a:prstGeom prst="roundRect">
-            <a:avLst>
-              <a:gd name="adj" fmla="val 3684"/>
-            </a:avLst>
-          </a:prstGeom>
-          <a:solidFill>
-            <a:srgbClr val="16294A"/>
-          </a:solidFill>
-          <a:ln w="12700">
-            <a:solidFill>
-              <a:srgbClr val="31507F"/>
-            </a:solidFill>
-            <a:prstDash val="solid"/>
-          </a:ln>
-        </p:spPr>
-      </p:sp>
-      <p:sp>
-        <p:nvSpPr>
-          <p:cNvPr id="9" name="Text 7"/>
-          <p:cNvSpPr/>
-          <p:nvPr/>
-        </p:nvSpPr>
-        <p:spPr>
-          <a:xfrm>
-            <a:off x="4611624" y="3383280"/>
-            <a:ext cx="2983992" cy="365760"/>
-          </a:xfrm>
-          <a:prstGeom prst="rect">
-            <a:avLst/>
-          </a:prstGeom>
-          <a:noFill/>
-          <a:ln/>
-        </p:spPr>
-        <p:txBody>
-          <a:bodyPr wrap="square" lIns="0" tIns="0" rIns="0" bIns="0" rtlCol="0" anchor="ctr"/>
-          <a:lstStyle/>
-          <a:p>
-            <a:pPr indent="0" marL="0">
-              <a:buNone/>
+              <a:t>Not near-Nash, not a record win-rate.</a:t>
+            </a:r>
+            <a:endParaRPr lang="en-US" sz="1700" dirty="0"/>
+          </a:p>
+          <a:p>
+            <a:pPr algn="l" marL="342900" indent="-342900">
+              <a:lnSpc>
+                <a:spcPct val="110000"/>
+              </a:lnSpc>
+              <a:spcAft>
+                <a:spcPts val="1200"/>
+              </a:spcAft>
+              <a:buSzPct val="100000"/>
+              <a:buChar char="•"/>
             </a:pPr>
             <a:r>
-              <a:rPr lang="en-US" sz="1450" b="1" dirty="0">
-                <a:solidFill>
-                  <a:srgbClr val="9DB8E6"/>
-                </a:solidFill>
-                <a:latin typeface="Calibri" pitchFamily="34" charset="0"/>
-                <a:ea typeface="Calibri" pitchFamily="34" charset="-122"/>
-                <a:cs typeface="Calibri" pitchFamily="34" charset="-120"/>
-              </a:rPr>
-              <a:t>Honest negatives</a:t>
-            </a:r>
-            <a:endParaRPr lang="en-US" sz="1450" dirty="0"/>
-          </a:p>
-        </p:txBody>
-      </p:sp>
-      <p:sp>
-        <p:nvSpPr>
-          <p:cNvPr id="10" name="Text 8"/>
-          <p:cNvSpPr/>
-          <p:nvPr/>
-        </p:nvSpPr>
-        <p:spPr>
-          <a:xfrm>
-            <a:off x="4611624" y="3803904"/>
-            <a:ext cx="2965704" cy="960120"/>
-          </a:xfrm>
-          <a:prstGeom prst="rect">
-            <a:avLst/>
-          </a:prstGeom>
-          <a:noFill/>
-          <a:ln/>
-        </p:spPr>
-        <p:txBody>
-          <a:bodyPr wrap="square" lIns="0" tIns="0" rIns="0" bIns="0" rtlCol="0" anchor="t"/>
-          <a:lstStyle/>
-          <a:p>
-            <a:pPr algn="l" indent="0" marL="0">
-              <a:lnSpc>
-                <a:spcPct val="106000"/>
-              </a:lnSpc>
-              <a:buNone/>
-            </a:pPr>
-            <a:r>
-              <a:rPr lang="en-US" sz="1200" dirty="0">
+              <a:rPr lang="en-US" sz="1700" dirty="0">
                 <a:solidFill>
                   <a:srgbClr val="C9D6EC"/>
                 </a:solidFill>
@@ -4584,107 +2452,23 @@
                 <a:ea typeface="Calibri" pitchFamily="34" charset="-122"/>
                 <a:cs typeface="Calibri" pitchFamily="34" charset="-120"/>
               </a:rPr>
-              <a:t>The iterate cycles, network-averaging fails, Trinal-Clip is inert at Leduc scale, the scaled run regressed −511 bb/100 — reported, not buried.</a:t>
-            </a:r>
-            <a:endParaRPr lang="en-US" sz="1200" dirty="0"/>
-          </a:p>
-        </p:txBody>
-      </p:sp>
-      <p:sp>
-        <p:nvSpPr>
-          <p:cNvPr id="11" name="Shape 9"/>
-          <p:cNvSpPr/>
-          <p:nvPr/>
-        </p:nvSpPr>
-        <p:spPr>
-          <a:xfrm>
-            <a:off x="8180832" y="3200400"/>
-            <a:ext cx="3441192" cy="1737360"/>
-          </a:xfrm>
-          <a:prstGeom prst="roundRect">
-            <a:avLst>
-              <a:gd name="adj" fmla="val 3684"/>
-            </a:avLst>
-          </a:prstGeom>
-          <a:solidFill>
-            <a:srgbClr val="16294A"/>
-          </a:solidFill>
-          <a:ln w="12700">
-            <a:solidFill>
-              <a:srgbClr val="31507F"/>
-            </a:solidFill>
-            <a:prstDash val="solid"/>
-          </a:ln>
-        </p:spPr>
-      </p:sp>
-      <p:sp>
-        <p:nvSpPr>
-          <p:cNvPr id="12" name="Text 10"/>
-          <p:cNvSpPr/>
-          <p:nvPr/>
-        </p:nvSpPr>
-        <p:spPr>
-          <a:xfrm>
-            <a:off x="8418576" y="3383280"/>
-            <a:ext cx="2983992" cy="365760"/>
-          </a:xfrm>
-          <a:prstGeom prst="rect">
-            <a:avLst/>
-          </a:prstGeom>
-          <a:noFill/>
-          <a:ln/>
-        </p:spPr>
-        <p:txBody>
-          <a:bodyPr wrap="square" lIns="0" tIns="0" rIns="0" bIns="0" rtlCol="0" anchor="ctr"/>
-          <a:lstStyle/>
-          <a:p>
-            <a:pPr indent="0" marL="0">
-              <a:buNone/>
+              <a:t>Throughput gap vs AlphaHoldem (~2.7B hands, 8 GPUs, 3 days) is not closeable solo.</a:t>
+            </a:r>
+            <a:endParaRPr lang="en-US" sz="1700" dirty="0"/>
+          </a:p>
+          <a:p>
+            <a:pPr algn="l" marL="342900" indent="-342900">
+              <a:lnSpc>
+                <a:spcPct val="110000"/>
+              </a:lnSpc>
+              <a:spcAft>
+                <a:spcPts val="1200"/>
+              </a:spcAft>
+              <a:buSzPct val="100000"/>
+              <a:buChar char="•"/>
             </a:pPr>
             <a:r>
-              <a:rPr lang="en-US" sz="1450" b="1" dirty="0">
-                <a:solidFill>
-                  <a:srgbClr val="9DB8E6"/>
-                </a:solidFill>
-                <a:latin typeface="Calibri" pitchFamily="34" charset="0"/>
-                <a:ea typeface="Calibri" pitchFamily="34" charset="-122"/>
-                <a:cs typeface="Calibri" pitchFamily="34" charset="-120"/>
-              </a:rPr>
-              <a:t>Evaluation discipline</a:t>
-            </a:r>
-            <a:endParaRPr lang="en-US" sz="1450" dirty="0"/>
-          </a:p>
-        </p:txBody>
-      </p:sp>
-      <p:sp>
-        <p:nvSpPr>
-          <p:cNvPr id="13" name="Text 11"/>
-          <p:cNvSpPr/>
-          <p:nvPr/>
-        </p:nvSpPr>
-        <p:spPr>
-          <a:xfrm>
-            <a:off x="8418576" y="3803904"/>
-            <a:ext cx="2965704" cy="960120"/>
-          </a:xfrm>
-          <a:prstGeom prst="rect">
-            <a:avLst/>
-          </a:prstGeom>
-          <a:noFill/>
-          <a:ln/>
-        </p:spPr>
-        <p:txBody>
-          <a:bodyPr wrap="square" lIns="0" tIns="0" rIns="0" bIns="0" rtlCol="0" anchor="t"/>
-          <a:lstStyle/>
-          <a:p>
-            <a:pPr algn="l" indent="0" marL="0">
-              <a:lnSpc>
-                <a:spcPct val="106000"/>
-              </a:lnSpc>
-              <a:buNone/>
-            </a:pPr>
-            <a:r>
-              <a:rPr lang="en-US" sz="1200" dirty="0">
+              <a:rPr lang="en-US" sz="1700" dirty="0">
                 <a:solidFill>
                   <a:srgbClr val="C9D6EC"/>
                 </a:solidFill>
@@ -4692,63 +2476,21 @@
                 <a:ea typeface="Calibri" pitchFamily="34" charset="-122"/>
                 <a:cs typeface="Calibri" pitchFamily="34" charset="-120"/>
               </a:rPr>
-              <a:t>The harness caught what the training curves structurally couldn't see — and refused to promote regressions automatically.</a:t>
-            </a:r>
-            <a:endParaRPr lang="en-US" sz="1200" dirty="0"/>
-          </a:p>
-        </p:txBody>
-      </p:sp>
-      <p:sp>
-        <p:nvSpPr>
-          <p:cNvPr id="14" name="Text 12"/>
-          <p:cNvSpPr/>
-          <p:nvPr/>
-        </p:nvSpPr>
-        <p:spPr>
-          <a:xfrm>
-            <a:off x="566928" y="5166360"/>
-            <a:ext cx="11055096" cy="822960"/>
-          </a:xfrm>
-          <a:prstGeom prst="rect">
-            <a:avLst/>
-          </a:prstGeom>
-          <a:noFill/>
-          <a:ln/>
-        </p:spPr>
-        <p:txBody>
-          <a:bodyPr wrap="square" lIns="0" tIns="0" rIns="0" bIns="0" rtlCol="0" anchor="ctr"/>
-          <a:lstStyle/>
-          <a:p>
-            <a:pPr algn="ctr" indent="0" marL="0">
-              <a:lnSpc>
-                <a:spcPct val="108000"/>
-              </a:lnSpc>
-              <a:buNone/>
-            </a:pPr>
-            <a:r>
-              <a:rPr lang="en-US" sz="1400" i="1" dirty="0">
-                <a:solidFill>
-                  <a:srgbClr val="C9D6EC"/>
-                </a:solidFill>
-                <a:latin typeface="Calibri" pitchFamily="34" charset="0"/>
-                <a:ea typeface="Calibri" pitchFamily="34" charset="-122"/>
-                <a:cs typeface="Calibri" pitchFamily="34" charset="-120"/>
-              </a:rPr>
-              <a:t>The honest ceiling: strong-but-exploitable, measured rigorously — not near-Nash, not a record win-rate. What transfers is first-principles systems building, measurement rigor, and the discipline to publish the negative result.</a:t>
-            </a:r>
-            <a:endParaRPr lang="en-US" sz="1400" dirty="0"/>
-          </a:p>
-        </p:txBody>
-      </p:sp>
-      <p:sp>
-        <p:nvSpPr>
-          <p:cNvPr id="15" name="Text 13"/>
-          <p:cNvSpPr/>
-          <p:nvPr/>
-        </p:nvSpPr>
-        <p:spPr>
-          <a:xfrm>
-            <a:off x="566928" y="6172200"/>
+              <a:t>The champion remains the strongest model; the scaled run was a negative result.</a:t>
+            </a:r>
+            <a:endParaRPr lang="en-US" sz="1700" dirty="0"/>
+          </a:p>
+        </p:txBody>
+      </p:sp>
+      <p:sp>
+        <p:nvSpPr>
+          <p:cNvPr id="6" name="Text 4"/>
+          <p:cNvSpPr/>
+          <p:nvPr/>
+        </p:nvSpPr>
+        <p:spPr>
+          <a:xfrm>
+            <a:off x="566928" y="6126480"/>
             <a:ext cx="11055096" cy="365760"/>
           </a:xfrm>
           <a:prstGeom prst="rect">
@@ -4773,7 +2515,7 @@
                 <a:ea typeface="Calibri" pitchFamily="34" charset="-122"/>
                 <a:cs typeface="Calibri" pitchFamily="34" charset="-120"/>
               </a:rPr>
-              <a:t>txhm-poker-api.onrender.com   ·   github.com/smdesai27/TxhmPokerAgent   ·   Sanil Desai</a:t>
+              <a:t>txhm-poker-api.onrender.com     ·     github.com/smdesai27/TxhmPokerAgent     ·     Sanil Desai</a:t>
             </a:r>
             <a:endParaRPr lang="en-US" sz="1300" dirty="0"/>
           </a:p>
@@ -4852,7 +2594,7 @@
           <a:bodyPr wrap="square" lIns="0" tIns="0" rIns="0" bIns="0" rtlCol="0" anchor="ctr"/>
           <a:lstStyle/>
           <a:p>
-            <a:pPr algn="l" indent="0" marL="0">
+            <a:pPr indent="0" marL="0">
               <a:buNone/>
             </a:pPr>
             <a:r>
@@ -4864,7 +2606,7 @@
                 <a:ea typeface="Calibri" pitchFamily="34" charset="-122"/>
                 <a:cs typeface="Calibri" pitchFamily="34" charset="-120"/>
               </a:rPr>
-              <a:t>THE SHORT VERSION</a:t>
+              <a:t>ARCHITECTURE</a:t>
             </a:r>
             <a:endParaRPr lang="en-US" sz="1200" dirty="0"/>
           </a:p>
@@ -4879,7 +2621,7 @@
         <p:spPr>
           <a:xfrm>
             <a:off x="566928" y="841248"/>
-            <a:ext cx="11055096" cy="1143000"/>
+            <a:ext cx="11055096" cy="1005840"/>
           </a:xfrm>
           <a:prstGeom prst="rect">
             <a:avLst/>
@@ -4898,7 +2640,7 @@
               <a:buNone/>
             </a:pPr>
             <a:r>
-              <a:rPr lang="en-US" sz="2500" b="1" dirty="0">
+              <a:rPr lang="en-US" sz="2400" b="1" dirty="0">
                 <a:solidFill>
                   <a:srgbClr val="15233B"/>
                 </a:solidFill>
@@ -4906,35 +2648,54 @@
                 <a:ea typeface="Georgia" pitchFamily="34" charset="-122"/>
                 <a:cs typeface="Georgia" pitchFamily="34" charset="-120"/>
               </a:rPr>
-              <a:t>Building the agent was the easy half. Knowing whether it was good</a:t>
-            </a:r>
-            <a:endParaRPr lang="en-US" sz="2500" dirty="0"/>
-          </a:p>
+              <a:t>Pseudo-siamese two-tower actor–critic, ~1.5M parameters.</a:t>
+            </a:r>
+            <a:endParaRPr lang="en-US" sz="2400" dirty="0"/>
+          </a:p>
+        </p:txBody>
+      </p:sp>
+      <p:sp>
+        <p:nvSpPr>
+          <p:cNvPr id="5" name="Text 3"/>
+          <p:cNvSpPr/>
+          <p:nvPr/>
+        </p:nvSpPr>
+        <p:spPr>
+          <a:xfrm>
+            <a:off x="566928" y="1847088"/>
+            <a:ext cx="11055096" cy="384048"/>
+          </a:xfrm>
+          <a:prstGeom prst="rect">
+            <a:avLst/>
+          </a:prstGeom>
+          <a:noFill/>
+          <a:ln/>
+        </p:spPr>
+        <p:txBody>
+          <a:bodyPr wrap="square" lIns="0" tIns="0" rIns="0" bIns="0" rtlCol="0" anchor="t"/>
+          <a:lstStyle/>
           <a:p>
             <a:pPr algn="l" indent="0" marL="0">
-              <a:lnSpc>
-                <a:spcPct val="102000"/>
-              </a:lnSpc>
               <a:buNone/>
             </a:pPr>
             <a:r>
-              <a:rPr lang="en-US" sz="2500" b="1" dirty="0">
+              <a:rPr lang="en-US" sz="1300" dirty="0">
                 <a:solidFill>
-                  <a:srgbClr val="15233B"/>
+                  <a:srgbClr val="5B6B82"/>
                 </a:solidFill>
-                <a:latin typeface="Georgia" pitchFamily="34" charset="0"/>
-                <a:ea typeface="Georgia" pitchFamily="34" charset="-122"/>
-                <a:cs typeface="Georgia" pitchFamily="34" charset="-120"/>
+                <a:latin typeface="Calibri" pitchFamily="34" charset="0"/>
+                <a:ea typeface="Calibri" pitchFamily="34" charset="-122"/>
+                <a:cs typeface="Calibri" pitchFamily="34" charset="-120"/>
               </a:rPr>
-              <a:t>was the hard half.</a:t>
-            </a:r>
-            <a:endParaRPr lang="en-US" sz="2500" dirty="0"/>
-          </a:p>
-        </p:txBody>
-      </p:sp>
-      <p:sp>
-        <p:nvSpPr>
-          <p:cNvPr id="5" name="Shape 3"/>
+              <a:t>PPO + GAE  ·  K-best self-play league  ·  FCPA (4) / FCHPA (5) abstraction  ·  OpenSpiel  ·  single GPU</a:t>
+            </a:r>
+            <a:endParaRPr lang="en-US" sz="1300" dirty="0"/>
+          </a:p>
+        </p:txBody>
+      </p:sp>
+      <p:sp>
+        <p:nvSpPr>
+          <p:cNvPr id="6" name="Shape 4"/>
           <p:cNvSpPr/>
           <p:nvPr/>
         </p:nvSpPr>
@@ -4957,7 +2718,7 @@
       </p:sp>
       <p:sp>
         <p:nvSpPr>
-          <p:cNvPr id="6" name="Text 4"/>
+          <p:cNvPr id="7" name="Text 5"/>
           <p:cNvSpPr/>
           <p:nvPr/>
         </p:nvSpPr>
@@ -4996,7 +2757,7 @@
       </p:sp>
       <p:sp>
         <p:nvSpPr>
-          <p:cNvPr id="7" name="Text 5"/>
+          <p:cNvPr id="8" name="Text 6"/>
           <p:cNvSpPr/>
           <p:nvPr/>
         </p:nvSpPr>
@@ -5033,411 +2794,30 @@
           </a:p>
         </p:txBody>
       </p:sp>
-      <p:sp>
-        <p:nvSpPr>
-          <p:cNvPr id="8" name="Shape 6"/>
-          <p:cNvSpPr/>
-          <p:nvPr/>
-        </p:nvSpPr>
-        <p:spPr>
-          <a:xfrm>
-            <a:off x="566928" y="2514600"/>
-            <a:ext cx="3477768" cy="2606040"/>
-          </a:xfrm>
-          <a:prstGeom prst="roundRect">
-            <a:avLst>
-              <a:gd name="adj" fmla="val 2807"/>
-            </a:avLst>
-          </a:prstGeom>
-          <a:solidFill>
-            <a:srgbClr val="FFFFFF"/>
-          </a:solidFill>
-          <a:ln w="12700">
-            <a:solidFill>
-              <a:srgbClr val="E6EAF0"/>
-            </a:solidFill>
-            <a:prstDash val="solid"/>
-          </a:ln>
-          <a:effectLst>
-            <a:outerShdw sx="100000" sy="100000" kx="0" ky="0" algn="bl" rotWithShape="0" blurRad="88900" dist="25400" dir="5400000">
-              <a:srgbClr val="9AABC4">
-                <a:alpha val="20000"/>
-              </a:srgbClr>
-            </a:outerShdw>
-          </a:effectLst>
-        </p:spPr>
-      </p:sp>
-      <p:sp>
-        <p:nvSpPr>
-          <p:cNvPr id="9" name="Shape 7"/>
-          <p:cNvSpPr/>
-          <p:nvPr/>
-        </p:nvSpPr>
-        <p:spPr>
-          <a:xfrm>
-            <a:off x="822960" y="2788920"/>
-            <a:ext cx="146304" cy="146304"/>
-          </a:xfrm>
-          <a:prstGeom prst="ellipse">
-            <a:avLst/>
-          </a:prstGeom>
-          <a:solidFill>
-            <a:srgbClr val="2563EB"/>
-          </a:solidFill>
-          <a:ln/>
-        </p:spPr>
-      </p:sp>
-      <p:sp>
-        <p:nvSpPr>
-          <p:cNvPr id="10" name="Text 8"/>
-          <p:cNvSpPr/>
-          <p:nvPr/>
-        </p:nvSpPr>
-        <p:spPr>
-          <a:xfrm>
-            <a:off x="1060704" y="2715768"/>
-            <a:ext cx="2837688" cy="292608"/>
+      <p:pic>
+        <p:nvPicPr>
+          <p:cNvPr id="9" name="Image 0" descr="../docs/figures/deck/01_architecture.png">    </p:cNvPr>
+          <p:cNvPicPr>
+            <a:picLocks noChangeAspect="1"/>
+          </p:cNvPicPr>
+          <p:nvPr/>
+        </p:nvPicPr>
+        <p:blipFill>
+          <a:blip r:embed="rId1"/>
+          <a:stretch>
+            <a:fillRect/>
+          </a:stretch>
+        </p:blipFill>
+        <p:spPr>
+          <a:xfrm>
+            <a:off x="2381825" y="2377440"/>
+            <a:ext cx="7425302" cy="3822192"/>
           </a:xfrm>
           <a:prstGeom prst="rect">
             <a:avLst/>
           </a:prstGeom>
-          <a:noFill/>
-          <a:ln/>
-        </p:spPr>
-        <p:txBody>
-          <a:bodyPr wrap="square" lIns="0" tIns="0" rIns="0" bIns="0" rtlCol="0" anchor="ctr"/>
-          <a:lstStyle/>
-          <a:p>
-            <a:pPr indent="0" marL="0">
-              <a:buNone/>
-            </a:pPr>
-            <a:r>
-              <a:rPr lang="en-US" sz="1250" b="1" spc="100" kern="0" dirty="0">
-                <a:solidFill>
-                  <a:srgbClr val="2563EB"/>
-                </a:solidFill>
-                <a:latin typeface="Calibri" pitchFamily="34" charset="0"/>
-                <a:ea typeface="Calibri" pitchFamily="34" charset="-122"/>
-                <a:cs typeface="Calibri" pitchFamily="34" charset="-120"/>
-              </a:rPr>
-              <a:t>WHAT I BUILT</a:t>
-            </a:r>
-            <a:endParaRPr lang="en-US" sz="1250" dirty="0"/>
-          </a:p>
-        </p:txBody>
-      </p:sp>
-      <p:sp>
-        <p:nvSpPr>
-          <p:cNvPr id="11" name="Text 9"/>
-          <p:cNvSpPr/>
-          <p:nvPr/>
-        </p:nvSpPr>
-        <p:spPr>
-          <a:xfrm>
-            <a:off x="822960" y="3118104"/>
-            <a:ext cx="2965704" cy="1819656"/>
-          </a:xfrm>
-          <a:prstGeom prst="rect">
-            <a:avLst/>
-          </a:prstGeom>
-          <a:noFill/>
-          <a:ln/>
-        </p:spPr>
-        <p:txBody>
-          <a:bodyPr wrap="square" lIns="0" tIns="0" rIns="0" bIns="0" rtlCol="0" anchor="t"/>
-          <a:lstStyle/>
-          <a:p>
-            <a:pPr algn="l" indent="0" marL="0">
-              <a:lnSpc>
-                <a:spcPct val="105000"/>
-              </a:lnSpc>
-              <a:buNone/>
-            </a:pPr>
-            <a:r>
-              <a:rPr lang="en-US" sz="1350" dirty="0">
-                <a:solidFill>
-                  <a:srgbClr val="15233B"/>
-                </a:solidFill>
-                <a:latin typeface="Calibri" pitchFamily="34" charset="0"/>
-                <a:ea typeface="Calibri" pitchFamily="34" charset="-122"/>
-                <a:cs typeface="Calibri" pitchFamily="34" charset="-120"/>
-              </a:rPr>
-              <a:t>A complete, from-scratch deep-RL system for HUNL — PPO + GAE, a K-best self-play league, an FCPA→FCHPA curriculum, an automated eval harness, and a deployed play-against-it demo. All on a single GPU.</a:t>
-            </a:r>
-            <a:endParaRPr lang="en-US" sz="1350" dirty="0"/>
-          </a:p>
-        </p:txBody>
-      </p:sp>
-      <p:sp>
-        <p:nvSpPr>
-          <p:cNvPr id="12" name="Shape 10"/>
-          <p:cNvSpPr/>
-          <p:nvPr/>
-        </p:nvSpPr>
-        <p:spPr>
-          <a:xfrm>
-            <a:off x="4355592" y="2514600"/>
-            <a:ext cx="3477768" cy="2606040"/>
-          </a:xfrm>
-          <a:prstGeom prst="roundRect">
-            <a:avLst>
-              <a:gd name="adj" fmla="val 2807"/>
-            </a:avLst>
-          </a:prstGeom>
-          <a:solidFill>
-            <a:srgbClr val="FFFFFF"/>
-          </a:solidFill>
-          <a:ln w="12700">
-            <a:solidFill>
-              <a:srgbClr val="E6EAF0"/>
-            </a:solidFill>
-            <a:prstDash val="solid"/>
-          </a:ln>
-          <a:effectLst>
-            <a:outerShdw sx="100000" sy="100000" kx="0" ky="0" algn="bl" rotWithShape="0" blurRad="88900" dist="25400" dir="5400000">
-              <a:srgbClr val="9AABC4">
-                <a:alpha val="20000"/>
-              </a:srgbClr>
-            </a:outerShdw>
-          </a:effectLst>
-        </p:spPr>
-      </p:sp>
-      <p:sp>
-        <p:nvSpPr>
-          <p:cNvPr id="13" name="Shape 11"/>
-          <p:cNvSpPr/>
-          <p:nvPr/>
-        </p:nvSpPr>
-        <p:spPr>
-          <a:xfrm>
-            <a:off x="4611624" y="2788920"/>
-            <a:ext cx="146304" cy="146304"/>
-          </a:xfrm>
-          <a:prstGeom prst="ellipse">
-            <a:avLst/>
-          </a:prstGeom>
-          <a:solidFill>
-            <a:srgbClr val="0D9488"/>
-          </a:solidFill>
-          <a:ln/>
-        </p:spPr>
-      </p:sp>
-      <p:sp>
-        <p:nvSpPr>
-          <p:cNvPr id="14" name="Text 12"/>
-          <p:cNvSpPr/>
-          <p:nvPr/>
-        </p:nvSpPr>
-        <p:spPr>
-          <a:xfrm>
-            <a:off x="4849368" y="2715768"/>
-            <a:ext cx="2837688" cy="292608"/>
-          </a:xfrm>
-          <a:prstGeom prst="rect">
-            <a:avLst/>
-          </a:prstGeom>
-          <a:noFill/>
-          <a:ln/>
-        </p:spPr>
-        <p:txBody>
-          <a:bodyPr wrap="square" lIns="0" tIns="0" rIns="0" bIns="0" rtlCol="0" anchor="ctr"/>
-          <a:lstStyle/>
-          <a:p>
-            <a:pPr indent="0" marL="0">
-              <a:buNone/>
-            </a:pPr>
-            <a:r>
-              <a:rPr lang="en-US" sz="1250" b="1" spc="100" kern="0" dirty="0">
-                <a:solidFill>
-                  <a:srgbClr val="0D9488"/>
-                </a:solidFill>
-                <a:latin typeface="Calibri" pitchFamily="34" charset="0"/>
-                <a:ea typeface="Calibri" pitchFamily="34" charset="-122"/>
-                <a:cs typeface="Calibri" pitchFamily="34" charset="-120"/>
-              </a:rPr>
-              <a:t>THE HONEST RESULT</a:t>
-            </a:r>
-            <a:endParaRPr lang="en-US" sz="1250" dirty="0"/>
-          </a:p>
-        </p:txBody>
-      </p:sp>
-      <p:sp>
-        <p:nvSpPr>
-          <p:cNvPr id="15" name="Text 13"/>
-          <p:cNvSpPr/>
-          <p:nvPr/>
-        </p:nvSpPr>
-        <p:spPr>
-          <a:xfrm>
-            <a:off x="4611624" y="3118104"/>
-            <a:ext cx="2965704" cy="1819656"/>
-          </a:xfrm>
-          <a:prstGeom prst="rect">
-            <a:avLst/>
-          </a:prstGeom>
-          <a:noFill/>
-          <a:ln/>
-        </p:spPr>
-        <p:txBody>
-          <a:bodyPr wrap="square" lIns="0" tIns="0" rIns="0" bIns="0" rtlCol="0" anchor="t"/>
-          <a:lstStyle/>
-          <a:p>
-            <a:pPr algn="l" indent="0" marL="0">
-              <a:lnSpc>
-                <a:spcPct val="105000"/>
-              </a:lnSpc>
-              <a:buNone/>
-            </a:pPr>
-            <a:r>
-              <a:rPr lang="en-US" sz="1350" dirty="0">
-                <a:solidFill>
-                  <a:srgbClr val="15233B"/>
-                </a:solidFill>
-                <a:latin typeface="Calibri" pitchFamily="34" charset="0"/>
-                <a:ea typeface="Calibri" pitchFamily="34" charset="-122"/>
-                <a:cs typeface="Calibri" pitchFamily="34" charset="-120"/>
-              </a:rPr>
-              <a:t>A balanced, gate-passing champion (entropy 1.44 bits). And an evaluation harness that repeatedly caught my “improved” models quietly regressing — when the training curves said they were winning.</a:t>
-            </a:r>
-            <a:endParaRPr lang="en-US" sz="1350" dirty="0"/>
-          </a:p>
-        </p:txBody>
-      </p:sp>
-      <p:sp>
-        <p:nvSpPr>
-          <p:cNvPr id="16" name="Shape 14"/>
-          <p:cNvSpPr/>
-          <p:nvPr/>
-        </p:nvSpPr>
-        <p:spPr>
-          <a:xfrm>
-            <a:off x="8144256" y="2514600"/>
-            <a:ext cx="3477768" cy="2606040"/>
-          </a:xfrm>
-          <a:prstGeom prst="roundRect">
-            <a:avLst>
-              <a:gd name="adj" fmla="val 2807"/>
-            </a:avLst>
-          </a:prstGeom>
-          <a:solidFill>
-            <a:srgbClr val="FFFFFF"/>
-          </a:solidFill>
-          <a:ln w="12700">
-            <a:solidFill>
-              <a:srgbClr val="E6EAF0"/>
-            </a:solidFill>
-            <a:prstDash val="solid"/>
-          </a:ln>
-          <a:effectLst>
-            <a:outerShdw sx="100000" sy="100000" kx="0" ky="0" algn="bl" rotWithShape="0" blurRad="88900" dist="25400" dir="5400000">
-              <a:srgbClr val="9AABC4">
-                <a:alpha val="20000"/>
-              </a:srgbClr>
-            </a:outerShdw>
-          </a:effectLst>
-        </p:spPr>
-      </p:sp>
-      <p:sp>
-        <p:nvSpPr>
-          <p:cNvPr id="17" name="Shape 15"/>
-          <p:cNvSpPr/>
-          <p:nvPr/>
-        </p:nvSpPr>
-        <p:spPr>
-          <a:xfrm>
-            <a:off x="8400288" y="2788920"/>
-            <a:ext cx="146304" cy="146304"/>
-          </a:xfrm>
-          <a:prstGeom prst="ellipse">
-            <a:avLst/>
-          </a:prstGeom>
-          <a:solidFill>
-            <a:srgbClr val="DC2626"/>
-          </a:solidFill>
-          <a:ln/>
-        </p:spPr>
-      </p:sp>
-      <p:sp>
-        <p:nvSpPr>
-          <p:cNvPr id="18" name="Text 16"/>
-          <p:cNvSpPr/>
-          <p:nvPr/>
-        </p:nvSpPr>
-        <p:spPr>
-          <a:xfrm>
-            <a:off x="8638032" y="2715768"/>
-            <a:ext cx="2837688" cy="292608"/>
-          </a:xfrm>
-          <a:prstGeom prst="rect">
-            <a:avLst/>
-          </a:prstGeom>
-          <a:noFill/>
-          <a:ln/>
-        </p:spPr>
-        <p:txBody>
-          <a:bodyPr wrap="square" lIns="0" tIns="0" rIns="0" bIns="0" rtlCol="0" anchor="ctr"/>
-          <a:lstStyle/>
-          <a:p>
-            <a:pPr indent="0" marL="0">
-              <a:buNone/>
-            </a:pPr>
-            <a:r>
-              <a:rPr lang="en-US" sz="1250" b="1" spc="100" kern="0" dirty="0">
-                <a:solidFill>
-                  <a:srgbClr val="DC2626"/>
-                </a:solidFill>
-                <a:latin typeface="Calibri" pitchFamily="34" charset="0"/>
-                <a:ea typeface="Calibri" pitchFamily="34" charset="-122"/>
-                <a:cs typeface="Calibri" pitchFamily="34" charset="-120"/>
-              </a:rPr>
-              <a:t>THE HONEST GAP</a:t>
-            </a:r>
-            <a:endParaRPr lang="en-US" sz="1250" dirty="0"/>
-          </a:p>
-        </p:txBody>
-      </p:sp>
-      <p:sp>
-        <p:nvSpPr>
-          <p:cNvPr id="19" name="Text 17"/>
-          <p:cNvSpPr/>
-          <p:nvPr/>
-        </p:nvSpPr>
-        <p:spPr>
-          <a:xfrm>
-            <a:off x="8400288" y="3118104"/>
-            <a:ext cx="2965704" cy="1819656"/>
-          </a:xfrm>
-          <a:prstGeom prst="rect">
-            <a:avLst/>
-          </a:prstGeom>
-          <a:noFill/>
-          <a:ln/>
-        </p:spPr>
-        <p:txBody>
-          <a:bodyPr wrap="square" lIns="0" tIns="0" rIns="0" bIns="0" rtlCol="0" anchor="t"/>
-          <a:lstStyle/>
-          <a:p>
-            <a:pPr algn="l" indent="0" marL="0">
-              <a:lnSpc>
-                <a:spcPct val="105000"/>
-              </a:lnSpc>
-              <a:buNone/>
-            </a:pPr>
-            <a:r>
-              <a:rPr lang="en-US" sz="1350" dirty="0">
-                <a:solidFill>
-                  <a:srgbClr val="15233B"/>
-                </a:solidFill>
-                <a:latin typeface="Calibri" pitchFamily="34" charset="0"/>
-                <a:ea typeface="Calibri" pitchFamily="34" charset="-122"/>
-                <a:cs typeface="Calibri" pitchFamily="34" charset="-120"/>
-              </a:rPr>
-              <a:t>Not a Slumbot-beater, not near-Nash. Strong-but-exploitable, measured carefully. The deliverable is the measurement discipline — the value is the method, not a magnitude.</a:t>
-            </a:r>
-            <a:endParaRPr lang="en-US" sz="1350" dirty="0"/>
-          </a:p>
-        </p:txBody>
-      </p:sp>
+        </p:spPr>
+      </p:pic>
     </p:spTree>
   </p:cSld>
   <p:clrMapOvr>
@@ -5485,7 +2865,7 @@
             <a:avLst/>
           </a:prstGeom>
           <a:solidFill>
-            <a:srgbClr val="2563EB"/>
+            <a:srgbClr val="B7791F"/>
           </a:solidFill>
           <a:ln/>
         </p:spPr>
@@ -5511,19 +2891,19 @@
           <a:bodyPr wrap="square" lIns="0" tIns="0" rIns="0" bIns="0" rtlCol="0" anchor="ctr"/>
           <a:lstStyle/>
           <a:p>
-            <a:pPr algn="l" indent="0" marL="0">
+            <a:pPr indent="0" marL="0">
               <a:buNone/>
             </a:pPr>
             <a:r>
               <a:rPr lang="en-US" sz="1200" b="1" spc="200" kern="0" dirty="0">
                 <a:solidFill>
-                  <a:srgbClr val="2563EB"/>
+                  <a:srgbClr val="B7791F"/>
                 </a:solidFill>
                 <a:latin typeface="Calibri" pitchFamily="34" charset="0"/>
                 <a:ea typeface="Calibri" pitchFamily="34" charset="-122"/>
                 <a:cs typeface="Calibri" pitchFamily="34" charset="-120"/>
               </a:rPr>
-              <a:t>THE SYSTEM</a:t>
+              <a:t>SCOPE</a:t>
             </a:r>
             <a:endParaRPr lang="en-US" sz="1200" dirty="0"/>
           </a:p>
@@ -5538,7 +2918,7 @@
         <p:spPr>
           <a:xfrm>
             <a:off x="566928" y="841248"/>
-            <a:ext cx="11055096" cy="1143000"/>
+            <a:ext cx="11055096" cy="1005840"/>
           </a:xfrm>
           <a:prstGeom prst="rect">
             <a:avLst/>
@@ -5557,7 +2937,7 @@
               <a:buNone/>
             </a:pPr>
             <a:r>
-              <a:rPr lang="en-US" sz="2500" b="1" dirty="0">
+              <a:rPr lang="en-US" sz="2400" b="1" dirty="0">
                 <a:solidFill>
                   <a:srgbClr val="15233B"/>
                 </a:solidFill>
@@ -5565,9 +2945,9 @@
                 <a:ea typeface="Georgia" pitchFamily="34" charset="-122"/>
                 <a:cs typeface="Georgia" pitchFamily="34" charset="-120"/>
               </a:rPr>
-              <a:t>A complete, end-to-end self-play RL system — built from scratch in PyTorch.</a:t>
-            </a:r>
-            <a:endParaRPr lang="en-US" sz="2500" dirty="0"/>
+              <a:t>Inspired, not reproduced.</a:t>
+            </a:r>
+            <a:endParaRPr lang="en-US" sz="2400" dirty="0"/>
           </a:p>
         </p:txBody>
       </p:sp>
@@ -5672,1311 +3052,9 @@
           </a:p>
         </p:txBody>
       </p:sp>
-      <p:sp>
-        <p:nvSpPr>
-          <p:cNvPr id="8" name="Shape 6"/>
-          <p:cNvSpPr/>
-          <p:nvPr/>
-        </p:nvSpPr>
-        <p:spPr>
-          <a:xfrm>
-            <a:off x="566928" y="2286000"/>
-            <a:ext cx="3489960" cy="1627632"/>
-          </a:xfrm>
-          <a:prstGeom prst="roundRect">
-            <a:avLst>
-              <a:gd name="adj" fmla="val 4494"/>
-            </a:avLst>
-          </a:prstGeom>
-          <a:solidFill>
-            <a:srgbClr val="FFFFFF"/>
-          </a:solidFill>
-          <a:ln w="12700">
-            <a:solidFill>
-              <a:srgbClr val="E6EAF0"/>
-            </a:solidFill>
-            <a:prstDash val="solid"/>
-          </a:ln>
-          <a:effectLst>
-            <a:outerShdw sx="100000" sy="100000" kx="0" ky="0" algn="bl" rotWithShape="0" blurRad="88900" dist="25400" dir="5400000">
-              <a:srgbClr val="9AABC4">
-                <a:alpha val="20000"/>
-              </a:srgbClr>
-            </a:outerShdw>
-          </a:effectLst>
-        </p:spPr>
-      </p:sp>
-      <p:sp>
-        <p:nvSpPr>
-          <p:cNvPr id="9" name="Shape 7"/>
-          <p:cNvSpPr/>
-          <p:nvPr/>
-        </p:nvSpPr>
-        <p:spPr>
-          <a:xfrm>
-            <a:off x="822960" y="2560320"/>
-            <a:ext cx="146304" cy="146304"/>
-          </a:xfrm>
-          <a:prstGeom prst="ellipse">
-            <a:avLst/>
-          </a:prstGeom>
-          <a:solidFill>
-            <a:srgbClr val="2563EB"/>
-          </a:solidFill>
-          <a:ln/>
-        </p:spPr>
-      </p:sp>
-      <p:sp>
-        <p:nvSpPr>
-          <p:cNvPr id="10" name="Text 8"/>
-          <p:cNvSpPr/>
-          <p:nvPr/>
-        </p:nvSpPr>
-        <p:spPr>
-          <a:xfrm>
-            <a:off x="1060704" y="2487168"/>
-            <a:ext cx="2849880" cy="292608"/>
-          </a:xfrm>
-          <a:prstGeom prst="rect">
-            <a:avLst/>
-          </a:prstGeom>
-          <a:noFill/>
-          <a:ln/>
-        </p:spPr>
-        <p:txBody>
-          <a:bodyPr wrap="square" lIns="0" tIns="0" rIns="0" bIns="0" rtlCol="0" anchor="ctr"/>
-          <a:lstStyle/>
-          <a:p>
-            <a:pPr indent="0" marL="0">
-              <a:buNone/>
-            </a:pPr>
-            <a:r>
-              <a:rPr lang="en-US" sz="1250" b="1" spc="100" kern="0" dirty="0">
-                <a:solidFill>
-                  <a:srgbClr val="2563EB"/>
-                </a:solidFill>
-                <a:latin typeface="Calibri" pitchFamily="34" charset="0"/>
-                <a:ea typeface="Calibri" pitchFamily="34" charset="-122"/>
-                <a:cs typeface="Calibri" pitchFamily="34" charset="-120"/>
-              </a:rPr>
-              <a:t>PSEUDO-SIAMESE NET</a:t>
-            </a:r>
-            <a:endParaRPr lang="en-US" sz="1250" dirty="0"/>
-          </a:p>
-        </p:txBody>
-      </p:sp>
-      <p:sp>
-        <p:nvSpPr>
-          <p:cNvPr id="11" name="Text 9"/>
-          <p:cNvSpPr/>
-          <p:nvPr/>
-        </p:nvSpPr>
-        <p:spPr>
-          <a:xfrm>
-            <a:off x="822960" y="2889504"/>
-            <a:ext cx="2977896" cy="841248"/>
-          </a:xfrm>
-          <a:prstGeom prst="rect">
-            <a:avLst/>
-          </a:prstGeom>
-          <a:noFill/>
-          <a:ln/>
-        </p:spPr>
-        <p:txBody>
-          <a:bodyPr wrap="square" lIns="0" tIns="0" rIns="0" bIns="0" rtlCol="0" anchor="t"/>
-          <a:lstStyle/>
-          <a:p>
-            <a:pPr algn="l" indent="0" marL="0">
-              <a:lnSpc>
-                <a:spcPct val="105000"/>
-              </a:lnSpc>
-              <a:buNone/>
-            </a:pPr>
-            <a:r>
-              <a:rPr lang="en-US" sz="1350" dirty="0">
-                <a:solidFill>
-                  <a:srgbClr val="15233B"/>
-                </a:solidFill>
-                <a:latin typeface="Calibri" pitchFamily="34" charset="0"/>
-                <a:ea typeface="Calibri" pitchFamily="34" charset="-122"/>
-                <a:cs typeface="Calibri" pitchFamily="34" charset="-120"/>
-              </a:rPr>
-              <a:t>Two-tower actor–critic, ~1.5M params, search-free single forward pass.</a:t>
-            </a:r>
-            <a:endParaRPr lang="en-US" sz="1350" dirty="0"/>
-          </a:p>
-        </p:txBody>
-      </p:sp>
-      <p:sp>
-        <p:nvSpPr>
-          <p:cNvPr id="12" name="Shape 10"/>
-          <p:cNvSpPr/>
-          <p:nvPr/>
-        </p:nvSpPr>
-        <p:spPr>
-          <a:xfrm>
-            <a:off x="4349496" y="2286000"/>
-            <a:ext cx="3489960" cy="1627632"/>
-          </a:xfrm>
-          <a:prstGeom prst="roundRect">
-            <a:avLst>
-              <a:gd name="adj" fmla="val 4494"/>
-            </a:avLst>
-          </a:prstGeom>
-          <a:solidFill>
-            <a:srgbClr val="FFFFFF"/>
-          </a:solidFill>
-          <a:ln w="12700">
-            <a:solidFill>
-              <a:srgbClr val="E6EAF0"/>
-            </a:solidFill>
-            <a:prstDash val="solid"/>
-          </a:ln>
-          <a:effectLst>
-            <a:outerShdw sx="100000" sy="100000" kx="0" ky="0" algn="bl" rotWithShape="0" blurRad="88900" dist="25400" dir="5400000">
-              <a:srgbClr val="9AABC4">
-                <a:alpha val="20000"/>
-              </a:srgbClr>
-            </a:outerShdw>
-          </a:effectLst>
-        </p:spPr>
-      </p:sp>
-      <p:sp>
-        <p:nvSpPr>
-          <p:cNvPr id="13" name="Shape 11"/>
-          <p:cNvSpPr/>
-          <p:nvPr/>
-        </p:nvSpPr>
-        <p:spPr>
-          <a:xfrm>
-            <a:off x="4605528" y="2560320"/>
-            <a:ext cx="146304" cy="146304"/>
-          </a:xfrm>
-          <a:prstGeom prst="ellipse">
-            <a:avLst/>
-          </a:prstGeom>
-          <a:solidFill>
-            <a:srgbClr val="0D9488"/>
-          </a:solidFill>
-          <a:ln/>
-        </p:spPr>
-      </p:sp>
-      <p:sp>
-        <p:nvSpPr>
-          <p:cNvPr id="14" name="Text 12"/>
-          <p:cNvSpPr/>
-          <p:nvPr/>
-        </p:nvSpPr>
-        <p:spPr>
-          <a:xfrm>
-            <a:off x="4843272" y="2487168"/>
-            <a:ext cx="2849880" cy="292608"/>
-          </a:xfrm>
-          <a:prstGeom prst="rect">
-            <a:avLst/>
-          </a:prstGeom>
-          <a:noFill/>
-          <a:ln/>
-        </p:spPr>
-        <p:txBody>
-          <a:bodyPr wrap="square" lIns="0" tIns="0" rIns="0" bIns="0" rtlCol="0" anchor="ctr"/>
-          <a:lstStyle/>
-          <a:p>
-            <a:pPr indent="0" marL="0">
-              <a:buNone/>
-            </a:pPr>
-            <a:r>
-              <a:rPr lang="en-US" sz="1250" b="1" spc="100" kern="0" dirty="0">
-                <a:solidFill>
-                  <a:srgbClr val="0D9488"/>
-                </a:solidFill>
-                <a:latin typeface="Calibri" pitchFamily="34" charset="0"/>
-                <a:ea typeface="Calibri" pitchFamily="34" charset="-122"/>
-                <a:cs typeface="Calibri" pitchFamily="34" charset="-120"/>
-              </a:rPr>
-              <a:t>PPO + GAE</a:t>
-            </a:r>
-            <a:endParaRPr lang="en-US" sz="1250" dirty="0"/>
-          </a:p>
-        </p:txBody>
-      </p:sp>
-      <p:sp>
-        <p:nvSpPr>
-          <p:cNvPr id="15" name="Text 13"/>
-          <p:cNvSpPr/>
-          <p:nvPr/>
-        </p:nvSpPr>
-        <p:spPr>
-          <a:xfrm>
-            <a:off x="4605528" y="2889504"/>
-            <a:ext cx="2977896" cy="841248"/>
-          </a:xfrm>
-          <a:prstGeom prst="rect">
-            <a:avLst/>
-          </a:prstGeom>
-          <a:noFill/>
-          <a:ln/>
-        </p:spPr>
-        <p:txBody>
-          <a:bodyPr wrap="square" lIns="0" tIns="0" rIns="0" bIns="0" rtlCol="0" anchor="t"/>
-          <a:lstStyle/>
-          <a:p>
-            <a:pPr algn="l" indent="0" marL="0">
-              <a:lnSpc>
-                <a:spcPct val="105000"/>
-              </a:lnSpc>
-              <a:buNone/>
-            </a:pPr>
-            <a:r>
-              <a:rPr lang="en-US" sz="1350" dirty="0">
-                <a:solidFill>
-                  <a:srgbClr val="15233B"/>
-                </a:solidFill>
-                <a:latin typeface="Calibri" pitchFamily="34" charset="0"/>
-                <a:ea typeface="Calibri" pitchFamily="34" charset="-122"/>
-                <a:cs typeface="Calibri" pitchFamily="34" charset="-120"/>
-              </a:rPr>
-              <a:t>Clipped policy loss, Huber value, entropy regularization, KL-adaptive LR.</a:t>
-            </a:r>
-            <a:endParaRPr lang="en-US" sz="1350" dirty="0"/>
-          </a:p>
-        </p:txBody>
-      </p:sp>
-      <p:sp>
-        <p:nvSpPr>
-          <p:cNvPr id="16" name="Shape 14"/>
-          <p:cNvSpPr/>
-          <p:nvPr/>
-        </p:nvSpPr>
-        <p:spPr>
-          <a:xfrm>
-            <a:off x="8132064" y="2286000"/>
-            <a:ext cx="3489960" cy="1627632"/>
-          </a:xfrm>
-          <a:prstGeom prst="roundRect">
-            <a:avLst>
-              <a:gd name="adj" fmla="val 4494"/>
-            </a:avLst>
-          </a:prstGeom>
-          <a:solidFill>
-            <a:srgbClr val="FFFFFF"/>
-          </a:solidFill>
-          <a:ln w="12700">
-            <a:solidFill>
-              <a:srgbClr val="E6EAF0"/>
-            </a:solidFill>
-            <a:prstDash val="solid"/>
-          </a:ln>
-          <a:effectLst>
-            <a:outerShdw sx="100000" sy="100000" kx="0" ky="0" algn="bl" rotWithShape="0" blurRad="88900" dist="25400" dir="5400000">
-              <a:srgbClr val="9AABC4">
-                <a:alpha val="20000"/>
-              </a:srgbClr>
-            </a:outerShdw>
-          </a:effectLst>
-        </p:spPr>
-      </p:sp>
-      <p:sp>
-        <p:nvSpPr>
-          <p:cNvPr id="17" name="Shape 15"/>
-          <p:cNvSpPr/>
-          <p:nvPr/>
-        </p:nvSpPr>
-        <p:spPr>
-          <a:xfrm>
-            <a:off x="8388096" y="2560320"/>
-            <a:ext cx="146304" cy="146304"/>
-          </a:xfrm>
-          <a:prstGeom prst="ellipse">
-            <a:avLst/>
-          </a:prstGeom>
-          <a:solidFill>
-            <a:srgbClr val="2563EB"/>
-          </a:solidFill>
-          <a:ln/>
-        </p:spPr>
-      </p:sp>
-      <p:sp>
-        <p:nvSpPr>
-          <p:cNvPr id="18" name="Text 16"/>
-          <p:cNvSpPr/>
-          <p:nvPr/>
-        </p:nvSpPr>
-        <p:spPr>
-          <a:xfrm>
-            <a:off x="8625840" y="2487168"/>
-            <a:ext cx="2849880" cy="292608"/>
-          </a:xfrm>
-          <a:prstGeom prst="rect">
-            <a:avLst/>
-          </a:prstGeom>
-          <a:noFill/>
-          <a:ln/>
-        </p:spPr>
-        <p:txBody>
-          <a:bodyPr wrap="square" lIns="0" tIns="0" rIns="0" bIns="0" rtlCol="0" anchor="ctr"/>
-          <a:lstStyle/>
-          <a:p>
-            <a:pPr indent="0" marL="0">
-              <a:buNone/>
-            </a:pPr>
-            <a:r>
-              <a:rPr lang="en-US" sz="1250" b="1" spc="100" kern="0" dirty="0">
-                <a:solidFill>
-                  <a:srgbClr val="2563EB"/>
-                </a:solidFill>
-                <a:latin typeface="Calibri" pitchFamily="34" charset="0"/>
-                <a:ea typeface="Calibri" pitchFamily="34" charset="-122"/>
-                <a:cs typeface="Calibri" pitchFamily="34" charset="-120"/>
-              </a:rPr>
-              <a:t>K-BEST SELF-PLAY LEAGUE</a:t>
-            </a:r>
-            <a:endParaRPr lang="en-US" sz="1250" dirty="0"/>
-          </a:p>
-        </p:txBody>
-      </p:sp>
-      <p:sp>
-        <p:nvSpPr>
-          <p:cNvPr id="19" name="Text 17"/>
-          <p:cNvSpPr/>
-          <p:nvPr/>
-        </p:nvSpPr>
-        <p:spPr>
-          <a:xfrm>
-            <a:off x="8388096" y="2889504"/>
-            <a:ext cx="2977896" cy="841248"/>
-          </a:xfrm>
-          <a:prstGeom prst="rect">
-            <a:avLst/>
-          </a:prstGeom>
-          <a:noFill/>
-          <a:ln/>
-        </p:spPr>
-        <p:txBody>
-          <a:bodyPr wrap="square" lIns="0" tIns="0" rIns="0" bIns="0" rtlCol="0" anchor="t"/>
-          <a:lstStyle/>
-          <a:p>
-            <a:pPr algn="l" indent="0" marL="0">
-              <a:lnSpc>
-                <a:spcPct val="105000"/>
-              </a:lnSpc>
-              <a:buNone/>
-            </a:pPr>
-            <a:r>
-              <a:rPr lang="en-US" sz="1350" dirty="0">
-                <a:solidFill>
-                  <a:srgbClr val="15233B"/>
-                </a:solidFill>
-                <a:latin typeface="Calibri" pitchFamily="34" charset="0"/>
-                <a:ea typeface="Calibri" pitchFamily="34" charset="-122"/>
-                <a:cs typeface="Calibri" pitchFamily="34" charset="-120"/>
-              </a:rPr>
-              <a:t>Rolling snapshot pool, Elo-rated, prioritized opponent sampling.</a:t>
-            </a:r>
-            <a:endParaRPr lang="en-US" sz="1350" dirty="0"/>
-          </a:p>
-        </p:txBody>
-      </p:sp>
-      <p:sp>
-        <p:nvSpPr>
-          <p:cNvPr id="20" name="Shape 18"/>
-          <p:cNvSpPr/>
-          <p:nvPr/>
-        </p:nvSpPr>
-        <p:spPr>
-          <a:xfrm>
-            <a:off x="566928" y="4187952"/>
-            <a:ext cx="3489960" cy="1627632"/>
-          </a:xfrm>
-          <a:prstGeom prst="roundRect">
-            <a:avLst>
-              <a:gd name="adj" fmla="val 4494"/>
-            </a:avLst>
-          </a:prstGeom>
-          <a:solidFill>
-            <a:srgbClr val="FFFFFF"/>
-          </a:solidFill>
-          <a:ln w="12700">
-            <a:solidFill>
-              <a:srgbClr val="E6EAF0"/>
-            </a:solidFill>
-            <a:prstDash val="solid"/>
-          </a:ln>
-          <a:effectLst>
-            <a:outerShdw sx="100000" sy="100000" kx="0" ky="0" algn="bl" rotWithShape="0" blurRad="88900" dist="25400" dir="5400000">
-              <a:srgbClr val="9AABC4">
-                <a:alpha val="20000"/>
-              </a:srgbClr>
-            </a:outerShdw>
-          </a:effectLst>
-        </p:spPr>
-      </p:sp>
-      <p:sp>
-        <p:nvSpPr>
-          <p:cNvPr id="21" name="Shape 19"/>
-          <p:cNvSpPr/>
-          <p:nvPr/>
-        </p:nvSpPr>
-        <p:spPr>
-          <a:xfrm>
-            <a:off x="822960" y="4462272"/>
-            <a:ext cx="146304" cy="146304"/>
-          </a:xfrm>
-          <a:prstGeom prst="ellipse">
-            <a:avLst/>
-          </a:prstGeom>
-          <a:solidFill>
-            <a:srgbClr val="B7791F"/>
-          </a:solidFill>
-          <a:ln/>
-        </p:spPr>
-      </p:sp>
-      <p:sp>
-        <p:nvSpPr>
-          <p:cNvPr id="22" name="Text 20"/>
-          <p:cNvSpPr/>
-          <p:nvPr/>
-        </p:nvSpPr>
-        <p:spPr>
-          <a:xfrm>
-            <a:off x="1060704" y="4389120"/>
-            <a:ext cx="2849880" cy="292608"/>
-          </a:xfrm>
-          <a:prstGeom prst="rect">
-            <a:avLst/>
-          </a:prstGeom>
-          <a:noFill/>
-          <a:ln/>
-        </p:spPr>
-        <p:txBody>
-          <a:bodyPr wrap="square" lIns="0" tIns="0" rIns="0" bIns="0" rtlCol="0" anchor="ctr"/>
-          <a:lstStyle/>
-          <a:p>
-            <a:pPr indent="0" marL="0">
-              <a:buNone/>
-            </a:pPr>
-            <a:r>
-              <a:rPr lang="en-US" sz="1250" b="1" spc="100" kern="0" dirty="0">
-                <a:solidFill>
-                  <a:srgbClr val="B7791F"/>
-                </a:solidFill>
-                <a:latin typeface="Calibri" pitchFamily="34" charset="0"/>
-                <a:ea typeface="Calibri" pitchFamily="34" charset="-122"/>
-                <a:cs typeface="Calibri" pitchFamily="34" charset="-120"/>
-              </a:rPr>
-              <a:t>FCPA → FCHPA CURRICULUM</a:t>
-            </a:r>
-            <a:endParaRPr lang="en-US" sz="1250" dirty="0"/>
-          </a:p>
-        </p:txBody>
-      </p:sp>
-      <p:sp>
-        <p:nvSpPr>
-          <p:cNvPr id="23" name="Text 21"/>
-          <p:cNvSpPr/>
-          <p:nvPr/>
-        </p:nvSpPr>
-        <p:spPr>
-          <a:xfrm>
-            <a:off x="822960" y="4791456"/>
-            <a:ext cx="2977896" cy="841248"/>
-          </a:xfrm>
-          <a:prstGeom prst="rect">
-            <a:avLst/>
-          </a:prstGeom>
-          <a:noFill/>
-          <a:ln/>
-        </p:spPr>
-        <p:txBody>
-          <a:bodyPr wrap="square" lIns="0" tIns="0" rIns="0" bIns="0" rtlCol="0" anchor="t"/>
-          <a:lstStyle/>
-          <a:p>
-            <a:pPr algn="l" indent="0" marL="0">
-              <a:lnSpc>
-                <a:spcPct val="105000"/>
-              </a:lnSpc>
-              <a:buNone/>
-            </a:pPr>
-            <a:r>
-              <a:rPr lang="en-US" sz="1350" dirty="0">
-                <a:solidFill>
-                  <a:srgbClr val="15233B"/>
-                </a:solidFill>
-                <a:latin typeface="Calibri" pitchFamily="34" charset="0"/>
-                <a:ea typeface="Calibri" pitchFamily="34" charset="-122"/>
-                <a:cs typeface="Calibri" pitchFamily="34" charset="-120"/>
-              </a:rPr>
-              <a:t>4- then 5-action betting abstractions over OpenSpiel universal_poker.</a:t>
-            </a:r>
-            <a:endParaRPr lang="en-US" sz="1350" dirty="0"/>
-          </a:p>
-        </p:txBody>
-      </p:sp>
-      <p:sp>
-        <p:nvSpPr>
-          <p:cNvPr id="24" name="Shape 22"/>
-          <p:cNvSpPr/>
-          <p:nvPr/>
-        </p:nvSpPr>
-        <p:spPr>
-          <a:xfrm>
-            <a:off x="4349496" y="4187952"/>
-            <a:ext cx="3489960" cy="1627632"/>
-          </a:xfrm>
-          <a:prstGeom prst="roundRect">
-            <a:avLst>
-              <a:gd name="adj" fmla="val 4494"/>
-            </a:avLst>
-          </a:prstGeom>
-          <a:solidFill>
-            <a:srgbClr val="FFFFFF"/>
-          </a:solidFill>
-          <a:ln w="12700">
-            <a:solidFill>
-              <a:srgbClr val="E6EAF0"/>
-            </a:solidFill>
-            <a:prstDash val="solid"/>
-          </a:ln>
-          <a:effectLst>
-            <a:outerShdw sx="100000" sy="100000" kx="0" ky="0" algn="bl" rotWithShape="0" blurRad="88900" dist="25400" dir="5400000">
-              <a:srgbClr val="9AABC4">
-                <a:alpha val="20000"/>
-              </a:srgbClr>
-            </a:outerShdw>
-          </a:effectLst>
-        </p:spPr>
-      </p:sp>
-      <p:sp>
-        <p:nvSpPr>
-          <p:cNvPr id="25" name="Shape 23"/>
-          <p:cNvSpPr/>
-          <p:nvPr/>
-        </p:nvSpPr>
-        <p:spPr>
-          <a:xfrm>
-            <a:off x="4605528" y="4462272"/>
-            <a:ext cx="146304" cy="146304"/>
-          </a:xfrm>
-          <a:prstGeom prst="ellipse">
-            <a:avLst/>
-          </a:prstGeom>
-          <a:solidFill>
-            <a:srgbClr val="0D9488"/>
-          </a:solidFill>
-          <a:ln/>
-        </p:spPr>
-      </p:sp>
-      <p:sp>
-        <p:nvSpPr>
-          <p:cNvPr id="26" name="Text 24"/>
-          <p:cNvSpPr/>
-          <p:nvPr/>
-        </p:nvSpPr>
-        <p:spPr>
-          <a:xfrm>
-            <a:off x="4843272" y="4389120"/>
-            <a:ext cx="2849880" cy="292608"/>
-          </a:xfrm>
-          <a:prstGeom prst="rect">
-            <a:avLst/>
-          </a:prstGeom>
-          <a:noFill/>
-          <a:ln/>
-        </p:spPr>
-        <p:txBody>
-          <a:bodyPr wrap="square" lIns="0" tIns="0" rIns="0" bIns="0" rtlCol="0" anchor="ctr"/>
-          <a:lstStyle/>
-          <a:p>
-            <a:pPr indent="0" marL="0">
-              <a:buNone/>
-            </a:pPr>
-            <a:r>
-              <a:rPr lang="en-US" sz="1250" b="1" spc="100" kern="0" dirty="0">
-                <a:solidFill>
-                  <a:srgbClr val="0D9488"/>
-                </a:solidFill>
-                <a:latin typeface="Calibri" pitchFamily="34" charset="0"/>
-                <a:ea typeface="Calibri" pitchFamily="34" charset="-122"/>
-                <a:cs typeface="Calibri" pitchFamily="34" charset="-120"/>
-              </a:rPr>
-              <a:t>EVALUATION HARNESS</a:t>
-            </a:r>
-            <a:endParaRPr lang="en-US" sz="1250" dirty="0"/>
-          </a:p>
-        </p:txBody>
-      </p:sp>
-      <p:sp>
-        <p:nvSpPr>
-          <p:cNvPr id="27" name="Text 25"/>
-          <p:cNvSpPr/>
-          <p:nvPr/>
-        </p:nvSpPr>
-        <p:spPr>
-          <a:xfrm>
-            <a:off x="4605528" y="4791456"/>
-            <a:ext cx="2977896" cy="841248"/>
-          </a:xfrm>
-          <a:prstGeom prst="rect">
-            <a:avLst/>
-          </a:prstGeom>
-          <a:noFill/>
-          <a:ln/>
-        </p:spPr>
-        <p:txBody>
-          <a:bodyPr wrap="square" lIns="0" tIns="0" rIns="0" bIns="0" rtlCol="0" anchor="t"/>
-          <a:lstStyle/>
-          <a:p>
-            <a:pPr algn="l" indent="0" marL="0">
-              <a:lnSpc>
-                <a:spcPct val="105000"/>
-              </a:lnSpc>
-              <a:buNone/>
-            </a:pPr>
-            <a:r>
-              <a:rPr lang="en-US" sz="1350" dirty="0">
-                <a:solidFill>
-                  <a:srgbClr val="15233B"/>
-                </a:solidFill>
-                <a:latin typeface="Calibri" pitchFamily="34" charset="0"/>
-                <a:ea typeface="Calibri" pitchFamily="34" charset="-122"/>
-                <a:cs typeface="Calibri" pitchFamily="34" charset="-120"/>
-              </a:rPr>
-              <a:t>Multi-seed Student-t CIs, behavior gates, duplicate mirrored-hand eval.</a:t>
-            </a:r>
-            <a:endParaRPr lang="en-US" sz="1350" dirty="0"/>
-          </a:p>
-        </p:txBody>
-      </p:sp>
-      <p:sp>
-        <p:nvSpPr>
-          <p:cNvPr id="28" name="Shape 26"/>
-          <p:cNvSpPr/>
-          <p:nvPr/>
-        </p:nvSpPr>
-        <p:spPr>
-          <a:xfrm>
-            <a:off x="8132064" y="4187952"/>
-            <a:ext cx="3489960" cy="1627632"/>
-          </a:xfrm>
-          <a:prstGeom prst="roundRect">
-            <a:avLst>
-              <a:gd name="adj" fmla="val 4494"/>
-            </a:avLst>
-          </a:prstGeom>
-          <a:solidFill>
-            <a:srgbClr val="FFFFFF"/>
-          </a:solidFill>
-          <a:ln w="12700">
-            <a:solidFill>
-              <a:srgbClr val="E6EAF0"/>
-            </a:solidFill>
-            <a:prstDash val="solid"/>
-          </a:ln>
-          <a:effectLst>
-            <a:outerShdw sx="100000" sy="100000" kx="0" ky="0" algn="bl" rotWithShape="0" blurRad="88900" dist="25400" dir="5400000">
-              <a:srgbClr val="9AABC4">
-                <a:alpha val="20000"/>
-              </a:srgbClr>
-            </a:outerShdw>
-          </a:effectLst>
-        </p:spPr>
-      </p:sp>
-      <p:sp>
-        <p:nvSpPr>
-          <p:cNvPr id="29" name="Shape 27"/>
-          <p:cNvSpPr/>
-          <p:nvPr/>
-        </p:nvSpPr>
-        <p:spPr>
-          <a:xfrm>
-            <a:off x="8388096" y="4462272"/>
-            <a:ext cx="146304" cy="146304"/>
-          </a:xfrm>
-          <a:prstGeom prst="ellipse">
-            <a:avLst/>
-          </a:prstGeom>
-          <a:solidFill>
-            <a:srgbClr val="DC2626"/>
-          </a:solidFill>
-          <a:ln/>
-        </p:spPr>
-      </p:sp>
-      <p:sp>
-        <p:nvSpPr>
-          <p:cNvPr id="30" name="Text 28"/>
-          <p:cNvSpPr/>
-          <p:nvPr/>
-        </p:nvSpPr>
-        <p:spPr>
-          <a:xfrm>
-            <a:off x="8625840" y="4389120"/>
-            <a:ext cx="2849880" cy="292608"/>
-          </a:xfrm>
-          <a:prstGeom prst="rect">
-            <a:avLst/>
-          </a:prstGeom>
-          <a:noFill/>
-          <a:ln/>
-        </p:spPr>
-        <p:txBody>
-          <a:bodyPr wrap="square" lIns="0" tIns="0" rIns="0" bIns="0" rtlCol="0" anchor="ctr"/>
-          <a:lstStyle/>
-          <a:p>
-            <a:pPr indent="0" marL="0">
-              <a:buNone/>
-            </a:pPr>
-            <a:r>
-              <a:rPr lang="en-US" sz="1250" b="1" spc="100" kern="0" dirty="0">
-                <a:solidFill>
-                  <a:srgbClr val="DC2626"/>
-                </a:solidFill>
-                <a:latin typeface="Calibri" pitchFamily="34" charset="0"/>
-                <a:ea typeface="Calibri" pitchFamily="34" charset="-122"/>
-                <a:cs typeface="Calibri" pitchFamily="34" charset="-120"/>
-              </a:rPr>
-              <a:t>SERVED &amp; DEPLOYED</a:t>
-            </a:r>
-            <a:endParaRPr lang="en-US" sz="1250" dirty="0"/>
-          </a:p>
-        </p:txBody>
-      </p:sp>
-      <p:sp>
-        <p:nvSpPr>
-          <p:cNvPr id="31" name="Text 29"/>
-          <p:cNvSpPr/>
-          <p:nvPr/>
-        </p:nvSpPr>
-        <p:spPr>
-          <a:xfrm>
-            <a:off x="8388096" y="4791456"/>
-            <a:ext cx="2977896" cy="841248"/>
-          </a:xfrm>
-          <a:prstGeom prst="rect">
-            <a:avLst/>
-          </a:prstGeom>
-          <a:noFill/>
-          <a:ln/>
-        </p:spPr>
-        <p:txBody>
-          <a:bodyPr wrap="square" lIns="0" tIns="0" rIns="0" bIns="0" rtlCol="0" anchor="t"/>
-          <a:lstStyle/>
-          <a:p>
-            <a:pPr algn="l" indent="0" marL="0">
-              <a:lnSpc>
-                <a:spcPct val="105000"/>
-              </a:lnSpc>
-              <a:buNone/>
-            </a:pPr>
-            <a:r>
-              <a:rPr lang="en-US" sz="1350" dirty="0">
-                <a:solidFill>
-                  <a:srgbClr val="15233B"/>
-                </a:solidFill>
-                <a:latin typeface="Calibri" pitchFamily="34" charset="0"/>
-                <a:ea typeface="Calibri" pitchFamily="34" charset="-122"/>
-                <a:cs typeface="Calibri" pitchFamily="34" charset="-120"/>
-              </a:rPr>
-              <a:t>FastAPI inference backend + a browser demo you can play against.</a:t>
-            </a:r>
-            <a:endParaRPr lang="en-US" sz="1350" dirty="0"/>
-          </a:p>
-        </p:txBody>
-      </p:sp>
-    </p:spTree>
-  </p:cSld>
-  <p:clrMapOvr>
-    <a:masterClrMapping/>
-  </p:clrMapOvr>
-</p:sld>
-</file>
-
-<file path=ppt/slides/slide4.xml><?xml version="1.0" encoding="utf-8"?>
-<p:sld xmlns:a="http://schemas.openxmlformats.org/drawingml/2006/main" xmlns:r="http://schemas.openxmlformats.org/officeDocument/2006/relationships" xmlns:p="http://schemas.openxmlformats.org/presentationml/2006/main">
-  <p:cSld name="Slide 4">
-    <p:bg>
-      <p:bgPr>
-        <a:solidFill>
-          <a:srgbClr val="FFFFFF"/>
-        </a:solidFill>
-      </p:bgPr>
-    </p:bg>
-    <p:spTree>
-      <p:nvGrpSpPr>
-        <p:cNvPr id="1" name=""/>
-        <p:cNvGrpSpPr/>
-        <p:nvPr/>
-      </p:nvGrpSpPr>
-      <p:grpSpPr>
-        <a:xfrm>
-          <a:off x="0" y="0"/>
-          <a:ext cx="0" cy="0"/>
-          <a:chOff x="0" y="0"/>
-          <a:chExt cx="0" cy="0"/>
-        </a:xfrm>
-      </p:grpSpPr>
-      <p:sp>
-        <p:nvSpPr>
-          <p:cNvPr id="2" name="Shape 0"/>
-          <p:cNvSpPr/>
-          <p:nvPr/>
-        </p:nvSpPr>
-        <p:spPr>
-          <a:xfrm>
-            <a:off x="566928" y="534924"/>
-            <a:ext cx="109728" cy="109728"/>
-          </a:xfrm>
-          <a:prstGeom prst="ellipse">
-            <a:avLst/>
-          </a:prstGeom>
-          <a:solidFill>
-            <a:srgbClr val="2563EB"/>
-          </a:solidFill>
-          <a:ln/>
-        </p:spPr>
-      </p:sp>
-      <p:sp>
-        <p:nvSpPr>
-          <p:cNvPr id="3" name="Text 1"/>
-          <p:cNvSpPr/>
-          <p:nvPr/>
-        </p:nvSpPr>
-        <p:spPr>
-          <a:xfrm>
-            <a:off x="768096" y="457200"/>
-            <a:ext cx="10853928" cy="274320"/>
-          </a:xfrm>
-          <a:prstGeom prst="rect">
-            <a:avLst/>
-          </a:prstGeom>
-          <a:noFill/>
-          <a:ln/>
-        </p:spPr>
-        <p:txBody>
-          <a:bodyPr wrap="square" lIns="0" tIns="0" rIns="0" bIns="0" rtlCol="0" anchor="ctr"/>
-          <a:lstStyle/>
-          <a:p>
-            <a:pPr algn="l" indent="0" marL="0">
-              <a:buNone/>
-            </a:pPr>
-            <a:r>
-              <a:rPr lang="en-US" sz="1200" b="1" spc="200" kern="0" dirty="0">
-                <a:solidFill>
-                  <a:srgbClr val="2563EB"/>
-                </a:solidFill>
-                <a:latin typeface="Calibri" pitchFamily="34" charset="0"/>
-                <a:ea typeface="Calibri" pitchFamily="34" charset="-122"/>
-                <a:cs typeface="Calibri" pitchFamily="34" charset="-120"/>
-              </a:rPr>
-              <a:t>THE NETWORK</a:t>
-            </a:r>
-            <a:endParaRPr lang="en-US" sz="1200" dirty="0"/>
-          </a:p>
-        </p:txBody>
-      </p:sp>
-      <p:sp>
-        <p:nvSpPr>
-          <p:cNvPr id="4" name="Text 2"/>
-          <p:cNvSpPr/>
-          <p:nvPr/>
-        </p:nvSpPr>
-        <p:spPr>
-          <a:xfrm>
-            <a:off x="566928" y="841248"/>
-            <a:ext cx="11055096" cy="1143000"/>
-          </a:xfrm>
-          <a:prstGeom prst="rect">
-            <a:avLst/>
-          </a:prstGeom>
-          <a:noFill/>
-          <a:ln/>
-        </p:spPr>
-        <p:txBody>
-          <a:bodyPr wrap="square" lIns="0" tIns="0" rIns="0" bIns="0" rtlCol="0" anchor="t"/>
-          <a:lstStyle/>
-          <a:p>
-            <a:pPr algn="l" indent="0" marL="0">
-              <a:lnSpc>
-                <a:spcPct val="102000"/>
-              </a:lnSpc>
-              <a:buNone/>
-            </a:pPr>
-            <a:r>
-              <a:rPr lang="en-US" sz="2500" b="1" dirty="0">
-                <a:solidFill>
-                  <a:srgbClr val="15233B"/>
-                </a:solidFill>
-                <a:latin typeface="Georgia" pitchFamily="34" charset="0"/>
-                <a:ea typeface="Georgia" pitchFamily="34" charset="-122"/>
-                <a:cs typeface="Georgia" pitchFamily="34" charset="-120"/>
-              </a:rPr>
-              <a:t>A pseudo-siamese two-tower actor–critic — search-free, one masked forward pass per decision.</a:t>
-            </a:r>
-            <a:endParaRPr lang="en-US" sz="2500" dirty="0"/>
-          </a:p>
-        </p:txBody>
-      </p:sp>
-      <p:sp>
-        <p:nvSpPr>
-          <p:cNvPr id="5" name="Shape 3"/>
-          <p:cNvSpPr/>
-          <p:nvPr/>
-        </p:nvSpPr>
-        <p:spPr>
-          <a:xfrm>
-            <a:off x="566928" y="6364224"/>
-            <a:ext cx="11055096" cy="0"/>
-          </a:xfrm>
-          <a:prstGeom prst="line">
-            <a:avLst/>
-          </a:prstGeom>
-          <a:noFill/>
-          <a:ln w="12700">
-            <a:solidFill>
-              <a:srgbClr val="E6EAF0"/>
-            </a:solidFill>
-            <a:prstDash val="solid"/>
-          </a:ln>
-        </p:spPr>
-      </p:sp>
-      <p:sp>
-        <p:nvSpPr>
-          <p:cNvPr id="6" name="Text 4"/>
-          <p:cNvSpPr/>
-          <p:nvPr/>
-        </p:nvSpPr>
-        <p:spPr>
-          <a:xfrm>
-            <a:off x="566928" y="6437376"/>
-            <a:ext cx="9144000" cy="274320"/>
-          </a:xfrm>
-          <a:prstGeom prst="rect">
-            <a:avLst/>
-          </a:prstGeom>
-          <a:noFill/>
-          <a:ln/>
-        </p:spPr>
-        <p:txBody>
-          <a:bodyPr wrap="square" lIns="0" tIns="0" rIns="0" bIns="0" rtlCol="0" anchor="ctr"/>
-          <a:lstStyle/>
-          <a:p>
-            <a:pPr algn="l" indent="0" marL="0">
-              <a:buNone/>
-            </a:pPr>
-            <a:r>
-              <a:rPr lang="en-US" sz="950" dirty="0">
-                <a:solidFill>
-                  <a:srgbClr val="5B6B82"/>
-                </a:solidFill>
-                <a:latin typeface="Calibri" pitchFamily="34" charset="0"/>
-                <a:ea typeface="Calibri" pitchFamily="34" charset="-122"/>
-                <a:cs typeface="Calibri" pitchFamily="34" charset="-120"/>
-              </a:rPr>
-              <a:t>Sanil Desai  ·  AlphaHoldem-inspired self-play RL for Heads-Up No-Limit Hold'em</a:t>
-            </a:r>
-            <a:endParaRPr lang="en-US" sz="950" dirty="0"/>
-          </a:p>
-        </p:txBody>
-      </p:sp>
-      <p:sp>
-        <p:nvSpPr>
-          <p:cNvPr id="7" name="Text 5"/>
-          <p:cNvSpPr/>
-          <p:nvPr/>
-        </p:nvSpPr>
-        <p:spPr>
-          <a:xfrm>
-            <a:off x="11000232" y="6437376"/>
-            <a:ext cx="640080" cy="274320"/>
-          </a:xfrm>
-          <a:prstGeom prst="rect">
-            <a:avLst/>
-          </a:prstGeom>
-          <a:noFill/>
-          <a:ln/>
-        </p:spPr>
-        <p:txBody>
-          <a:bodyPr wrap="square" lIns="0" tIns="0" rIns="0" bIns="0" rtlCol="0" anchor="ctr"/>
-          <a:lstStyle/>
-          <a:p>
-            <a:pPr algn="r" indent="0" marL="0">
-              <a:buNone/>
-            </a:pPr>
-            <a:r>
-              <a:rPr lang="en-US" sz="950" dirty="0">
-                <a:solidFill>
-                  <a:srgbClr val="5B6B82"/>
-                </a:solidFill>
-                <a:latin typeface="Calibri" pitchFamily="34" charset="0"/>
-                <a:ea typeface="Calibri" pitchFamily="34" charset="-122"/>
-                <a:cs typeface="Calibri" pitchFamily="34" charset="-120"/>
-              </a:rPr>
-              <a:t>4</a:t>
-            </a:r>
-            <a:endParaRPr lang="en-US" sz="950" dirty="0"/>
-          </a:p>
-        </p:txBody>
-      </p:sp>
-      <p:pic>
-        <p:nvPicPr>
-          <p:cNvPr id="8" name="Image 0" descr="../docs/figures/deck/01_architecture.png">    </p:cNvPr>
-          <p:cNvPicPr>
-            <a:picLocks noChangeAspect="1"/>
-          </p:cNvPicPr>
-          <p:nvPr/>
-        </p:nvPicPr>
-        <p:blipFill>
-          <a:blip r:embed="rId1"/>
-          <a:stretch>
-            <a:fillRect/>
-          </a:stretch>
-        </p:blipFill>
-        <p:spPr>
-          <a:xfrm>
-            <a:off x="2097603" y="2057400"/>
-            <a:ext cx="7993747" cy="4114800"/>
-          </a:xfrm>
-          <a:prstGeom prst="rect">
-            <a:avLst/>
-          </a:prstGeom>
-        </p:spPr>
-      </p:pic>
-    </p:spTree>
-  </p:cSld>
-  <p:clrMapOvr>
-    <a:masterClrMapping/>
-  </p:clrMapOvr>
-</p:sld>
-</file>
-
-<file path=ppt/slides/slide5.xml><?xml version="1.0" encoding="utf-8"?>
-<p:sld xmlns:a="http://schemas.openxmlformats.org/drawingml/2006/main" xmlns:r="http://schemas.openxmlformats.org/officeDocument/2006/relationships" xmlns:p="http://schemas.openxmlformats.org/presentationml/2006/main">
-  <p:cSld name="Slide 5">
-    <p:bg>
-      <p:bgPr>
-        <a:solidFill>
-          <a:srgbClr val="FFFFFF"/>
-        </a:solidFill>
-      </p:bgPr>
-    </p:bg>
-    <p:spTree>
-      <p:nvGrpSpPr>
-        <p:cNvPr id="1" name=""/>
-        <p:cNvGrpSpPr/>
-        <p:nvPr/>
-      </p:nvGrpSpPr>
-      <p:grpSpPr>
-        <a:xfrm>
-          <a:off x="0" y="0"/>
-          <a:ext cx="0" cy="0"/>
-          <a:chOff x="0" y="0"/>
-          <a:chExt cx="0" cy="0"/>
-        </a:xfrm>
-      </p:grpSpPr>
-      <p:sp>
-        <p:nvSpPr>
-          <p:cNvPr id="2" name="Shape 0"/>
-          <p:cNvSpPr/>
-          <p:nvPr/>
-        </p:nvSpPr>
-        <p:spPr>
-          <a:xfrm>
-            <a:off x="566928" y="534924"/>
-            <a:ext cx="109728" cy="109728"/>
-          </a:xfrm>
-          <a:prstGeom prst="ellipse">
-            <a:avLst/>
-          </a:prstGeom>
-          <a:solidFill>
-            <a:srgbClr val="B7791F"/>
-          </a:solidFill>
-          <a:ln/>
-        </p:spPr>
-      </p:sp>
-      <p:sp>
-        <p:nvSpPr>
-          <p:cNvPr id="3" name="Text 1"/>
-          <p:cNvSpPr/>
-          <p:nvPr/>
-        </p:nvSpPr>
-        <p:spPr>
-          <a:xfrm>
-            <a:off x="768096" y="457200"/>
-            <a:ext cx="10853928" cy="274320"/>
-          </a:xfrm>
-          <a:prstGeom prst="rect">
-            <a:avLst/>
-          </a:prstGeom>
-          <a:noFill/>
-          <a:ln/>
-        </p:spPr>
-        <p:txBody>
-          <a:bodyPr wrap="square" lIns="0" tIns="0" rIns="0" bIns="0" rtlCol="0" anchor="ctr"/>
-          <a:lstStyle/>
-          <a:p>
-            <a:pPr algn="l" indent="0" marL="0">
-              <a:buNone/>
-            </a:pPr>
-            <a:r>
-              <a:rPr lang="en-US" sz="1200" b="1" spc="200" kern="0" dirty="0">
-                <a:solidFill>
-                  <a:srgbClr val="B7791F"/>
-                </a:solidFill>
-                <a:latin typeface="Calibri" pitchFamily="34" charset="0"/>
-                <a:ea typeface="Calibri" pitchFamily="34" charset="-122"/>
-                <a:cs typeface="Calibri" pitchFamily="34" charset="-120"/>
-              </a:rPr>
-              <a:t>HONEST SCOPE</a:t>
-            </a:r>
-            <a:endParaRPr lang="en-US" sz="1200" dirty="0"/>
-          </a:p>
-        </p:txBody>
-      </p:sp>
-      <p:sp>
-        <p:nvSpPr>
-          <p:cNvPr id="4" name="Text 2"/>
-          <p:cNvSpPr/>
-          <p:nvPr/>
-        </p:nvSpPr>
-        <p:spPr>
-          <a:xfrm>
-            <a:off x="566928" y="841248"/>
-            <a:ext cx="11055096" cy="1143000"/>
-          </a:xfrm>
-          <a:prstGeom prst="rect">
-            <a:avLst/>
-          </a:prstGeom>
-          <a:noFill/>
-          <a:ln/>
-        </p:spPr>
-        <p:txBody>
-          <a:bodyPr wrap="square" lIns="0" tIns="0" rIns="0" bIns="0" rtlCol="0" anchor="t"/>
-          <a:lstStyle/>
-          <a:p>
-            <a:pPr algn="l" indent="0" marL="0">
-              <a:lnSpc>
-                <a:spcPct val="102000"/>
-              </a:lnSpc>
-              <a:buNone/>
-            </a:pPr>
-            <a:r>
-              <a:rPr lang="en-US" sz="2500" b="1" dirty="0">
-                <a:solidFill>
-                  <a:srgbClr val="15233B"/>
-                </a:solidFill>
-                <a:latin typeface="Georgia" pitchFamily="34" charset="0"/>
-                <a:ea typeface="Georgia" pitchFamily="34" charset="-122"/>
-                <a:cs typeface="Georgia" pitchFamily="34" charset="-120"/>
-              </a:rPr>
-              <a:t>This is AlphaHoldem-inspired — not a reproduction. I name every deviation.</a:t>
-            </a:r>
-            <a:endParaRPr lang="en-US" sz="2500" dirty="0"/>
-          </a:p>
-        </p:txBody>
-      </p:sp>
-      <p:sp>
-        <p:nvSpPr>
-          <p:cNvPr id="5" name="Shape 3"/>
-          <p:cNvSpPr/>
-          <p:nvPr/>
-        </p:nvSpPr>
-        <p:spPr>
-          <a:xfrm>
-            <a:off x="566928" y="6364224"/>
-            <a:ext cx="11055096" cy="0"/>
-          </a:xfrm>
-          <a:prstGeom prst="line">
-            <a:avLst/>
-          </a:prstGeom>
-          <a:noFill/>
-          <a:ln w="12700">
-            <a:solidFill>
-              <a:srgbClr val="E6EAF0"/>
-            </a:solidFill>
-            <a:prstDash val="solid"/>
-          </a:ln>
-        </p:spPr>
-      </p:sp>
-      <p:sp>
-        <p:nvSpPr>
-          <p:cNvPr id="6" name="Text 4"/>
-          <p:cNvSpPr/>
-          <p:nvPr/>
-        </p:nvSpPr>
-        <p:spPr>
-          <a:xfrm>
-            <a:off x="566928" y="6437376"/>
-            <a:ext cx="9144000" cy="274320"/>
-          </a:xfrm>
-          <a:prstGeom prst="rect">
-            <a:avLst/>
-          </a:prstGeom>
-          <a:noFill/>
-          <a:ln/>
-        </p:spPr>
-        <p:txBody>
-          <a:bodyPr wrap="square" lIns="0" tIns="0" rIns="0" bIns="0" rtlCol="0" anchor="ctr"/>
-          <a:lstStyle/>
-          <a:p>
-            <a:pPr algn="l" indent="0" marL="0">
-              <a:buNone/>
-            </a:pPr>
-            <a:r>
-              <a:rPr lang="en-US" sz="950" dirty="0">
-                <a:solidFill>
-                  <a:srgbClr val="5B6B82"/>
-                </a:solidFill>
-                <a:latin typeface="Calibri" pitchFamily="34" charset="0"/>
-                <a:ea typeface="Calibri" pitchFamily="34" charset="-122"/>
-                <a:cs typeface="Calibri" pitchFamily="34" charset="-120"/>
-              </a:rPr>
-              <a:t>Sanil Desai  ·  AlphaHoldem-inspired self-play RL for Heads-Up No-Limit Hold'em</a:t>
-            </a:r>
-            <a:endParaRPr lang="en-US" sz="950" dirty="0"/>
-          </a:p>
-        </p:txBody>
-      </p:sp>
-      <p:sp>
-        <p:nvSpPr>
-          <p:cNvPr id="7" name="Text 5"/>
-          <p:cNvSpPr/>
-          <p:nvPr/>
-        </p:nvSpPr>
-        <p:spPr>
-          <a:xfrm>
-            <a:off x="11000232" y="6437376"/>
-            <a:ext cx="640080" cy="274320"/>
-          </a:xfrm>
-          <a:prstGeom prst="rect">
-            <a:avLst/>
-          </a:prstGeom>
-          <a:noFill/>
-          <a:ln/>
-        </p:spPr>
-        <p:txBody>
-          <a:bodyPr wrap="square" lIns="0" tIns="0" rIns="0" bIns="0" rtlCol="0" anchor="ctr"/>
-          <a:lstStyle/>
-          <a:p>
-            <a:pPr algn="r" indent="0" marL="0">
-              <a:buNone/>
-            </a:pPr>
-            <a:r>
-              <a:rPr lang="en-US" sz="950" dirty="0">
-                <a:solidFill>
-                  <a:srgbClr val="5B6B82"/>
-                </a:solidFill>
-                <a:latin typeface="Calibri" pitchFamily="34" charset="0"/>
-                <a:ea typeface="Calibri" pitchFamily="34" charset="-122"/>
-                <a:cs typeface="Calibri" pitchFamily="34" charset="-120"/>
-              </a:rPr>
-              <a:t>5</a:t>
-            </a:r>
-            <a:endParaRPr lang="en-US" sz="950" dirty="0"/>
-          </a:p>
-        </p:txBody>
-      </p:sp>
       <p:graphicFrame>
         <p:nvGraphicFramePr>
-          <p:cNvPr id="6" name="Table 0"/>
+          <p:cNvPr id="4" name="Table 0"/>
           <p:cNvGraphicFramePr>
             <a:graphicFrameLocks noGrp="1"/>
           </p:cNvGraphicFramePr>
@@ -6989,7 +3067,7 @@
           </p:nvPr>
         </p:nvGraphicFramePr>
         <p:xfrm>
-          <a:off x="566928" y="2286000"/>
+          <a:off x="566928" y="2240280"/>
           <a:ext cx="11055096" cy="914400"/>
         </p:xfrm>
         <a:graphic>
@@ -7567,7 +3645,7 @@
                           <a:ea typeface="Calibri" pitchFamily="34" charset="-122"/>
                           <a:cs typeface="Calibri" pitchFamily="34" charset="-120"/>
                         </a:rPr>
-                        <a:t>vanilla clipped PPO + Huber value</a:t>
+                        <a:t>clipped PPO + Huber value</a:t>
                       </a:r>
                       <a:endParaRPr lang="en-US" sz="1300" dirty="0">
                         <a:latin typeface="Calibri" charset="0"/>
@@ -7979,7 +4057,7 @@
                           <a:ea typeface="Calibri" pitchFamily="34" charset="-122"/>
                           <a:cs typeface="Calibri" pitchFamily="34" charset="-120"/>
                         </a:rPr>
-                        <a:t>FCPA (4) / FCHPA (5) betting abstraction</a:t>
+                        <a:t>FCPA (4) / FCHPA (5)</a:t>
                       </a:r>
                       <a:endParaRPr lang="en-US" sz="1300" dirty="0">
                         <a:latin typeface="Calibri" charset="0"/>
@@ -8455,6 +4533,894 @@
 </p:sld>
 </file>
 
+<file path=ppt/slides/slide4.xml><?xml version="1.0" encoding="utf-8"?>
+<p:sld xmlns:a="http://schemas.openxmlformats.org/drawingml/2006/main" xmlns:r="http://schemas.openxmlformats.org/officeDocument/2006/relationships" xmlns:p="http://schemas.openxmlformats.org/presentationml/2006/main">
+  <p:cSld name="Slide 4">
+    <p:bg>
+      <p:bgPr>
+        <a:solidFill>
+          <a:srgbClr val="FFFFFF"/>
+        </a:solidFill>
+      </p:bgPr>
+    </p:bg>
+    <p:spTree>
+      <p:nvGrpSpPr>
+        <p:cNvPr id="1" name=""/>
+        <p:cNvGrpSpPr/>
+        <p:nvPr/>
+      </p:nvGrpSpPr>
+      <p:grpSpPr>
+        <a:xfrm>
+          <a:off x="0" y="0"/>
+          <a:ext cx="0" cy="0"/>
+          <a:chOff x="0" y="0"/>
+          <a:chExt cx="0" cy="0"/>
+        </a:xfrm>
+      </p:grpSpPr>
+      <p:sp>
+        <p:nvSpPr>
+          <p:cNvPr id="2" name="Shape 0"/>
+          <p:cNvSpPr/>
+          <p:nvPr/>
+        </p:nvSpPr>
+        <p:spPr>
+          <a:xfrm>
+            <a:off x="566928" y="534924"/>
+            <a:ext cx="109728" cy="109728"/>
+          </a:xfrm>
+          <a:prstGeom prst="ellipse">
+            <a:avLst/>
+          </a:prstGeom>
+          <a:solidFill>
+            <a:srgbClr val="0D9488"/>
+          </a:solidFill>
+          <a:ln/>
+        </p:spPr>
+      </p:sp>
+      <p:sp>
+        <p:nvSpPr>
+          <p:cNvPr id="3" name="Text 1"/>
+          <p:cNvSpPr/>
+          <p:nvPr/>
+        </p:nvSpPr>
+        <p:spPr>
+          <a:xfrm>
+            <a:off x="768096" y="457200"/>
+            <a:ext cx="10853928" cy="274320"/>
+          </a:xfrm>
+          <a:prstGeom prst="rect">
+            <a:avLst/>
+          </a:prstGeom>
+          <a:noFill/>
+          <a:ln/>
+        </p:spPr>
+        <p:txBody>
+          <a:bodyPr wrap="square" lIns="0" tIns="0" rIns="0" bIns="0" rtlCol="0" anchor="ctr"/>
+          <a:lstStyle/>
+          <a:p>
+            <a:pPr indent="0" marL="0">
+              <a:buNone/>
+            </a:pPr>
+            <a:r>
+              <a:rPr lang="en-US" sz="1200" b="1" spc="200" kern="0" dirty="0">
+                <a:solidFill>
+                  <a:srgbClr val="0D9488"/>
+                </a:solidFill>
+                <a:latin typeface="Calibri" pitchFamily="34" charset="0"/>
+                <a:ea typeface="Calibri" pitchFamily="34" charset="-122"/>
+                <a:cs typeface="Calibri" pitchFamily="34" charset="-120"/>
+              </a:rPr>
+              <a:t>EVALUATION</a:t>
+            </a:r>
+            <a:endParaRPr lang="en-US" sz="1200" dirty="0"/>
+          </a:p>
+        </p:txBody>
+      </p:sp>
+      <p:sp>
+        <p:nvSpPr>
+          <p:cNvPr id="4" name="Text 2"/>
+          <p:cNvSpPr/>
+          <p:nvPr/>
+        </p:nvSpPr>
+        <p:spPr>
+          <a:xfrm>
+            <a:off x="566928" y="841248"/>
+            <a:ext cx="11055096" cy="1005840"/>
+          </a:xfrm>
+          <a:prstGeom prst="rect">
+            <a:avLst/>
+          </a:prstGeom>
+          <a:noFill/>
+          <a:ln/>
+        </p:spPr>
+        <p:txBody>
+          <a:bodyPr wrap="square" lIns="0" tIns="0" rIns="0" bIns="0" rtlCol="0" anchor="t"/>
+          <a:lstStyle/>
+          <a:p>
+            <a:pPr algn="l" indent="0" marL="0">
+              <a:lnSpc>
+                <a:spcPct val="102000"/>
+              </a:lnSpc>
+              <a:buNone/>
+            </a:pPr>
+            <a:r>
+              <a:rPr lang="en-US" sz="2400" b="1" dirty="0">
+                <a:solidFill>
+                  <a:srgbClr val="15233B"/>
+                </a:solidFill>
+                <a:latin typeface="Georgia" pitchFamily="34" charset="0"/>
+                <a:ea typeface="Georgia" pitchFamily="34" charset="-122"/>
+                <a:cs typeface="Georgia" pitchFamily="34" charset="-120"/>
+              </a:rPr>
+              <a:t>Behavior gates gate promotion — and caught a policy collapse.</a:t>
+            </a:r>
+            <a:endParaRPr lang="en-US" sz="2400" dirty="0"/>
+          </a:p>
+        </p:txBody>
+      </p:sp>
+      <p:sp>
+        <p:nvSpPr>
+          <p:cNvPr id="5" name="Text 3"/>
+          <p:cNvSpPr/>
+          <p:nvPr/>
+        </p:nvSpPr>
+        <p:spPr>
+          <a:xfrm>
+            <a:off x="566928" y="1847088"/>
+            <a:ext cx="11055096" cy="384048"/>
+          </a:xfrm>
+          <a:prstGeom prst="rect">
+            <a:avLst/>
+          </a:prstGeom>
+          <a:noFill/>
+          <a:ln/>
+        </p:spPr>
+        <p:txBody>
+          <a:bodyPr wrap="square" lIns="0" tIns="0" rIns="0" bIns="0" rtlCol="0" anchor="t"/>
+          <a:lstStyle/>
+          <a:p>
+            <a:pPr algn="l" indent="0" marL="0">
+              <a:buNone/>
+            </a:pPr>
+            <a:r>
+              <a:rPr lang="en-US" sz="1300" dirty="0">
+                <a:solidFill>
+                  <a:srgbClr val="5B6B82"/>
+                </a:solidFill>
+                <a:latin typeface="Calibri" pitchFamily="34" charset="0"/>
+                <a:ea typeface="Calibri" pitchFamily="34" charset="-122"/>
+                <a:cs typeface="Calibri" pitchFamily="34" charset="-120"/>
+              </a:rPr>
+              <a:t>Envelopes on fold frequency, aggression, entropy, and bet-size mix. A later 49k run scored well on win-rate but collapsed to fold-heavy play; the gates blocked it.</a:t>
+            </a:r>
+            <a:endParaRPr lang="en-US" sz="1300" dirty="0"/>
+          </a:p>
+        </p:txBody>
+      </p:sp>
+      <p:sp>
+        <p:nvSpPr>
+          <p:cNvPr id="6" name="Shape 4"/>
+          <p:cNvSpPr/>
+          <p:nvPr/>
+        </p:nvSpPr>
+        <p:spPr>
+          <a:xfrm>
+            <a:off x="566928" y="6364224"/>
+            <a:ext cx="11055096" cy="0"/>
+          </a:xfrm>
+          <a:prstGeom prst="line">
+            <a:avLst/>
+          </a:prstGeom>
+          <a:noFill/>
+          <a:ln w="12700">
+            <a:solidFill>
+              <a:srgbClr val="E6EAF0"/>
+            </a:solidFill>
+            <a:prstDash val="solid"/>
+          </a:ln>
+        </p:spPr>
+      </p:sp>
+      <p:sp>
+        <p:nvSpPr>
+          <p:cNvPr id="7" name="Text 5"/>
+          <p:cNvSpPr/>
+          <p:nvPr/>
+        </p:nvSpPr>
+        <p:spPr>
+          <a:xfrm>
+            <a:off x="566928" y="6437376"/>
+            <a:ext cx="9144000" cy="274320"/>
+          </a:xfrm>
+          <a:prstGeom prst="rect">
+            <a:avLst/>
+          </a:prstGeom>
+          <a:noFill/>
+          <a:ln/>
+        </p:spPr>
+        <p:txBody>
+          <a:bodyPr wrap="square" lIns="0" tIns="0" rIns="0" bIns="0" rtlCol="0" anchor="ctr"/>
+          <a:lstStyle/>
+          <a:p>
+            <a:pPr algn="l" indent="0" marL="0">
+              <a:buNone/>
+            </a:pPr>
+            <a:r>
+              <a:rPr lang="en-US" sz="950" dirty="0">
+                <a:solidFill>
+                  <a:srgbClr val="5B6B82"/>
+                </a:solidFill>
+                <a:latin typeface="Calibri" pitchFamily="34" charset="0"/>
+                <a:ea typeface="Calibri" pitchFamily="34" charset="-122"/>
+                <a:cs typeface="Calibri" pitchFamily="34" charset="-120"/>
+              </a:rPr>
+              <a:t>Sanil Desai  ·  AlphaHoldem-inspired self-play RL for Heads-Up No-Limit Hold'em</a:t>
+            </a:r>
+            <a:endParaRPr lang="en-US" sz="950" dirty="0"/>
+          </a:p>
+        </p:txBody>
+      </p:sp>
+      <p:sp>
+        <p:nvSpPr>
+          <p:cNvPr id="8" name="Text 6"/>
+          <p:cNvSpPr/>
+          <p:nvPr/>
+        </p:nvSpPr>
+        <p:spPr>
+          <a:xfrm>
+            <a:off x="11000232" y="6437376"/>
+            <a:ext cx="640080" cy="274320"/>
+          </a:xfrm>
+          <a:prstGeom prst="rect">
+            <a:avLst/>
+          </a:prstGeom>
+          <a:noFill/>
+          <a:ln/>
+        </p:spPr>
+        <p:txBody>
+          <a:bodyPr wrap="square" lIns="0" tIns="0" rIns="0" bIns="0" rtlCol="0" anchor="ctr"/>
+          <a:lstStyle/>
+          <a:p>
+            <a:pPr algn="r" indent="0" marL="0">
+              <a:buNone/>
+            </a:pPr>
+            <a:r>
+              <a:rPr lang="en-US" sz="950" dirty="0">
+                <a:solidFill>
+                  <a:srgbClr val="5B6B82"/>
+                </a:solidFill>
+                <a:latin typeface="Calibri" pitchFamily="34" charset="0"/>
+                <a:ea typeface="Calibri" pitchFamily="34" charset="-122"/>
+                <a:cs typeface="Calibri" pitchFamily="34" charset="-120"/>
+              </a:rPr>
+              <a:t>4</a:t>
+            </a:r>
+            <a:endParaRPr lang="en-US" sz="950" dirty="0"/>
+          </a:p>
+        </p:txBody>
+      </p:sp>
+      <p:pic>
+        <p:nvPicPr>
+          <p:cNvPr id="9" name="Image 0" descr="../docs/figures/deck/03_behavior_gates.png">    </p:cNvPr>
+          <p:cNvPicPr>
+            <a:picLocks noChangeAspect="1"/>
+          </p:cNvPicPr>
+          <p:nvPr/>
+        </p:nvPicPr>
+        <p:blipFill>
+          <a:blip r:embed="rId1"/>
+          <a:stretch>
+            <a:fillRect/>
+          </a:stretch>
+        </p:blipFill>
+        <p:spPr>
+          <a:xfrm>
+            <a:off x="2524852" y="2377440"/>
+            <a:ext cx="7139248" cy="3822192"/>
+          </a:xfrm>
+          <a:prstGeom prst="rect">
+            <a:avLst/>
+          </a:prstGeom>
+        </p:spPr>
+      </p:pic>
+    </p:spTree>
+  </p:cSld>
+  <p:clrMapOvr>
+    <a:masterClrMapping/>
+  </p:clrMapOvr>
+</p:sld>
+</file>
+
+<file path=ppt/slides/slide5.xml><?xml version="1.0" encoding="utf-8"?>
+<p:sld xmlns:a="http://schemas.openxmlformats.org/drawingml/2006/main" xmlns:r="http://schemas.openxmlformats.org/officeDocument/2006/relationships" xmlns:p="http://schemas.openxmlformats.org/presentationml/2006/main">
+  <p:cSld name="Slide 5">
+    <p:bg>
+      <p:bgPr>
+        <a:solidFill>
+          <a:srgbClr val="FFFFFF"/>
+        </a:solidFill>
+      </p:bgPr>
+    </p:bg>
+    <p:spTree>
+      <p:nvGrpSpPr>
+        <p:cNvPr id="1" name=""/>
+        <p:cNvGrpSpPr/>
+        <p:nvPr/>
+      </p:nvGrpSpPr>
+      <p:grpSpPr>
+        <a:xfrm>
+          <a:off x="0" y="0"/>
+          <a:ext cx="0" cy="0"/>
+          <a:chOff x="0" y="0"/>
+          <a:chExt cx="0" cy="0"/>
+        </a:xfrm>
+      </p:grpSpPr>
+      <p:sp>
+        <p:nvSpPr>
+          <p:cNvPr id="2" name="Shape 0"/>
+          <p:cNvSpPr/>
+          <p:nvPr/>
+        </p:nvSpPr>
+        <p:spPr>
+          <a:xfrm>
+            <a:off x="566928" y="534924"/>
+            <a:ext cx="109728" cy="109728"/>
+          </a:xfrm>
+          <a:prstGeom prst="ellipse">
+            <a:avLst/>
+          </a:prstGeom>
+          <a:solidFill>
+            <a:srgbClr val="DC2626"/>
+          </a:solidFill>
+          <a:ln/>
+        </p:spPr>
+      </p:sp>
+      <p:sp>
+        <p:nvSpPr>
+          <p:cNvPr id="3" name="Text 1"/>
+          <p:cNvSpPr/>
+          <p:nvPr/>
+        </p:nvSpPr>
+        <p:spPr>
+          <a:xfrm>
+            <a:off x="768096" y="457200"/>
+            <a:ext cx="10853928" cy="274320"/>
+          </a:xfrm>
+          <a:prstGeom prst="rect">
+            <a:avLst/>
+          </a:prstGeom>
+          <a:noFill/>
+          <a:ln/>
+        </p:spPr>
+        <p:txBody>
+          <a:bodyPr wrap="square" lIns="0" tIns="0" rIns="0" bIns="0" rtlCol="0" anchor="ctr"/>
+          <a:lstStyle/>
+          <a:p>
+            <a:pPr indent="0" marL="0">
+              <a:buNone/>
+            </a:pPr>
+            <a:r>
+              <a:rPr lang="en-US" sz="1200" b="1" spc="200" kern="0" dirty="0">
+                <a:solidFill>
+                  <a:srgbClr val="DC2626"/>
+                </a:solidFill>
+                <a:latin typeface="Calibri" pitchFamily="34" charset="0"/>
+                <a:ea typeface="Calibri" pitchFamily="34" charset="-122"/>
+                <a:cs typeface="Calibri" pitchFamily="34" charset="-120"/>
+              </a:rPr>
+              <a:t>BASELINE</a:t>
+            </a:r>
+            <a:endParaRPr lang="en-US" sz="1200" dirty="0"/>
+          </a:p>
+        </p:txBody>
+      </p:sp>
+      <p:sp>
+        <p:nvSpPr>
+          <p:cNvPr id="4" name="Text 2"/>
+          <p:cNvSpPr/>
+          <p:nvPr/>
+        </p:nvSpPr>
+        <p:spPr>
+          <a:xfrm>
+            <a:off x="566928" y="841248"/>
+            <a:ext cx="11055096" cy="1005840"/>
+          </a:xfrm>
+          <a:prstGeom prst="rect">
+            <a:avLst/>
+          </a:prstGeom>
+          <a:noFill/>
+          <a:ln/>
+        </p:spPr>
+        <p:txBody>
+          <a:bodyPr wrap="square" lIns="0" tIns="0" rIns="0" bIns="0" rtlCol="0" anchor="t"/>
+          <a:lstStyle/>
+          <a:p>
+            <a:pPr algn="l" indent="0" marL="0">
+              <a:lnSpc>
+                <a:spcPct val="102000"/>
+              </a:lnSpc>
+              <a:buNone/>
+            </a:pPr>
+            <a:r>
+              <a:rPr lang="en-US" sz="2400" b="1" dirty="0">
+                <a:solidFill>
+                  <a:srgbClr val="15233B"/>
+                </a:solidFill>
+                <a:latin typeface="Georgia" pitchFamily="34" charset="0"/>
+                <a:ea typeface="Georgia" pitchFamily="34" charset="-122"/>
+                <a:cs typeface="Georgia" pitchFamily="34" charset="-120"/>
+              </a:rPr>
+              <a:t>“+897 bb/100 vs MCCFR-ES” is vs a near-random control.</a:t>
+            </a:r>
+            <a:endParaRPr lang="en-US" sz="2400" dirty="0"/>
+          </a:p>
+        </p:txBody>
+      </p:sp>
+      <p:sp>
+        <p:nvSpPr>
+          <p:cNvPr id="5" name="Shape 3"/>
+          <p:cNvSpPr/>
+          <p:nvPr/>
+        </p:nvSpPr>
+        <p:spPr>
+          <a:xfrm>
+            <a:off x="566928" y="6364224"/>
+            <a:ext cx="11055096" cy="0"/>
+          </a:xfrm>
+          <a:prstGeom prst="line">
+            <a:avLst/>
+          </a:prstGeom>
+          <a:noFill/>
+          <a:ln w="12700">
+            <a:solidFill>
+              <a:srgbClr val="E6EAF0"/>
+            </a:solidFill>
+            <a:prstDash val="solid"/>
+          </a:ln>
+        </p:spPr>
+      </p:sp>
+      <p:sp>
+        <p:nvSpPr>
+          <p:cNvPr id="6" name="Text 4"/>
+          <p:cNvSpPr/>
+          <p:nvPr/>
+        </p:nvSpPr>
+        <p:spPr>
+          <a:xfrm>
+            <a:off x="566928" y="6437376"/>
+            <a:ext cx="9144000" cy="274320"/>
+          </a:xfrm>
+          <a:prstGeom prst="rect">
+            <a:avLst/>
+          </a:prstGeom>
+          <a:noFill/>
+          <a:ln/>
+        </p:spPr>
+        <p:txBody>
+          <a:bodyPr wrap="square" lIns="0" tIns="0" rIns="0" bIns="0" rtlCol="0" anchor="ctr"/>
+          <a:lstStyle/>
+          <a:p>
+            <a:pPr algn="l" indent="0" marL="0">
+              <a:buNone/>
+            </a:pPr>
+            <a:r>
+              <a:rPr lang="en-US" sz="950" dirty="0">
+                <a:solidFill>
+                  <a:srgbClr val="5B6B82"/>
+                </a:solidFill>
+                <a:latin typeface="Calibri" pitchFamily="34" charset="0"/>
+                <a:ea typeface="Calibri" pitchFamily="34" charset="-122"/>
+                <a:cs typeface="Calibri" pitchFamily="34" charset="-120"/>
+              </a:rPr>
+              <a:t>Sanil Desai  ·  AlphaHoldem-inspired self-play RL for Heads-Up No-Limit Hold'em</a:t>
+            </a:r>
+            <a:endParaRPr lang="en-US" sz="950" dirty="0"/>
+          </a:p>
+        </p:txBody>
+      </p:sp>
+      <p:sp>
+        <p:nvSpPr>
+          <p:cNvPr id="7" name="Text 5"/>
+          <p:cNvSpPr/>
+          <p:nvPr/>
+        </p:nvSpPr>
+        <p:spPr>
+          <a:xfrm>
+            <a:off x="11000232" y="6437376"/>
+            <a:ext cx="640080" cy="274320"/>
+          </a:xfrm>
+          <a:prstGeom prst="rect">
+            <a:avLst/>
+          </a:prstGeom>
+          <a:noFill/>
+          <a:ln/>
+        </p:spPr>
+        <p:txBody>
+          <a:bodyPr wrap="square" lIns="0" tIns="0" rIns="0" bIns="0" rtlCol="0" anchor="ctr"/>
+          <a:lstStyle/>
+          <a:p>
+            <a:pPr algn="r" indent="0" marL="0">
+              <a:buNone/>
+            </a:pPr>
+            <a:r>
+              <a:rPr lang="en-US" sz="950" dirty="0">
+                <a:solidFill>
+                  <a:srgbClr val="5B6B82"/>
+                </a:solidFill>
+                <a:latin typeface="Calibri" pitchFamily="34" charset="0"/>
+                <a:ea typeface="Calibri" pitchFamily="34" charset="-122"/>
+                <a:cs typeface="Calibri" pitchFamily="34" charset="-120"/>
+              </a:rPr>
+              <a:t>5</a:t>
+            </a:r>
+            <a:endParaRPr lang="en-US" sz="950" dirty="0"/>
+          </a:p>
+        </p:txBody>
+      </p:sp>
+      <p:sp>
+        <p:nvSpPr>
+          <p:cNvPr id="8" name="Shape 6"/>
+          <p:cNvSpPr/>
+          <p:nvPr/>
+        </p:nvSpPr>
+        <p:spPr>
+          <a:xfrm>
+            <a:off x="566928" y="2606040"/>
+            <a:ext cx="3477768" cy="1554480"/>
+          </a:xfrm>
+          <a:prstGeom prst="roundRect">
+            <a:avLst>
+              <a:gd name="adj" fmla="val 4706"/>
+            </a:avLst>
+          </a:prstGeom>
+          <a:solidFill>
+            <a:srgbClr val="F5F8FC"/>
+          </a:solidFill>
+          <a:ln w="12700">
+            <a:solidFill>
+              <a:srgbClr val="E6EAF0"/>
+            </a:solidFill>
+            <a:prstDash val="solid"/>
+          </a:ln>
+        </p:spPr>
+      </p:sp>
+      <p:sp>
+        <p:nvSpPr>
+          <p:cNvPr id="9" name="Text 7"/>
+          <p:cNvSpPr/>
+          <p:nvPr/>
+        </p:nvSpPr>
+        <p:spPr>
+          <a:xfrm>
+            <a:off x="566928" y="2788920"/>
+            <a:ext cx="3477768" cy="731520"/>
+          </a:xfrm>
+          <a:prstGeom prst="rect">
+            <a:avLst/>
+          </a:prstGeom>
+          <a:noFill/>
+          <a:ln/>
+        </p:spPr>
+        <p:txBody>
+          <a:bodyPr wrap="square" lIns="0" tIns="0" rIns="0" bIns="0" rtlCol="0" anchor="ctr"/>
+          <a:lstStyle/>
+          <a:p>
+            <a:pPr algn="ctr" indent="0" marL="0">
+              <a:buNone/>
+            </a:pPr>
+            <a:r>
+              <a:rPr lang="en-US" sz="3800" b="1" dirty="0">
+                <a:solidFill>
+                  <a:srgbClr val="DC2626"/>
+                </a:solidFill>
+                <a:latin typeface="Georgia" pitchFamily="34" charset="0"/>
+                <a:ea typeface="Georgia" pitchFamily="34" charset="-122"/>
+                <a:cs typeface="Georgia" pitchFamily="34" charset="-120"/>
+              </a:rPr>
+              <a:t>+970</a:t>
+            </a:r>
+            <a:endParaRPr lang="en-US" sz="3800" dirty="0"/>
+          </a:p>
+        </p:txBody>
+      </p:sp>
+      <p:sp>
+        <p:nvSpPr>
+          <p:cNvPr id="10" name="Text 8"/>
+          <p:cNvSpPr/>
+          <p:nvPr/>
+        </p:nvSpPr>
+        <p:spPr>
+          <a:xfrm>
+            <a:off x="749808" y="3557016"/>
+            <a:ext cx="3112008" cy="457200"/>
+          </a:xfrm>
+          <a:prstGeom prst="rect">
+            <a:avLst/>
+          </a:prstGeom>
+          <a:noFill/>
+          <a:ln/>
+        </p:spPr>
+        <p:txBody>
+          <a:bodyPr wrap="square" lIns="0" tIns="0" rIns="0" bIns="0" rtlCol="0" anchor="t"/>
+          <a:lstStyle/>
+          <a:p>
+            <a:pPr algn="ctr" indent="0" marL="0">
+              <a:buNone/>
+            </a:pPr>
+            <a:r>
+              <a:rPr lang="en-US" sz="1250" dirty="0">
+                <a:solidFill>
+                  <a:srgbClr val="5B6B82"/>
+                </a:solidFill>
+                <a:latin typeface="Calibri" pitchFamily="34" charset="0"/>
+                <a:ea typeface="Calibri" pitchFamily="34" charset="-122"/>
+                <a:cs typeface="Calibri" pitchFamily="34" charset="-120"/>
+              </a:rPr>
+              <a:t>vs 0-iteration uniform (random)  ·  bb/100</a:t>
+            </a:r>
+            <a:endParaRPr lang="en-US" sz="1250" dirty="0"/>
+          </a:p>
+        </p:txBody>
+      </p:sp>
+      <p:sp>
+        <p:nvSpPr>
+          <p:cNvPr id="11" name="Shape 9"/>
+          <p:cNvSpPr/>
+          <p:nvPr/>
+        </p:nvSpPr>
+        <p:spPr>
+          <a:xfrm>
+            <a:off x="4355592" y="2606040"/>
+            <a:ext cx="3477768" cy="1554480"/>
+          </a:xfrm>
+          <a:prstGeom prst="roundRect">
+            <a:avLst>
+              <a:gd name="adj" fmla="val 4706"/>
+            </a:avLst>
+          </a:prstGeom>
+          <a:solidFill>
+            <a:srgbClr val="F5F8FC"/>
+          </a:solidFill>
+          <a:ln w="12700">
+            <a:solidFill>
+              <a:srgbClr val="E6EAF0"/>
+            </a:solidFill>
+            <a:prstDash val="solid"/>
+          </a:ln>
+        </p:spPr>
+      </p:sp>
+      <p:sp>
+        <p:nvSpPr>
+          <p:cNvPr id="12" name="Text 10"/>
+          <p:cNvSpPr/>
+          <p:nvPr/>
+        </p:nvSpPr>
+        <p:spPr>
+          <a:xfrm>
+            <a:off x="4355592" y="2788920"/>
+            <a:ext cx="3477768" cy="731520"/>
+          </a:xfrm>
+          <a:prstGeom prst="rect">
+            <a:avLst/>
+          </a:prstGeom>
+          <a:noFill/>
+          <a:ln/>
+        </p:spPr>
+        <p:txBody>
+          <a:bodyPr wrap="square" lIns="0" tIns="0" rIns="0" bIns="0" rtlCol="0" anchor="ctr"/>
+          <a:lstStyle/>
+          <a:p>
+            <a:pPr algn="ctr" indent="0" marL="0">
+              <a:buNone/>
+            </a:pPr>
+            <a:r>
+              <a:rPr lang="en-US" sz="3800" b="1" dirty="0">
+                <a:solidFill>
+                  <a:srgbClr val="5B6B82"/>
+                </a:solidFill>
+                <a:latin typeface="Georgia" pitchFamily="34" charset="0"/>
+                <a:ea typeface="Georgia" pitchFamily="34" charset="-122"/>
+                <a:cs typeface="Georgia" pitchFamily="34" charset="-120"/>
+              </a:rPr>
+              <a:t>+898</a:t>
+            </a:r>
+            <a:endParaRPr lang="en-US" sz="3800" dirty="0"/>
+          </a:p>
+        </p:txBody>
+      </p:sp>
+      <p:sp>
+        <p:nvSpPr>
+          <p:cNvPr id="13" name="Text 11"/>
+          <p:cNvSpPr/>
+          <p:nvPr/>
+        </p:nvSpPr>
+        <p:spPr>
+          <a:xfrm>
+            <a:off x="4538472" y="3557016"/>
+            <a:ext cx="3112008" cy="457200"/>
+          </a:xfrm>
+          <a:prstGeom prst="rect">
+            <a:avLst/>
+          </a:prstGeom>
+          <a:noFill/>
+          <a:ln/>
+        </p:spPr>
+        <p:txBody>
+          <a:bodyPr wrap="square" lIns="0" tIns="0" rIns="0" bIns="0" rtlCol="0" anchor="t"/>
+          <a:lstStyle/>
+          <a:p>
+            <a:pPr algn="ctr" indent="0" marL="0">
+              <a:buNone/>
+            </a:pPr>
+            <a:r>
+              <a:rPr lang="en-US" sz="1250" dirty="0">
+                <a:solidFill>
+                  <a:srgbClr val="5B6B82"/>
+                </a:solidFill>
+                <a:latin typeface="Calibri" pitchFamily="34" charset="0"/>
+                <a:ea typeface="Calibri" pitchFamily="34" charset="-122"/>
+                <a:cs typeface="Calibri" pitchFamily="34" charset="-120"/>
+              </a:rPr>
+              <a:t>vs 5k-iteration “solver”  ·  bb/100</a:t>
+            </a:r>
+            <a:endParaRPr lang="en-US" sz="1250" dirty="0"/>
+          </a:p>
+        </p:txBody>
+      </p:sp>
+      <p:sp>
+        <p:nvSpPr>
+          <p:cNvPr id="14" name="Shape 12"/>
+          <p:cNvSpPr/>
+          <p:nvPr/>
+        </p:nvSpPr>
+        <p:spPr>
+          <a:xfrm>
+            <a:off x="8144256" y="2606040"/>
+            <a:ext cx="3477768" cy="1554480"/>
+          </a:xfrm>
+          <a:prstGeom prst="roundRect">
+            <a:avLst>
+              <a:gd name="adj" fmla="val 4706"/>
+            </a:avLst>
+          </a:prstGeom>
+          <a:solidFill>
+            <a:srgbClr val="F5F8FC"/>
+          </a:solidFill>
+          <a:ln w="12700">
+            <a:solidFill>
+              <a:srgbClr val="E6EAF0"/>
+            </a:solidFill>
+            <a:prstDash val="solid"/>
+          </a:ln>
+        </p:spPr>
+      </p:sp>
+      <p:sp>
+        <p:nvSpPr>
+          <p:cNvPr id="15" name="Text 13"/>
+          <p:cNvSpPr/>
+          <p:nvPr/>
+        </p:nvSpPr>
+        <p:spPr>
+          <a:xfrm>
+            <a:off x="8144256" y="2788920"/>
+            <a:ext cx="3477768" cy="731520"/>
+          </a:xfrm>
+          <a:prstGeom prst="rect">
+            <a:avLst/>
+          </a:prstGeom>
+          <a:noFill/>
+          <a:ln/>
+        </p:spPr>
+        <p:txBody>
+          <a:bodyPr wrap="square" lIns="0" tIns="0" rIns="0" bIns="0" rtlCol="0" anchor="ctr"/>
+          <a:lstStyle/>
+          <a:p>
+            <a:pPr algn="ctr" indent="0" marL="0">
+              <a:buNone/>
+            </a:pPr>
+            <a:r>
+              <a:rPr lang="en-US" sz="3800" b="1" dirty="0">
+                <a:solidFill>
+                  <a:srgbClr val="5B6B82"/>
+                </a:solidFill>
+                <a:latin typeface="Georgia" pitchFamily="34" charset="0"/>
+                <a:ea typeface="Georgia" pitchFamily="34" charset="-122"/>
+                <a:cs typeface="Georgia" pitchFamily="34" charset="-120"/>
+              </a:rPr>
+              <a:t>+934</a:t>
+            </a:r>
+            <a:endParaRPr lang="en-US" sz="3800" dirty="0"/>
+          </a:p>
+        </p:txBody>
+      </p:sp>
+      <p:sp>
+        <p:nvSpPr>
+          <p:cNvPr id="16" name="Text 14"/>
+          <p:cNvSpPr/>
+          <p:nvPr/>
+        </p:nvSpPr>
+        <p:spPr>
+          <a:xfrm>
+            <a:off x="8327136" y="3557016"/>
+            <a:ext cx="3112008" cy="457200"/>
+          </a:xfrm>
+          <a:prstGeom prst="rect">
+            <a:avLst/>
+          </a:prstGeom>
+          <a:noFill/>
+          <a:ln/>
+        </p:spPr>
+        <p:txBody>
+          <a:bodyPr wrap="square" lIns="0" tIns="0" rIns="0" bIns="0" rtlCol="0" anchor="t"/>
+          <a:lstStyle/>
+          <a:p>
+            <a:pPr algn="ctr" indent="0" marL="0">
+              <a:buNone/>
+            </a:pPr>
+            <a:r>
+              <a:rPr lang="en-US" sz="1250" dirty="0">
+                <a:solidFill>
+                  <a:srgbClr val="5B6B82"/>
+                </a:solidFill>
+                <a:latin typeface="Calibri" pitchFamily="34" charset="0"/>
+                <a:ea typeface="Calibri" pitchFamily="34" charset="-122"/>
+                <a:cs typeface="Calibri" pitchFamily="34" charset="-120"/>
+              </a:rPr>
+              <a:t>vs 10k-iteration “solver”  ·  bb/100</a:t>
+            </a:r>
+            <a:endParaRPr lang="en-US" sz="1250" dirty="0"/>
+          </a:p>
+        </p:txBody>
+      </p:sp>
+      <p:sp>
+        <p:nvSpPr>
+          <p:cNvPr id="17" name="Text 15"/>
+          <p:cNvSpPr/>
+          <p:nvPr/>
+        </p:nvSpPr>
+        <p:spPr>
+          <a:xfrm>
+            <a:off x="566928" y="4572000"/>
+            <a:ext cx="11055096" cy="1280160"/>
+          </a:xfrm>
+          <a:prstGeom prst="rect">
+            <a:avLst/>
+          </a:prstGeom>
+          <a:noFill/>
+          <a:ln/>
+        </p:spPr>
+        <p:txBody>
+          <a:bodyPr wrap="square" lIns="0" tIns="0" rIns="0" bIns="0" rtlCol="0" anchor="t"/>
+          <a:lstStyle/>
+          <a:p>
+            <a:pPr algn="l" indent="0" marL="0">
+              <a:lnSpc>
+                <a:spcPct val="108000"/>
+              </a:lnSpc>
+              <a:buNone/>
+            </a:pPr>
+            <a:r>
+              <a:rPr lang="en-US" sz="1500" dirty="0">
+                <a:solidFill>
+                  <a:srgbClr val="15233B"/>
+                </a:solidFill>
+                <a:latin typeface="Calibri" pitchFamily="34" charset="0"/>
+                <a:ea typeface="Calibri" pitchFamily="34" charset="-122"/>
+                <a:cs typeface="Calibri" pitchFamily="34" charset="-120"/>
+              </a:rPr>
+              <a:t>The uniform (0-iteration) control scores highest — adding “solver” iterations makes the opponent easier, not harder. The MCCFR-ES baseline is near-random; the figure is a sanity check, not strength, and is never placed next to AlphaHoldem’s +11 mbb/h.</a:t>
+            </a:r>
+            <a:endParaRPr lang="en-US" sz="1500" dirty="0"/>
+          </a:p>
+        </p:txBody>
+      </p:sp>
+    </p:spTree>
+  </p:cSld>
+  <p:clrMapOvr>
+    <a:masterClrMapping/>
+  </p:clrMapOvr>
+</p:sld>
+</file>
+
 <file path=ppt/slides/slide6.xml><?xml version="1.0" encoding="utf-8"?>
 <p:sld xmlns:a="http://schemas.openxmlformats.org/drawingml/2006/main" xmlns:r="http://schemas.openxmlformats.org/officeDocument/2006/relationships" xmlns:p="http://schemas.openxmlformats.org/presentationml/2006/main">
   <p:cSld name="Slide 6">
@@ -8494,7 +5460,7 @@
             <a:avLst/>
           </a:prstGeom>
           <a:solidFill>
-            <a:srgbClr val="0D9488"/>
+            <a:srgbClr val="2563EB"/>
           </a:solidFill>
           <a:ln/>
         </p:spPr>
@@ -8520,19 +5486,19 @@
           <a:bodyPr wrap="square" lIns="0" tIns="0" rIns="0" bIns="0" rtlCol="0" anchor="ctr"/>
           <a:lstStyle/>
           <a:p>
-            <a:pPr algn="l" indent="0" marL="0">
+            <a:pPr indent="0" marL="0">
               <a:buNone/>
             </a:pPr>
             <a:r>
               <a:rPr lang="en-US" sz="1200" b="1" spc="200" kern="0" dirty="0">
                 <a:solidFill>
-                  <a:srgbClr val="0D9488"/>
+                  <a:srgbClr val="2563EB"/>
                 </a:solidFill>
                 <a:latin typeface="Calibri" pitchFamily="34" charset="0"/>
                 <a:ea typeface="Calibri" pitchFamily="34" charset="-122"/>
                 <a:cs typeface="Calibri" pitchFamily="34" charset="-120"/>
               </a:rPr>
-              <a:t>DID IT ACTUALLY WORK?</a:t>
+              <a:t>EXPLOITABILITY</a:t>
             </a:r>
             <a:endParaRPr lang="en-US" sz="1200" dirty="0"/>
           </a:p>
@@ -8547,7 +5513,7 @@
         <p:spPr>
           <a:xfrm>
             <a:off x="566928" y="841248"/>
-            <a:ext cx="11055096" cy="1143000"/>
+            <a:ext cx="11055096" cy="1005840"/>
           </a:xfrm>
           <a:prstGeom prst="rect">
             <a:avLst/>
@@ -8566,7 +5532,7 @@
               <a:buNone/>
             </a:pPr>
             <a:r>
-              <a:rPr lang="en-US" sz="2500" b="1" dirty="0">
+              <a:rPr lang="en-US" sz="2400" b="1" dirty="0">
                 <a:solidFill>
                   <a:srgbClr val="15233B"/>
                 </a:solidFill>
@@ -8574,15 +5540,54 @@
                 <a:ea typeface="Georgia" pitchFamily="34" charset="-122"/>
                 <a:cs typeface="Georgia" pitchFamily="34" charset="-120"/>
               </a:rPr>
-              <a:t>The harness promotes on behavior gates, not win-rate — and it caught a policy collapse.</a:t>
-            </a:r>
-            <a:endParaRPr lang="en-US" sz="2500" dirty="0"/>
-          </a:p>
-        </p:txBody>
-      </p:sp>
-      <p:sp>
-        <p:nvSpPr>
-          <p:cNvPr id="5" name="Shape 3"/>
+              <a:t>Leduc (exact NashConv): the iterate cycles; strategy-averaging plateaus ≈ 0.56.</a:t>
+            </a:r>
+            <a:endParaRPr lang="en-US" sz="2400" dirty="0"/>
+          </a:p>
+        </p:txBody>
+      </p:sp>
+      <p:sp>
+        <p:nvSpPr>
+          <p:cNvPr id="5" name="Text 3"/>
+          <p:cNvSpPr/>
+          <p:nvPr/>
+        </p:nvSpPr>
+        <p:spPr>
+          <a:xfrm>
+            <a:off x="566928" y="1847088"/>
+            <a:ext cx="11055096" cy="384048"/>
+          </a:xfrm>
+          <a:prstGeom prst="rect">
+            <a:avLst/>
+          </a:prstGeom>
+          <a:noFill/>
+          <a:ln/>
+        </p:spPr>
+        <p:txBody>
+          <a:bodyPr wrap="square" lIns="0" tIns="0" rIns="0" bIns="0" rtlCol="0" anchor="t"/>
+          <a:lstStyle/>
+          <a:p>
+            <a:pPr algn="l" indent="0" marL="0">
+              <a:buNone/>
+            </a:pPr>
+            <a:r>
+              <a:rPr lang="en-US" sz="1300" dirty="0">
+                <a:solidFill>
+                  <a:srgbClr val="5B6B82"/>
+                </a:solidFill>
+                <a:latin typeface="Calibri" pitchFamily="34" charset="0"/>
+                <a:ea typeface="Calibri" pitchFamily="34" charset="-122"/>
+                <a:cs typeface="Calibri" pitchFamily="34" charset="-120"/>
+              </a:rPr>
+              <a:t>HUNL exploitability is intractable (~10¹⁶¹ info sets), so the same recipe is probed on Leduc (936 states, exact).</a:t>
+            </a:r>
+            <a:endParaRPr lang="en-US" sz="1300" dirty="0"/>
+          </a:p>
+        </p:txBody>
+      </p:sp>
+      <p:sp>
+        <p:nvSpPr>
+          <p:cNvPr id="6" name="Shape 4"/>
           <p:cNvSpPr/>
           <p:nvPr/>
         </p:nvSpPr>
@@ -8605,7 +5610,7 @@
       </p:sp>
       <p:sp>
         <p:nvSpPr>
-          <p:cNvPr id="6" name="Text 4"/>
+          <p:cNvPr id="7" name="Text 5"/>
           <p:cNvSpPr/>
           <p:nvPr/>
         </p:nvSpPr>
@@ -8644,7 +5649,7 @@
       </p:sp>
       <p:sp>
         <p:nvSpPr>
-          <p:cNvPr id="7" name="Text 5"/>
+          <p:cNvPr id="8" name="Text 6"/>
           <p:cNvSpPr/>
           <p:nvPr/>
         </p:nvSpPr>
@@ -8683,7 +5688,7 @@
       </p:sp>
       <p:pic>
         <p:nvPicPr>
-          <p:cNvPr id="8" name="Image 0" descr="../docs/figures/deck/03_behavior_gates.png">    </p:cNvPr>
+          <p:cNvPr id="9" name="Image 0" descr="../docs/figures/deck/04_leduc_convergence.png">    </p:cNvPr>
           <p:cNvPicPr>
             <a:picLocks noChangeAspect="1"/>
           </p:cNvPicPr>
@@ -8697,8 +5702,8 @@
         </p:blipFill>
         <p:spPr>
           <a:xfrm>
-            <a:off x="2294278" y="2103120"/>
-            <a:ext cx="7600396" cy="4069080"/>
+            <a:off x="2624078" y="2377440"/>
+            <a:ext cx="6940796" cy="3822192"/>
           </a:xfrm>
           <a:prstGeom prst="rect">
             <a:avLst/>
@@ -8752,7 +5757,7 @@
             <a:avLst/>
           </a:prstGeom>
           <a:solidFill>
-            <a:srgbClr val="DC2626"/>
+            <a:srgbClr val="2563EB"/>
           </a:solidFill>
           <a:ln/>
         </p:spPr>
@@ -8778,19 +5783,19 @@
           <a:bodyPr wrap="square" lIns="0" tIns="0" rIns="0" bIns="0" rtlCol="0" anchor="ctr"/>
           <a:lstStyle/>
           <a:p>
-            <a:pPr algn="l" indent="0" marL="0">
+            <a:pPr indent="0" marL="0">
               <a:buNone/>
             </a:pPr>
             <a:r>
               <a:rPr lang="en-US" sz="1200" b="1" spc="200" kern="0" dirty="0">
                 <a:solidFill>
-                  <a:srgbClr val="DC2626"/>
+                  <a:srgbClr val="2563EB"/>
                 </a:solidFill>
                 <a:latin typeface="Calibri" pitchFamily="34" charset="0"/>
                 <a:ea typeface="Calibri" pitchFamily="34" charset="-122"/>
                 <a:cs typeface="Calibri" pitchFamily="34" charset="-120"/>
               </a:rPr>
-              <a:t>A NUMBER I RETIRED</a:t>
+              <a:t>CALIBRATION</a:t>
             </a:r>
             <a:endParaRPr lang="en-US" sz="1200" dirty="0"/>
           </a:p>
@@ -8805,7 +5810,7 @@
         <p:spPr>
           <a:xfrm>
             <a:off x="566928" y="841248"/>
-            <a:ext cx="11055096" cy="1143000"/>
+            <a:ext cx="11055096" cy="1005840"/>
           </a:xfrm>
           <a:prstGeom prst="rect">
             <a:avLst/>
@@ -8824,7 +5829,7 @@
               <a:buNone/>
             </a:pPr>
             <a:r>
-              <a:rPr lang="en-US" sz="2500" b="1" dirty="0">
+              <a:rPr lang="en-US" sz="2400" b="1" dirty="0">
                 <a:solidFill>
                   <a:srgbClr val="15233B"/>
                 </a:solidFill>
@@ -8832,9 +5837,9 @@
                 <a:ea typeface="Georgia" pitchFamily="34" charset="-122"/>
                 <a:cs typeface="Georgia" pitchFamily="34" charset="-120"/>
               </a:rPr>
-              <a:t>My flashiest number measured the opponent's weakness — not my agent's strength.</a:t>
-            </a:r>
-            <a:endParaRPr lang="en-US" sz="2500" dirty="0"/>
+              <a:t>≈8× below random, ≈9× above tuned NFSP — methodology, not magnitude.</a:t>
+            </a:r>
+            <a:endParaRPr lang="en-US" sz="2400" dirty="0"/>
           </a:p>
         </p:txBody>
       </p:sp>
@@ -8939,470 +5944,30 @@
           </a:p>
         </p:txBody>
       </p:sp>
-      <p:sp>
-        <p:nvSpPr>
-          <p:cNvPr id="8" name="Text 6"/>
-          <p:cNvSpPr/>
-          <p:nvPr/>
-        </p:nvSpPr>
-        <p:spPr>
-          <a:xfrm>
-            <a:off x="566928" y="2240280"/>
-            <a:ext cx="11055096" cy="365760"/>
+      <p:pic>
+        <p:nvPicPr>
+          <p:cNvPr id="8" name="Image 0" descr="../docs/figures/deck/05_calibration_ladder.png">    </p:cNvPr>
+          <p:cNvPicPr>
+            <a:picLocks noChangeAspect="1"/>
+          </p:cNvPicPr>
+          <p:nvPr/>
+        </p:nvPicPr>
+        <p:blipFill>
+          <a:blip r:embed="rId1"/>
+          <a:stretch>
+            <a:fillRect/>
+          </a:stretch>
+        </p:blipFill>
+        <p:spPr>
+          <a:xfrm>
+            <a:off x="1807706" y="2468880"/>
+            <a:ext cx="8573539" cy="3383280"/>
           </a:xfrm>
           <a:prstGeom prst="rect">
             <a:avLst/>
           </a:prstGeom>
-          <a:noFill/>
-          <a:ln/>
-        </p:spPr>
-        <p:txBody>
-          <a:bodyPr wrap="square" lIns="0" tIns="0" rIns="0" bIns="0" rtlCol="0" anchor="ctr"/>
-          <a:lstStyle/>
-          <a:p>
-            <a:pPr indent="0" marL="0">
-              <a:buNone/>
-            </a:pPr>
-            <a:r>
-              <a:rPr lang="en-US" sz="1400" dirty="0">
-                <a:solidFill>
-                  <a:srgbClr val="5B6B82"/>
-                </a:solidFill>
-                <a:latin typeface="Calibri" pitchFamily="34" charset="0"/>
-                <a:ea typeface="Calibri" pitchFamily="34" charset="-122"/>
-                <a:cs typeface="Calibri" pitchFamily="34" charset="-120"/>
-              </a:rPr>
-              <a:t>Champion win-rate vs the in-house “MCCFR-ES solver”, by solver strength:</a:t>
-            </a:r>
-            <a:endParaRPr lang="en-US" sz="1400" dirty="0"/>
-          </a:p>
-        </p:txBody>
-      </p:sp>
-      <p:sp>
-        <p:nvSpPr>
-          <p:cNvPr id="9" name="Shape 7"/>
-          <p:cNvSpPr/>
-          <p:nvPr/>
-        </p:nvSpPr>
-        <p:spPr>
-          <a:xfrm>
-            <a:off x="566928" y="2743200"/>
-            <a:ext cx="3477768" cy="1554480"/>
-          </a:xfrm>
-          <a:prstGeom prst="roundRect">
-            <a:avLst>
-              <a:gd name="adj" fmla="val 4706"/>
-            </a:avLst>
-          </a:prstGeom>
-          <a:solidFill>
-            <a:srgbClr val="F5F8FC"/>
-          </a:solidFill>
-          <a:ln w="12700">
-            <a:solidFill>
-              <a:srgbClr val="E6EAF0"/>
-            </a:solidFill>
-            <a:prstDash val="solid"/>
-          </a:ln>
-        </p:spPr>
-      </p:sp>
-      <p:sp>
-        <p:nvSpPr>
-          <p:cNvPr id="10" name="Text 8"/>
-          <p:cNvSpPr/>
-          <p:nvPr/>
-        </p:nvSpPr>
-        <p:spPr>
-          <a:xfrm>
-            <a:off x="566928" y="2907792"/>
-            <a:ext cx="3477768" cy="731520"/>
-          </a:xfrm>
-          <a:prstGeom prst="rect">
-            <a:avLst/>
-          </a:prstGeom>
-          <a:noFill/>
-          <a:ln/>
-        </p:spPr>
-        <p:txBody>
-          <a:bodyPr wrap="square" lIns="0" tIns="0" rIns="0" bIns="0" rtlCol="0" anchor="ctr"/>
-          <a:lstStyle/>
-          <a:p>
-            <a:pPr algn="ctr" indent="0" marL="0">
-              <a:buNone/>
-            </a:pPr>
-            <a:r>
-              <a:rPr lang="en-US" sz="3800" b="1" dirty="0">
-                <a:solidFill>
-                  <a:srgbClr val="DC2626"/>
-                </a:solidFill>
-                <a:latin typeface="Georgia" pitchFamily="34" charset="0"/>
-                <a:ea typeface="Georgia" pitchFamily="34" charset="-122"/>
-                <a:cs typeface="Georgia" pitchFamily="34" charset="-120"/>
-              </a:rPr>
-              <a:t>+970</a:t>
-            </a:r>
-            <a:endParaRPr lang="en-US" sz="3800" dirty="0"/>
-          </a:p>
-        </p:txBody>
-      </p:sp>
-      <p:sp>
-        <p:nvSpPr>
-          <p:cNvPr id="11" name="Text 9"/>
-          <p:cNvSpPr/>
-          <p:nvPr/>
-        </p:nvSpPr>
-        <p:spPr>
-          <a:xfrm>
-            <a:off x="749808" y="3675888"/>
-            <a:ext cx="3112008" cy="548640"/>
-          </a:xfrm>
-          <a:prstGeom prst="rect">
-            <a:avLst/>
-          </a:prstGeom>
-          <a:noFill/>
-          <a:ln/>
-        </p:spPr>
-        <p:txBody>
-          <a:bodyPr wrap="square" lIns="0" tIns="0" rIns="0" bIns="0" rtlCol="0" anchor="t"/>
-          <a:lstStyle/>
-          <a:p>
-            <a:pPr algn="ctr" indent="0" marL="0">
-              <a:buNone/>
-            </a:pPr>
-            <a:r>
-              <a:rPr lang="en-US" sz="1250" dirty="0">
-                <a:solidFill>
-                  <a:srgbClr val="5B6B82"/>
-                </a:solidFill>
-                <a:latin typeface="Calibri" pitchFamily="34" charset="0"/>
-                <a:ea typeface="Calibri" pitchFamily="34" charset="-122"/>
-                <a:cs typeface="Calibri" pitchFamily="34" charset="-120"/>
-              </a:rPr>
-              <a:t>vs 0-iteration</a:t>
-            </a:r>
-            <a:endParaRPr lang="en-US" sz="1250" dirty="0"/>
-          </a:p>
-          <a:p>
-            <a:pPr algn="ctr" indent="0" marL="0">
-              <a:buNone/>
-            </a:pPr>
-            <a:r>
-              <a:rPr lang="en-US" sz="1250" dirty="0">
-                <a:solidFill>
-                  <a:srgbClr val="5B6B82"/>
-                </a:solidFill>
-                <a:latin typeface="Calibri" pitchFamily="34" charset="0"/>
-                <a:ea typeface="Calibri" pitchFamily="34" charset="-122"/>
-                <a:cs typeface="Calibri" pitchFamily="34" charset="-120"/>
-              </a:rPr>
-              <a:t>uniform (random)  bb/100</a:t>
-            </a:r>
-            <a:endParaRPr lang="en-US" sz="1250" dirty="0"/>
-          </a:p>
-        </p:txBody>
-      </p:sp>
-      <p:sp>
-        <p:nvSpPr>
-          <p:cNvPr id="12" name="Shape 10"/>
-          <p:cNvSpPr/>
-          <p:nvPr/>
-        </p:nvSpPr>
-        <p:spPr>
-          <a:xfrm>
-            <a:off x="4355592" y="2743200"/>
-            <a:ext cx="3477768" cy="1554480"/>
-          </a:xfrm>
-          <a:prstGeom prst="roundRect">
-            <a:avLst>
-              <a:gd name="adj" fmla="val 4706"/>
-            </a:avLst>
-          </a:prstGeom>
-          <a:solidFill>
-            <a:srgbClr val="F5F8FC"/>
-          </a:solidFill>
-          <a:ln w="12700">
-            <a:solidFill>
-              <a:srgbClr val="E6EAF0"/>
-            </a:solidFill>
-            <a:prstDash val="solid"/>
-          </a:ln>
-        </p:spPr>
-      </p:sp>
-      <p:sp>
-        <p:nvSpPr>
-          <p:cNvPr id="13" name="Text 11"/>
-          <p:cNvSpPr/>
-          <p:nvPr/>
-        </p:nvSpPr>
-        <p:spPr>
-          <a:xfrm>
-            <a:off x="4355592" y="2907792"/>
-            <a:ext cx="3477768" cy="731520"/>
-          </a:xfrm>
-          <a:prstGeom prst="rect">
-            <a:avLst/>
-          </a:prstGeom>
-          <a:noFill/>
-          <a:ln/>
-        </p:spPr>
-        <p:txBody>
-          <a:bodyPr wrap="square" lIns="0" tIns="0" rIns="0" bIns="0" rtlCol="0" anchor="ctr"/>
-          <a:lstStyle/>
-          <a:p>
-            <a:pPr algn="ctr" indent="0" marL="0">
-              <a:buNone/>
-            </a:pPr>
-            <a:r>
-              <a:rPr lang="en-US" sz="3800" b="1" dirty="0">
-                <a:solidFill>
-                  <a:srgbClr val="5B6B82"/>
-                </a:solidFill>
-                <a:latin typeface="Georgia" pitchFamily="34" charset="0"/>
-                <a:ea typeface="Georgia" pitchFamily="34" charset="-122"/>
-                <a:cs typeface="Georgia" pitchFamily="34" charset="-120"/>
-              </a:rPr>
-              <a:t>+898</a:t>
-            </a:r>
-            <a:endParaRPr lang="en-US" sz="3800" dirty="0"/>
-          </a:p>
-        </p:txBody>
-      </p:sp>
-      <p:sp>
-        <p:nvSpPr>
-          <p:cNvPr id="14" name="Text 12"/>
-          <p:cNvSpPr/>
-          <p:nvPr/>
-        </p:nvSpPr>
-        <p:spPr>
-          <a:xfrm>
-            <a:off x="4538472" y="3675888"/>
-            <a:ext cx="3112008" cy="548640"/>
-          </a:xfrm>
-          <a:prstGeom prst="rect">
-            <a:avLst/>
-          </a:prstGeom>
-          <a:noFill/>
-          <a:ln/>
-        </p:spPr>
-        <p:txBody>
-          <a:bodyPr wrap="square" lIns="0" tIns="0" rIns="0" bIns="0" rtlCol="0" anchor="t"/>
-          <a:lstStyle/>
-          <a:p>
-            <a:pPr algn="ctr" indent="0" marL="0">
-              <a:buNone/>
-            </a:pPr>
-            <a:r>
-              <a:rPr lang="en-US" sz="1250" dirty="0">
-                <a:solidFill>
-                  <a:srgbClr val="5B6B82"/>
-                </a:solidFill>
-                <a:latin typeface="Calibri" pitchFamily="34" charset="0"/>
-                <a:ea typeface="Calibri" pitchFamily="34" charset="-122"/>
-                <a:cs typeface="Calibri" pitchFamily="34" charset="-120"/>
-              </a:rPr>
-              <a:t>vs 5k-iteration</a:t>
-            </a:r>
-            <a:endParaRPr lang="en-US" sz="1250" dirty="0"/>
-          </a:p>
-          <a:p>
-            <a:pPr algn="ctr" indent="0" marL="0">
-              <a:buNone/>
-            </a:pPr>
-            <a:r>
-              <a:rPr lang="en-US" sz="1250" dirty="0">
-                <a:solidFill>
-                  <a:srgbClr val="5B6B82"/>
-                </a:solidFill>
-                <a:latin typeface="Calibri" pitchFamily="34" charset="0"/>
-                <a:ea typeface="Calibri" pitchFamily="34" charset="-122"/>
-                <a:cs typeface="Calibri" pitchFamily="34" charset="-120"/>
-              </a:rPr>
-              <a:t>“solver”  bb/100</a:t>
-            </a:r>
-            <a:endParaRPr lang="en-US" sz="1250" dirty="0"/>
-          </a:p>
-        </p:txBody>
-      </p:sp>
-      <p:sp>
-        <p:nvSpPr>
-          <p:cNvPr id="15" name="Shape 13"/>
-          <p:cNvSpPr/>
-          <p:nvPr/>
-        </p:nvSpPr>
-        <p:spPr>
-          <a:xfrm>
-            <a:off x="8144256" y="2743200"/>
-            <a:ext cx="3477768" cy="1554480"/>
-          </a:xfrm>
-          <a:prstGeom prst="roundRect">
-            <a:avLst>
-              <a:gd name="adj" fmla="val 4706"/>
-            </a:avLst>
-          </a:prstGeom>
-          <a:solidFill>
-            <a:srgbClr val="F5F8FC"/>
-          </a:solidFill>
-          <a:ln w="12700">
-            <a:solidFill>
-              <a:srgbClr val="E6EAF0"/>
-            </a:solidFill>
-            <a:prstDash val="solid"/>
-          </a:ln>
-        </p:spPr>
-      </p:sp>
-      <p:sp>
-        <p:nvSpPr>
-          <p:cNvPr id="16" name="Text 14"/>
-          <p:cNvSpPr/>
-          <p:nvPr/>
-        </p:nvSpPr>
-        <p:spPr>
-          <a:xfrm>
-            <a:off x="8144256" y="2907792"/>
-            <a:ext cx="3477768" cy="731520"/>
-          </a:xfrm>
-          <a:prstGeom prst="rect">
-            <a:avLst/>
-          </a:prstGeom>
-          <a:noFill/>
-          <a:ln/>
-        </p:spPr>
-        <p:txBody>
-          <a:bodyPr wrap="square" lIns="0" tIns="0" rIns="0" bIns="0" rtlCol="0" anchor="ctr"/>
-          <a:lstStyle/>
-          <a:p>
-            <a:pPr algn="ctr" indent="0" marL="0">
-              <a:buNone/>
-            </a:pPr>
-            <a:r>
-              <a:rPr lang="en-US" sz="3800" b="1" dirty="0">
-                <a:solidFill>
-                  <a:srgbClr val="5B6B82"/>
-                </a:solidFill>
-                <a:latin typeface="Georgia" pitchFamily="34" charset="0"/>
-                <a:ea typeface="Georgia" pitchFamily="34" charset="-122"/>
-                <a:cs typeface="Georgia" pitchFamily="34" charset="-120"/>
-              </a:rPr>
-              <a:t>+934</a:t>
-            </a:r>
-            <a:endParaRPr lang="en-US" sz="3800" dirty="0"/>
-          </a:p>
-        </p:txBody>
-      </p:sp>
-      <p:sp>
-        <p:nvSpPr>
-          <p:cNvPr id="17" name="Text 15"/>
-          <p:cNvSpPr/>
-          <p:nvPr/>
-        </p:nvSpPr>
-        <p:spPr>
-          <a:xfrm>
-            <a:off x="8327136" y="3675888"/>
-            <a:ext cx="3112008" cy="548640"/>
-          </a:xfrm>
-          <a:prstGeom prst="rect">
-            <a:avLst/>
-          </a:prstGeom>
-          <a:noFill/>
-          <a:ln/>
-        </p:spPr>
-        <p:txBody>
-          <a:bodyPr wrap="square" lIns="0" tIns="0" rIns="0" bIns="0" rtlCol="0" anchor="t"/>
-          <a:lstStyle/>
-          <a:p>
-            <a:pPr algn="ctr" indent="0" marL="0">
-              <a:buNone/>
-            </a:pPr>
-            <a:r>
-              <a:rPr lang="en-US" sz="1250" dirty="0">
-                <a:solidFill>
-                  <a:srgbClr val="5B6B82"/>
-                </a:solidFill>
-                <a:latin typeface="Calibri" pitchFamily="34" charset="0"/>
-                <a:ea typeface="Calibri" pitchFamily="34" charset="-122"/>
-                <a:cs typeface="Calibri" pitchFamily="34" charset="-120"/>
-              </a:rPr>
-              <a:t>vs 10k-iteration</a:t>
-            </a:r>
-            <a:endParaRPr lang="en-US" sz="1250" dirty="0"/>
-          </a:p>
-          <a:p>
-            <a:pPr algn="ctr" indent="0" marL="0">
-              <a:buNone/>
-            </a:pPr>
-            <a:r>
-              <a:rPr lang="en-US" sz="1250" dirty="0">
-                <a:solidFill>
-                  <a:srgbClr val="5B6B82"/>
-                </a:solidFill>
-                <a:latin typeface="Calibri" pitchFamily="34" charset="0"/>
-                <a:ea typeface="Calibri" pitchFamily="34" charset="-122"/>
-                <a:cs typeface="Calibri" pitchFamily="34" charset="-120"/>
-              </a:rPr>
-              <a:t>“solver”  bb/100</a:t>
-            </a:r>
-            <a:endParaRPr lang="en-US" sz="1250" dirty="0"/>
-          </a:p>
-        </p:txBody>
-      </p:sp>
-      <p:sp>
-        <p:nvSpPr>
-          <p:cNvPr id="18" name="Text 16"/>
-          <p:cNvSpPr/>
-          <p:nvPr/>
-        </p:nvSpPr>
-        <p:spPr>
-          <a:xfrm>
-            <a:off x="566928" y="4617720"/>
-            <a:ext cx="11055096" cy="1554480"/>
-          </a:xfrm>
-          <a:prstGeom prst="rect">
-            <a:avLst/>
-          </a:prstGeom>
-          <a:noFill/>
-          <a:ln/>
-        </p:spPr>
-        <p:txBody>
-          <a:bodyPr wrap="square" lIns="0" tIns="0" rIns="0" bIns="0" rtlCol="0" anchor="t"/>
-          <a:lstStyle/>
-          <a:p>
-            <a:pPr algn="l" indent="0" marL="0">
-              <a:lnSpc>
-                <a:spcPct val="108000"/>
-              </a:lnSpc>
-              <a:buNone/>
-            </a:pPr>
-            <a:r>
-              <a:rPr lang="en-US" sz="1500" b="1" dirty="0">
-                <a:solidFill>
-                  <a:srgbClr val="15233B"/>
-                </a:solidFill>
-                <a:latin typeface="Calibri" pitchFamily="34" charset="0"/>
-                <a:ea typeface="Calibri" pitchFamily="34" charset="-122"/>
-                <a:cs typeface="Calibri" pitchFamily="34" charset="-120"/>
-              </a:rPr>
-              <a:t>The 0-iteration (uniform-random) control scores the highest. </a:t>
-            </a:r>
-            <a:pPr algn="l" indent="0" marL="0">
-              <a:lnSpc>
-                <a:spcPct val="108000"/>
-              </a:lnSpc>
-              <a:buNone/>
-            </a:pPr>
-            <a:r>
-              <a:rPr lang="en-US" sz="1500" dirty="0">
-                <a:solidFill>
-                  <a:srgbClr val="15233B"/>
-                </a:solidFill>
-                <a:latin typeface="Calibri" pitchFamily="34" charset="0"/>
-                <a:ea typeface="Calibri" pitchFamily="34" charset="-122"/>
-                <a:cs typeface="Calibri" pitchFamily="34" charset="-120"/>
-              </a:rPr>
-              <a:t>Adding “solver” iterations does not make the opponent harder — the MCCFR-ES baseline is near-random on most states. So I retired “+897 bb/100 vs a solver,” and never place it next to AlphaHoldem’s +11 mbb/h vs Slumbot.</a:t>
-            </a:r>
-            <a:endParaRPr lang="en-US" sz="1500" dirty="0"/>
-          </a:p>
-        </p:txBody>
-      </p:sp>
+        </p:spPr>
+      </p:pic>
     </p:spTree>
   </p:cSld>
   <p:clrMapOvr>
@@ -9450,7 +6015,7 @@
             <a:avLst/>
           </a:prstGeom>
           <a:solidFill>
-            <a:srgbClr val="2563EB"/>
+            <a:srgbClr val="B7791F"/>
           </a:solidFill>
           <a:ln/>
         </p:spPr>
@@ -9476,19 +6041,19 @@
           <a:bodyPr wrap="square" lIns="0" tIns="0" rIns="0" bIns="0" rtlCol="0" anchor="ctr"/>
           <a:lstStyle/>
           <a:p>
-            <a:pPr algn="l" indent="0" marL="0">
+            <a:pPr indent="0" marL="0">
               <a:buNone/>
             </a:pPr>
             <a:r>
               <a:rPr lang="en-US" sz="1200" b="1" spc="200" kern="0" dirty="0">
                 <a:solidFill>
-                  <a:srgbClr val="2563EB"/>
+                  <a:srgbClr val="B7791F"/>
                 </a:solidFill>
                 <a:latin typeface="Calibri" pitchFamily="34" charset="0"/>
                 <a:ea typeface="Calibri" pitchFamily="34" charset="-122"/>
                 <a:cs typeface="Calibri" pitchFamily="34" charset="-120"/>
               </a:rPr>
-              <a:t>THE RIGHT YARDSTICK</a:t>
+              <a:t>ALPHAHOLDEM</a:t>
             </a:r>
             <a:endParaRPr lang="en-US" sz="1200" dirty="0"/>
           </a:p>
@@ -9503,7 +6068,7 @@
         <p:spPr>
           <a:xfrm>
             <a:off x="566928" y="841248"/>
-            <a:ext cx="11055096" cy="1143000"/>
+            <a:ext cx="11055096" cy="1005840"/>
           </a:xfrm>
           <a:prstGeom prst="rect">
             <a:avLst/>
@@ -9522,7 +6087,7 @@
               <a:buNone/>
             </a:pPr>
             <a:r>
-              <a:rPr lang="en-US" sz="2500" b="1" dirty="0">
+              <a:rPr lang="en-US" sz="2400" b="1" dirty="0">
                 <a:solidFill>
                   <a:srgbClr val="15233B"/>
                 </a:solidFill>
@@ -9530,9 +6095,9 @@
                 <a:ea typeface="Georgia" pitchFamily="34" charset="-122"/>
                 <a:cs typeface="Georgia" pitchFamily="34" charset="-120"/>
               </a:rPr>
-              <a:t>Win-rate is gameable; exploitability isn't — but on HUNL it's intractable to even measure.</a:t>
-            </a:r>
-            <a:endParaRPr lang="en-US" sz="2500" dirty="0"/>
+              <a:t>“Convergence” is not low exploitability.</a:t>
+            </a:r>
+            <a:endParaRPr lang="en-US" sz="2400" dirty="0"/>
           </a:p>
         </p:txBody>
       </p:sp>
@@ -9639,43 +6204,14 @@
       </p:sp>
       <p:sp>
         <p:nvSpPr>
-          <p:cNvPr id="8" name="Shape 6"/>
-          <p:cNvSpPr/>
-          <p:nvPr/>
-        </p:nvSpPr>
-        <p:spPr>
-          <a:xfrm>
-            <a:off x="566928" y="2377440"/>
-            <a:ext cx="3931920" cy="3200400"/>
-          </a:xfrm>
-          <a:prstGeom prst="roundRect">
-            <a:avLst>
-              <a:gd name="adj" fmla="val 2286"/>
-            </a:avLst>
-          </a:prstGeom>
-          <a:solidFill>
-            <a:srgbClr val="15233B"/>
-          </a:solidFill>
-          <a:ln/>
-          <a:effectLst>
-            <a:outerShdw sx="100000" sy="100000" kx="0" ky="0" algn="bl" rotWithShape="0" blurRad="114300" dist="38100" dir="5400000">
-              <a:srgbClr val="8AA0BE">
-                <a:alpha val="22000"/>
-              </a:srgbClr>
-            </a:outerShdw>
-          </a:effectLst>
-        </p:spPr>
-      </p:sp>
-      <p:sp>
-        <p:nvSpPr>
-          <p:cNvPr id="9" name="Text 7"/>
-          <p:cNvSpPr/>
-          <p:nvPr/>
-        </p:nvSpPr>
-        <p:spPr>
-          <a:xfrm>
-            <a:off x="566928" y="2926080"/>
-            <a:ext cx="3931920" cy="1097280"/>
+          <p:cNvPr id="8" name="Text 6"/>
+          <p:cNvSpPr/>
+          <p:nvPr/>
+        </p:nvSpPr>
+        <p:spPr>
+          <a:xfrm>
+            <a:off x="566928" y="2468880"/>
+            <a:ext cx="10140696" cy="3108960"/>
           </a:xfrm>
           <a:prstGeom prst="rect">
             <a:avLst/>
@@ -9684,98 +6220,21 @@
           <a:ln/>
         </p:spPr>
         <p:txBody>
-          <a:bodyPr wrap="square" lIns="0" tIns="0" rIns="0" bIns="0" rtlCol="0" anchor="ctr"/>
-          <a:lstStyle/>
-          <a:p>
-            <a:pPr algn="ctr" indent="0" marL="0">
-              <a:buNone/>
+          <a:bodyPr wrap="square" lIns="0" tIns="0" rIns="0" bIns="0" rtlCol="0" anchor="t"/>
+          <a:lstStyle/>
+          <a:p>
+            <a:pPr algn="l" marL="342900" indent="-342900">
+              <a:lnSpc>
+                <a:spcPct val="110000"/>
+              </a:lnSpc>
+              <a:spcAft>
+                <a:spcPts val="1400"/>
+              </a:spcAft>
+              <a:buSzPct val="100000"/>
+              <a:buChar char="•"/>
             </a:pPr>
             <a:r>
-              <a:rPr lang="en-US" sz="6000" b="1" dirty="0">
-                <a:solidFill>
-                  <a:srgbClr val="FFFFFF"/>
-                </a:solidFill>
-                <a:latin typeface="Georgia" pitchFamily="34" charset="0"/>
-                <a:ea typeface="Georgia" pitchFamily="34" charset="-122"/>
-                <a:cs typeface="Georgia" pitchFamily="34" charset="-120"/>
-              </a:rPr>
-              <a:t>10¹⁶¹</a:t>
-            </a:r>
-            <a:endParaRPr lang="en-US" sz="6000" dirty="0"/>
-          </a:p>
-        </p:txBody>
-      </p:sp>
-      <p:sp>
-        <p:nvSpPr>
-          <p:cNvPr id="10" name="Text 8"/>
-          <p:cNvSpPr/>
-          <p:nvPr/>
-        </p:nvSpPr>
-        <p:spPr>
-          <a:xfrm>
-            <a:off x="886968" y="4114800"/>
-            <a:ext cx="3291840" cy="1280160"/>
-          </a:xfrm>
-          <a:prstGeom prst="rect">
-            <a:avLst/>
-          </a:prstGeom>
-          <a:noFill/>
-          <a:ln/>
-        </p:spPr>
-        <p:txBody>
-          <a:bodyPr wrap="square" lIns="0" tIns="0" rIns="0" bIns="0" rtlCol="0" anchor="t"/>
-          <a:lstStyle/>
-          <a:p>
-            <a:pPr algn="ctr" indent="0" marL="0">
-              <a:lnSpc>
-                <a:spcPct val="108000"/>
-              </a:lnSpc>
-              <a:buNone/>
-            </a:pPr>
-            <a:r>
-              <a:rPr lang="en-US" sz="1350" dirty="0">
-                <a:solidFill>
-                  <a:srgbClr val="C9D6EC"/>
-                </a:solidFill>
-                <a:latin typeface="Calibri" pitchFamily="34" charset="0"/>
-                <a:ea typeface="Calibri" pitchFamily="34" charset="-122"/>
-                <a:cs typeface="Calibri" pitchFamily="34" charset="-120"/>
-              </a:rPr>
-              <a:t>information sets in full HUNL — exact best-response computation is prohibitive, so I make no exploitability claim about the HUNL agent.</a:t>
-            </a:r>
-            <a:endParaRPr lang="en-US" sz="1350" dirty="0"/>
-          </a:p>
-        </p:txBody>
-      </p:sp>
-      <p:sp>
-        <p:nvSpPr>
-          <p:cNvPr id="11" name="Text 9"/>
-          <p:cNvSpPr/>
-          <p:nvPr/>
-        </p:nvSpPr>
-        <p:spPr>
-          <a:xfrm>
-            <a:off x="4956048" y="2468880"/>
-            <a:ext cx="6665976" cy="3108960"/>
-          </a:xfrm>
-          <a:prstGeom prst="rect">
-            <a:avLst/>
-          </a:prstGeom>
-          <a:noFill/>
-          <a:ln/>
-        </p:spPr>
-        <p:txBody>
-          <a:bodyPr wrap="square" lIns="0" tIns="0" rIns="0" bIns="0" rtlCol="0" anchor="t"/>
-          <a:lstStyle/>
-          <a:p>
-            <a:pPr algn="l" indent="0" marL="0">
-              <a:lnSpc>
-                <a:spcPct val="112000"/>
-              </a:lnSpc>
-              <a:buNone/>
-            </a:pPr>
-            <a:r>
-              <a:rPr lang="en-US" sz="1600" b="1" dirty="0">
+              <a:rPr lang="en-US" sz="1800" dirty="0">
                 <a:solidFill>
                   <a:srgbClr val="15233B"/>
                 </a:solidFill>
@@ -9783,16 +6242,23 @@
                 <a:ea typeface="Calibri" pitchFamily="34" charset="-122"/>
                 <a:cs typeface="Calibri" pitchFamily="34" charset="-120"/>
               </a:rPr>
-              <a:t>Lisý &amp; Bowling (LBR): </a:t>
-            </a:r>
-            <a:pPr algn="l" indent="0" marL="0">
+              <a:t>AlphaHoldem reports loss flattening, Elo plateau, and win-rate (+111.6 mbb/h vs Slumbot). It never computes exploitability.</a:t>
+            </a:r>
+            <a:endParaRPr lang="en-US" sz="1800" dirty="0"/>
+          </a:p>
+          <a:p>
+            <a:pPr algn="l" marL="342900" indent="-342900">
               <a:lnSpc>
-                <a:spcPct val="112000"/>
+                <a:spcPct val="110000"/>
               </a:lnSpc>
-              <a:buNone/>
+              <a:spcAft>
+                <a:spcPts val="1400"/>
+              </a:spcAft>
+              <a:buSzPct val="100000"/>
+              <a:buChar char="•"/>
             </a:pPr>
             <a:r>
-              <a:rPr lang="en-US" sz="1600" dirty="0">
+              <a:rPr lang="en-US" sz="1800" dirty="0">
                 <a:solidFill>
                   <a:srgbClr val="15233B"/>
                 </a:solidFill>
@@ -9800,19 +6266,23 @@
                 <a:ea typeface="Calibri" pitchFamily="34" charset="-122"/>
                 <a:cs typeface="Calibri" pitchFamily="34" charset="-120"/>
               </a:rPr>
-              <a:t>two bots tied head-to-head (within ~20 mbb/g) yet differed by ~1300 mbb/g in measured exploitability. A strong win-rate can hide a highly exploitable strategy.</a:t>
-            </a:r>
-            <a:endParaRPr lang="en-US" sz="1600" dirty="0"/>
-          </a:p>
-          <a:p>
-            <a:pPr algn="l" indent="0" marL="0">
+              <a:t>Win-rate ≠ exploitability — Lisý &amp; Bowling: two bots tied head-to-head (~20 mbb/g) yet ~1300 mbb/g apart in exploitability.</a:t>
+            </a:r>
+            <a:endParaRPr lang="en-US" sz="1800" dirty="0"/>
+          </a:p>
+          <a:p>
+            <a:pPr algn="l" marL="342900" indent="-342900">
               <a:lnSpc>
-                <a:spcPct val="112000"/>
+                <a:spcPct val="110000"/>
               </a:lnSpc>
-              <a:buNone/>
+              <a:spcAft>
+                <a:spcPts val="1400"/>
+              </a:spcAft>
+              <a:buSzPct val="100000"/>
+              <a:buChar char="•"/>
             </a:pPr>
             <a:r>
-              <a:rPr lang="en-US" sz="1600" dirty="0">
+              <a:rPr lang="en-US" sz="1800" dirty="0">
                 <a:solidFill>
                   <a:srgbClr val="15233B"/>
                 </a:solidFill>
@@ -9820,61 +6290,9 @@
                 <a:ea typeface="Calibri" pitchFamily="34" charset="-122"/>
                 <a:cs typeface="Calibri" pitchFamily="34" charset="-120"/>
               </a:rPr>
-              <a:t>
-</a:t>
-            </a:r>
-            <a:pPr algn="l" indent="0" marL="0">
-              <a:lnSpc>
-                <a:spcPct val="112000"/>
-              </a:lnSpc>
-              <a:buNone/>
-            </a:pPr>
-            <a:r>
-              <a:rPr lang="en-US" sz="1600" dirty="0">
-                <a:solidFill>
-                  <a:srgbClr val="15233B"/>
-                </a:solidFill>
-                <a:latin typeface="Calibri" pitchFamily="34" charset="0"/>
-                <a:ea typeface="Calibri" pitchFamily="34" charset="-122"/>
-                <a:cs typeface="Calibri" pitchFamily="34" charset="-120"/>
-              </a:rPr>
-              <a:t>So I moved the question to </a:t>
-            </a:r>
-            <a:pPr algn="l" indent="0" marL="0">
-              <a:lnSpc>
-                <a:spcPct val="112000"/>
-              </a:lnSpc>
-              <a:buNone/>
-            </a:pPr>
-            <a:r>
-              <a:rPr lang="en-US" sz="1600" b="1" dirty="0">
-                <a:solidFill>
-                  <a:srgbClr val="15233B"/>
-                </a:solidFill>
-                <a:latin typeface="Calibri" pitchFamily="34" charset="0"/>
-                <a:ea typeface="Calibri" pitchFamily="34" charset="-122"/>
-                <a:cs typeface="Calibri" pitchFamily="34" charset="-120"/>
-              </a:rPr>
-              <a:t>Leduc poker</a:t>
-            </a:r>
-            <a:pPr algn="l" indent="0" marL="0">
-              <a:lnSpc>
-                <a:spcPct val="112000"/>
-              </a:lnSpc>
-              <a:buNone/>
-            </a:pPr>
-            <a:r>
-              <a:rPr lang="en-US" sz="1600" dirty="0">
-                <a:solidFill>
-                  <a:srgbClr val="15233B"/>
-                </a:solidFill>
-                <a:latin typeface="Calibri" pitchFamily="34" charset="0"/>
-                <a:ea typeface="Calibri" pitchFamily="34" charset="-122"/>
-                <a:cs typeface="Calibri" pitchFamily="34" charset="-120"/>
-              </a:rPr>
-              <a:t> — 936 information states, where OpenSpiel computes exact NashConv — using the same PPO + self-play recipe as the HUNL configs.</a:t>
-            </a:r>
-            <a:endParaRPr lang="en-US" sz="1600" dirty="0"/>
+              <a:t>The Leduc study is the test HUNL cannot run — not a failed reproduction.</a:t>
+            </a:r>
+            <a:endParaRPr lang="en-US" sz="1800" dirty="0"/>
           </a:p>
         </p:txBody>
       </p:sp>
@@ -9925,7 +6343,7 @@
             <a:avLst/>
           </a:prstGeom>
           <a:solidFill>
-            <a:srgbClr val="2563EB"/>
+            <a:srgbClr val="DC2626"/>
           </a:solidFill>
           <a:ln/>
         </p:spPr>
@@ -9951,19 +6369,19 @@
           <a:bodyPr wrap="square" lIns="0" tIns="0" rIns="0" bIns="0" rtlCol="0" anchor="ctr"/>
           <a:lstStyle/>
           <a:p>
-            <a:pPr algn="l" indent="0" marL="0">
+            <a:pPr indent="0" marL="0">
               <a:buNone/>
             </a:pPr>
             <a:r>
               <a:rPr lang="en-US" sz="1200" b="1" spc="200" kern="0" dirty="0">
                 <a:solidFill>
-                  <a:srgbClr val="2563EB"/>
+                  <a:srgbClr val="DC2626"/>
                 </a:solidFill>
                 <a:latin typeface="Calibri" pitchFamily="34" charset="0"/>
                 <a:ea typeface="Calibri" pitchFamily="34" charset="-122"/>
                 <a:cs typeface="Calibri" pitchFamily="34" charset="-120"/>
               </a:rPr>
-              <a:t>THE RIGOROUS CORE</a:t>
+              <a:t>SCALED RUN</a:t>
             </a:r>
             <a:endParaRPr lang="en-US" sz="1200" dirty="0"/>
           </a:p>
@@ -9978,7 +6396,7 @@
         <p:spPr>
           <a:xfrm>
             <a:off x="566928" y="841248"/>
-            <a:ext cx="11055096" cy="1143000"/>
+            <a:ext cx="11055096" cy="1005840"/>
           </a:xfrm>
           <a:prstGeom prst="rect">
             <a:avLst/>
@@ -9997,7 +6415,7 @@
               <a:buNone/>
             </a:pPr>
             <a:r>
-              <a:rPr lang="en-US" sz="2500" b="1" dirty="0">
+              <a:rPr lang="en-US" sz="2400" b="1" dirty="0">
                 <a:solidFill>
                   <a:srgbClr val="15233B"/>
                 </a:solidFill>
@@ -10005,15 +6423,54 @@
                 <a:ea typeface="Georgia" pitchFamily="34" charset="-122"/>
                 <a:cs typeface="Georgia" pitchFamily="34" charset="-120"/>
               </a:rPr>
-              <a:t>On Leduc, where exploitability is exact: the raw PPO iterate cycles; only strategy-averaging is non-divergent.</a:t>
-            </a:r>
-            <a:endParaRPr lang="en-US" sz="2500" dirty="0"/>
-          </a:p>
-        </p:txBody>
-      </p:sp>
-      <p:sp>
-        <p:nvSpPr>
-          <p:cNvPr id="5" name="Shape 3"/>
+              <a:t>Regressed −511 bb/100 against the champion it started from.</a:t>
+            </a:r>
+            <a:endParaRPr lang="en-US" sz="2400" dirty="0"/>
+          </a:p>
+        </p:txBody>
+      </p:sp>
+      <p:sp>
+        <p:nvSpPr>
+          <p:cNvPr id="5" name="Text 3"/>
+          <p:cNvSpPr/>
+          <p:nvPr/>
+        </p:nvSpPr>
+        <p:spPr>
+          <a:xfrm>
+            <a:off x="566928" y="1847088"/>
+            <a:ext cx="11055096" cy="384048"/>
+          </a:xfrm>
+          <a:prstGeom prst="rect">
+            <a:avLst/>
+          </a:prstGeom>
+          <a:noFill/>
+          <a:ln/>
+        </p:spPr>
+        <p:txBody>
+          <a:bodyPr wrap="square" lIns="0" tIns="0" rIns="0" bIns="0" rtlCol="0" anchor="t"/>
+          <a:lstStyle/>
+          <a:p>
+            <a:pPr algn="l" indent="0" marL="0">
+              <a:buNone/>
+            </a:pPr>
+            <a:r>
+              <a:rPr lang="en-US" sz="1300" dirty="0">
+                <a:solidFill>
+                  <a:srgbClr val="5B6B82"/>
+                </a:solidFill>
+                <a:latin typeface="Calibri" pitchFamily="34" charset="0"/>
+                <a:ea typeface="Calibri" pitchFamily="34" charset="-122"/>
+                <a:cs typeface="Calibri" pitchFamily="34" charset="-120"/>
+              </a:rPr>
+              <a:t>90k GPU iterations (~9×10⁷ hands)  ·  vectorized collector (30–100×)  ·  PFSP fix  ·  Trinal-Clip  ·  warm-started from the 21k champion</a:t>
+            </a:r>
+            <a:endParaRPr lang="en-US" sz="1300" dirty="0"/>
+          </a:p>
+        </p:txBody>
+      </p:sp>
+      <p:sp>
+        <p:nvSpPr>
+          <p:cNvPr id="6" name="Shape 4"/>
           <p:cNvSpPr/>
           <p:nvPr/>
         </p:nvSpPr>
@@ -10036,7 +6493,7 @@
       </p:sp>
       <p:sp>
         <p:nvSpPr>
-          <p:cNvPr id="6" name="Text 4"/>
+          <p:cNvPr id="7" name="Text 5"/>
           <p:cNvSpPr/>
           <p:nvPr/>
         </p:nvSpPr>
@@ -10075,7 +6532,7 @@
       </p:sp>
       <p:sp>
         <p:nvSpPr>
-          <p:cNvPr id="7" name="Text 5"/>
+          <p:cNvPr id="8" name="Text 6"/>
           <p:cNvSpPr/>
           <p:nvPr/>
         </p:nvSpPr>
@@ -10114,7 +6571,7 @@
       </p:sp>
       <p:pic>
         <p:nvPicPr>
-          <p:cNvPr id="8" name="Image 0" descr="../docs/figures/deck/04_leduc_convergence.png">    </p:cNvPr>
+          <p:cNvPr id="9" name="Image 0" descr="../docs/figures/deck/02_metric_mirage.png">    </p:cNvPr>
           <p:cNvPicPr>
             <a:picLocks noChangeAspect="1"/>
           </p:cNvPicPr>
@@ -10128,8 +6585,8 @@
         </p:blipFill>
         <p:spPr>
           <a:xfrm>
-            <a:off x="2441425" y="2148840"/>
-            <a:ext cx="7306101" cy="4023360"/>
+            <a:off x="671121" y="2423160"/>
+            <a:ext cx="10846709" cy="3776472"/>
           </a:xfrm>
           <a:prstGeom prst="rect">
             <a:avLst/>
